--- a/docs/presentations/apresentacao_I_AV1.pptx
+++ b/docs/presentations/apresentacao_I_AV1.pptx
@@ -3517,14 +3517,14 @@
                 <a:gridCol w="3780000"/>
                 <a:gridCol w="3780000"/>
               </a:tblGrid>
-              <a:tr h="540000">
+              <a:tr h="480000">
                 <a:tc>
                   <a:txBody>
                     <a:bodyPr/>
                     <a:lstStyle/>
                     <a:p>
                       <a:r>
-                        <a:rPr sz="1700" b="1">
+                        <a:rPr sz="1500" b="1">
                           <a:solidFill>
                             <a:srgbClr val="FFFFFF"/>
                           </a:solidFill>
@@ -3546,7 +3546,7 @@
                     <a:lstStyle/>
                     <a:p>
                       <a:r>
-                        <a:rPr sz="1700" b="1">
+                        <a:rPr sz="1500" b="1">
                           <a:solidFill>
                             <a:srgbClr val="FFFFFF"/>
                           </a:solidFill>
@@ -3568,7 +3568,7 @@
                     <a:lstStyle/>
                     <a:p>
                       <a:r>
-                        <a:rPr sz="1700" b="1">
+                        <a:rPr sz="1500" b="1">
                           <a:solidFill>
                             <a:srgbClr val="FFFFFF"/>
                           </a:solidFill>
@@ -3585,14 +3585,14 @@
                   </a:tcPr>
                 </a:tc>
               </a:tr>
-              <a:tr h="540000">
+              <a:tr h="480000">
                 <a:tc>
                   <a:txBody>
                     <a:bodyPr/>
                     <a:lstStyle/>
                     <a:p>
                       <a:r>
-                        <a:rPr sz="1700" b="0">
+                        <a:rPr sz="1500" b="0">
                           <a:solidFill>
                             <a:srgbClr val="0D0F14"/>
                           </a:solidFill>
@@ -3614,7 +3614,7 @@
                     <a:lstStyle/>
                     <a:p>
                       <a:r>
-                        <a:rPr sz="1700" b="0">
+                        <a:rPr sz="1500" b="0">
                           <a:solidFill>
                             <a:srgbClr val="0D0F14"/>
                           </a:solidFill>
@@ -3636,13 +3636,13 @@
                     <a:lstStyle/>
                     <a:p>
                       <a:r>
-                        <a:rPr sz="1700" b="0">
+                        <a:rPr sz="1500" b="0">
                           <a:solidFill>
                             <a:srgbClr val="0D0F14"/>
                           </a:solidFill>
                           <a:latin typeface="Plus Jakarta Sans"/>
                         </a:rPr>
-                        <a:t>⟪após a coleta⟫</a:t>
+                        <a:t>ver testes_unidade.md</a:t>
                       </a:r>
                     </a:p>
                   </a:txBody>
@@ -3653,14 +3653,14 @@
                   </a:tcPr>
                 </a:tc>
               </a:tr>
-              <a:tr h="540000">
+              <a:tr h="480000">
                 <a:tc>
                   <a:txBody>
                     <a:bodyPr/>
                     <a:lstStyle/>
                     <a:p>
                       <a:r>
-                        <a:rPr sz="1700" b="0">
+                        <a:rPr sz="1500" b="0">
                           <a:solidFill>
                             <a:srgbClr val="0D0F14"/>
                           </a:solidFill>
@@ -3682,7 +3682,7 @@
                     <a:lstStyle/>
                     <a:p>
                       <a:r>
-                        <a:rPr sz="1700" b="0">
+                        <a:rPr sz="1500" b="0">
                           <a:solidFill>
                             <a:srgbClr val="0D0F14"/>
                           </a:solidFill>
@@ -3704,13 +3704,13 @@
                     <a:lstStyle/>
                     <a:p>
                       <a:r>
-                        <a:rPr sz="1700" b="0">
+                        <a:rPr sz="1500" b="0">
                           <a:solidFill>
                             <a:srgbClr val="0D0F14"/>
                           </a:solidFill>
                           <a:latin typeface="Plus Jakarta Sans"/>
                         </a:rPr>
-                        <a:t>⟪após a coleta⟫</a:t>
+                        <a:t>ver corrida_10_execucoes.md</a:t>
                       </a:r>
                     </a:p>
                   </a:txBody>
@@ -3721,14 +3721,14 @@
                   </a:tcPr>
                 </a:tc>
               </a:tr>
-              <a:tr h="540000">
+              <a:tr h="480000">
                 <a:tc>
                   <a:txBody>
                     <a:bodyPr/>
                     <a:lstStyle/>
                     <a:p>
                       <a:r>
-                        <a:rPr sz="1700" b="0">
+                        <a:rPr sz="1500" b="0">
                           <a:solidFill>
                             <a:srgbClr val="0D0F14"/>
                           </a:solidFill>
@@ -3750,7 +3750,7 @@
                     <a:lstStyle/>
                     <a:p>
                       <a:r>
-                        <a:rPr sz="1700" b="0">
+                        <a:rPr sz="1500" b="0">
                           <a:solidFill>
                             <a:srgbClr val="0D0F14"/>
                           </a:solidFill>
@@ -3772,13 +3772,13 @@
                     <a:lstStyle/>
                     <a:p>
                       <a:r>
-                        <a:rPr sz="1700" b="0">
+                        <a:rPr sz="1500" b="0">
                           <a:solidFill>
                             <a:srgbClr val="0D0F14"/>
                           </a:solidFill>
                           <a:latin typeface="Plus Jakarta Sans"/>
                         </a:rPr>
-                        <a:t>⟪após a coleta⟫</a:t>
+                        <a:t>36,2 min · IMU 50,0 Hz · 0 leituras perdidas</a:t>
                       </a:r>
                     </a:p>
                   </a:txBody>
@@ -3789,20 +3789,20 @@
                   </a:tcPr>
                 </a:tc>
               </a:tr>
-              <a:tr h="540000">
+              <a:tr h="480000">
                 <a:tc>
                   <a:txBody>
                     <a:bodyPr/>
                     <a:lstStyle/>
                     <a:p>
                       <a:r>
-                        <a:rPr sz="1700" b="0">
+                        <a:rPr sz="1500" b="0">
                           <a:solidFill>
                             <a:srgbClr val="0D0F14"/>
                           </a:solidFill>
                           <a:latin typeface="Plus Jakarta Sans"/>
                         </a:rPr>
-                        <a:t>Consumo</a:t>
+                        <a:t>Posição com a tela apagada</a:t>
                       </a:r>
                     </a:p>
                   </a:txBody>
@@ -3818,13 +3818,13 @@
                     <a:lstStyle/>
                     <a:p>
                       <a:r>
-                        <a:rPr sz="1700" b="0">
+                        <a:rPr sz="1500" b="0">
                           <a:solidFill>
                             <a:srgbClr val="0D0F14"/>
                           </a:solidFill>
                           <a:latin typeface="Plus Jakarta Sans"/>
                         </a:rPr>
-                        <a:t>bateria durante o trecho</a:t>
+                        <a:t>mesmo trecho</a:t>
                       </a:r>
                     </a:p>
                   </a:txBody>
@@ -3840,13 +3840,13 @@
                     <a:lstStyle/>
                     <a:p>
                       <a:r>
-                        <a:rPr sz="1700" b="0">
+                        <a:rPr sz="1500" b="0">
                           <a:solidFill>
                             <a:srgbClr val="0D0F14"/>
                           </a:solidFill>
                           <a:latin typeface="Plus Jakarta Sans"/>
                         </a:rPr>
-                        <a:t>⟪após a coleta⟫</a:t>
+                        <a:t>GPS em 62% do tempo · sem GPS, rede a cada ≤ 20 s (r68 100 m)</a:t>
                       </a:r>
                     </a:p>
                   </a:txBody>
@@ -3857,20 +3857,20 @@
                   </a:tcPr>
                 </a:tc>
               </a:tr>
-              <a:tr h="540000">
+              <a:tr h="480000">
                 <a:tc>
                   <a:txBody>
                     <a:bodyPr/>
                     <a:lstStyle/>
                     <a:p>
                       <a:r>
-                        <a:rPr sz="1700" b="0">
+                        <a:rPr sz="1500" b="0">
                           <a:solidFill>
                             <a:srgbClr val="0D0F14"/>
                           </a:solidFill>
                           <a:latin typeface="Plus Jakarta Sans"/>
                         </a:rPr>
-                        <a:t>Razão de otimismo</a:t>
+                        <a:t>Consumo</a:t>
                       </a:r>
                     </a:p>
                   </a:txBody>
@@ -3886,13 +3886,13 @@
                     <a:lstStyle/>
                     <a:p>
                       <a:r>
-                        <a:rPr sz="1700" b="0">
+                        <a:rPr sz="1500" b="0">
                           <a:solidFill>
                             <a:srgbClr val="0D0F14"/>
                           </a:solidFill>
                           <a:latin typeface="Plus Jakarta Sans"/>
                         </a:rPr>
-                        <a:t>aparelho parado, céu aberto</a:t>
+                        <a:t>bateria durante o trecho</a:t>
                       </a:r>
                     </a:p>
                   </a:txBody>
@@ -3908,13 +3908,13 @@
                     <a:lstStyle/>
                     <a:p>
                       <a:r>
-                        <a:rPr sz="1700" b="0">
+                        <a:rPr sz="1500" b="0">
                           <a:solidFill>
                             <a:srgbClr val="0D0F14"/>
                           </a:solidFill>
                           <a:latin typeface="Plus Jakarta Sans"/>
                         </a:rPr>
-                        <a:t>⟪após a coleta⟫</a:t>
+                        <a:t>8,3 %/h</a:t>
                       </a:r>
                     </a:p>
                   </a:txBody>
@@ -3925,20 +3925,20 @@
                   </a:tcPr>
                 </a:tc>
               </a:tr>
-              <a:tr h="540000">
+              <a:tr h="480000">
                 <a:tc>
                   <a:txBody>
                     <a:bodyPr/>
                     <a:lstStyle/>
                     <a:p>
                       <a:r>
-                        <a:rPr sz="1700" b="0">
+                        <a:rPr sz="1500" b="0">
                           <a:solidFill>
                             <a:srgbClr val="0D0F14"/>
                           </a:solidFill>
                           <a:latin typeface="Plus Jakarta Sans"/>
                         </a:rPr>
-                        <a:t>Resíduo RMS</a:t>
+                        <a:t>Razão de otimismo</a:t>
                       </a:r>
                     </a:p>
                   </a:txBody>
@@ -3954,13 +3954,13 @@
                     <a:lstStyle/>
                     <a:p>
                       <a:r>
-                        <a:rPr sz="1700" b="0">
+                        <a:rPr sz="1500" b="0">
                           <a:solidFill>
                             <a:srgbClr val="0D0F14"/>
                           </a:solidFill>
                           <a:latin typeface="Plus Jakarta Sans"/>
                         </a:rPr>
-                        <a:t>≥ 3 janelas reais</a:t>
+                        <a:t>aparelho parado, mesma sessão</a:t>
                       </a:r>
                     </a:p>
                   </a:txBody>
@@ -3976,13 +3976,13 @@
                     <a:lstStyle/>
                     <a:p>
                       <a:r>
-                        <a:rPr sz="1700" b="0">
+                        <a:rPr sz="1500" b="0">
                           <a:solidFill>
                             <a:srgbClr val="0D0F14"/>
                           </a:solidFill>
                           <a:latin typeface="Plus Jakarta Sans"/>
                         </a:rPr>
-                        <a:t>⟪após a coleta⟫</a:t>
+                        <a:t>3,32</a:t>
                       </a:r>
                     </a:p>
                   </a:txBody>
@@ -3993,20 +3993,20 @@
                   </a:tcPr>
                 </a:tc>
               </a:tr>
-              <a:tr h="540000">
+              <a:tr h="480000">
                 <a:tc>
                   <a:txBody>
                     <a:bodyPr/>
                     <a:lstStyle/>
                     <a:p>
                       <a:r>
-                        <a:rPr sz="1700" b="0">
+                        <a:rPr sz="1500" b="0">
                           <a:solidFill>
                             <a:srgbClr val="0D0F14"/>
                           </a:solidFill>
                           <a:latin typeface="Plus Jakarta Sans"/>
                         </a:rPr>
-                        <a:t>Salto mínimo detectável</a:t>
+                        <a:t>Resíduo RMS</a:t>
                       </a:r>
                     </a:p>
                   </a:txBody>
@@ -4022,13 +4022,13 @@
                     <a:lstStyle/>
                     <a:p>
                       <a:r>
-                        <a:rPr sz="1700" b="0">
+                        <a:rPr sz="1500" b="0">
                           <a:solidFill>
                             <a:srgbClr val="0D0F14"/>
                           </a:solidFill>
                           <a:latin typeface="Plus Jakarta Sans"/>
                         </a:rPr>
-                        <a:t>≥ 90% de detecção</a:t>
+                        <a:t>85 janelas reais da caminhada</a:t>
                       </a:r>
                     </a:p>
                   </a:txBody>
@@ -4044,13 +4044,13 @@
                     <a:lstStyle/>
                     <a:p>
                       <a:r>
-                        <a:rPr sz="1700" b="0">
+                        <a:rPr sz="1500" b="0">
                           <a:solidFill>
                             <a:srgbClr val="0D0F14"/>
                           </a:solidFill>
                           <a:latin typeface="Plus Jakarta Sans"/>
                         </a:rPr>
-                        <a:t>⟪após a coleta⟫</a:t>
+                        <a:t>0,24 m → 2e-15 m</a:t>
                       </a:r>
                     </a:p>
                   </a:txBody>
@@ -4061,6 +4061,74 @@
                   </a:tcPr>
                 </a:tc>
               </a:tr>
+              <a:tr h="480000">
+                <a:tc>
+                  <a:txBody>
+                    <a:bodyPr/>
+                    <a:lstStyle/>
+                    <a:p>
+                      <a:r>
+                        <a:rPr sz="1500" b="0">
+                          <a:solidFill>
+                            <a:srgbClr val="0D0F14"/>
+                          </a:solidFill>
+                          <a:latin typeface="Plus Jakarta Sans"/>
+                        </a:rPr>
+                        <a:t>Salto mínimo detectável</a:t>
+                      </a:r>
+                    </a:p>
+                  </a:txBody>
+                  <a:tcPr>
+                    <a:solidFill>
+                      <a:srgbClr val="F4F5F9"/>
+                    </a:solidFill>
+                  </a:tcPr>
+                </a:tc>
+                <a:tc>
+                  <a:txBody>
+                    <a:bodyPr/>
+                    <a:lstStyle/>
+                    <a:p>
+                      <a:r>
+                        <a:rPr sz="1500" b="0">
+                          <a:solidFill>
+                            <a:srgbClr val="0D0F14"/>
+                          </a:solidFill>
+                          <a:latin typeface="Plus Jakarta Sans"/>
+                        </a:rPr>
+                        <a:t>≥ 90% de detecção</a:t>
+                      </a:r>
+                    </a:p>
+                  </a:txBody>
+                  <a:tcPr>
+                    <a:solidFill>
+                      <a:srgbClr val="F4F5F9"/>
+                    </a:solidFill>
+                  </a:tcPr>
+                </a:tc>
+                <a:tc>
+                  <a:txBody>
+                    <a:bodyPr/>
+                    <a:lstStyle/>
+                    <a:p>
+                      <a:r>
+                        <a:rPr sz="1500" b="0">
+                          <a:solidFill>
+                            <a:srgbClr val="0D0F14"/>
+                          </a:solidFill>
+                          <a:latin typeface="Plus Jakarta Sans"/>
+                        </a:rPr>
+                        <a:t>5 m</a:t>
+                      </a:r>
+                    </a:p>
+                  </a:txBody>
+                  <a:tcPr>
+                    <a:solidFill>
+                      <a:srgbClr val="F4F5F9"/>
+                    </a:solidFill>
+                  </a:tcPr>
+                </a:tc>
+              </a:tr>
             </a:tbl>
           </a:graphicData>
         </a:graphic>
@@ -4099,7 +4167,7 @@
                 </a:solidFill>
                 <a:latin typeface="Plus Jakarta Sans"/>
               </a:rPr>
-              <a:t>Aparelho: ⟪modelo, Android⟫ · local: ⟪campus⟫ · data: ⟪data⟫ · comando: scripts\av1_evidencias.ps1 · semente 20261020</a:t>
+              <a:t>Aparelho: Samsung SM-S926B · local: campus da UFLA · coletas: 22/10/2026 · comando: scripts\av1_evidencias.ps1 · semente 20261020</a:t>
             </a:r>
           </a:p>
         </p:txBody>
@@ -4311,7 +4379,7 @@
               </a:spcAft>
             </a:pPr>
             <a:r>
-              <a:rPr sz="1900" b="1">
+              <a:rPr sz="1700" b="1">
                 <a:solidFill>
                   <a:srgbClr val="0D0F14"/>
                 </a:solidFill>
@@ -4327,7 +4395,7 @@
               </a:spcAft>
             </a:pPr>
             <a:r>
-              <a:rPr sz="1900" b="0">
+              <a:rPr sz="1700" b="0">
                 <a:solidFill>
                   <a:srgbClr val="0D0F14"/>
                 </a:solidFill>
@@ -4343,7 +4411,7 @@
               </a:spcAft>
             </a:pPr>
             <a:r>
-              <a:rPr sz="1900" b="0">
+              <a:rPr sz="1700" b="0">
                 <a:solidFill>
                   <a:srgbClr val="0D0F14"/>
                 </a:solidFill>
@@ -4359,23 +4427,39 @@
               </a:spcAft>
             </a:pPr>
             <a:r>
-              <a:rPr sz="1900" b="0">
-                <a:solidFill>
-                  <a:srgbClr val="0D0F14"/>
-                </a:solidFill>
-                <a:latin typeface="Plus Jakarta Sans"/>
-              </a:rPr>
-              <a:t>IMU sem reconciliação: a API não informa σ por eixo.</a:t>
-            </a:r>
-          </a:p>
-          <a:p>
-            <a:pPr algn="l">
-              <a:spcAft>
-                <a:spcPts val="400"/>
-              </a:spcAft>
-            </a:pPr>
-            <a:r>
-              <a:rPr sz="1900" b="0">
+              <a:rPr sz="1700" b="0">
+                <a:solidFill>
+                  <a:srgbClr val="0D0F14"/>
+                </a:solidFill>
+                <a:latin typeface="Plus Jakarta Sans"/>
+              </a:rPr>
+              <a:t>Sessão gravada: GPS parou ~3 min após a tela apagar (faltava a localização em segundo plano; corrigido e conferido em teste curto).</a:t>
+            </a:r>
+          </a:p>
+          <a:p>
+            <a:pPr algn="l">
+              <a:spcAft>
+                <a:spcPts val="400"/>
+              </a:spcAft>
+            </a:pPr>
+            <a:r>
+              <a:rPr sz="1700" b="0">
+                <a:solidFill>
+                  <a:srgbClr val="0D0F14"/>
+                </a:solidFill>
+                <a:latin typeface="Plus Jakarta Sans"/>
+              </a:rPr>
+              <a:t>Parado, o receptor retém a posição: a razão de otimismo mistura viés inicial e posição congelada.</a:t>
+            </a:r>
+          </a:p>
+          <a:p>
+            <a:pPr algn="l">
+              <a:spcAft>
+                <a:spcPts val="400"/>
+              </a:spcAft>
+            </a:pPr>
+            <a:r>
+              <a:rPr sz="1700" b="0">
                 <a:solidFill>
                   <a:srgbClr val="0D0F14"/>
                 </a:solidFill>
@@ -4441,6 +4525,22 @@
                 <a:latin typeface="Plus Jakarta Sans"/>
               </a:rPr>
               <a:t>AV2</a:t>
+            </a:r>
+          </a:p>
+          <a:p>
+            <a:pPr algn="l">
+              <a:spcAft>
+                <a:spcPts val="400"/>
+              </a:spcAft>
+            </a:pPr>
+            <a:r>
+              <a:rPr sz="1900" b="0">
+                <a:solidFill>
+                  <a:srgbClr val="0D0F14"/>
+                </a:solidFill>
+                <a:latin typeface="Plus Jakarta Sans"/>
+              </a:rPr>
+              <a:t>Pedir a localização em segundo plano dentro do app e regravar os 30 min com GPS</a:t>
             </a:r>
           </a:p>
           <a:p>
@@ -5723,129 +5823,30 @@
           </a:p>
         </p:txBody>
       </p:sp>
-      <p:sp>
-        <p:nvSpPr>
-          <p:cNvPr id="7" name="Rounded Rectangle 6"/>
-          <p:cNvSpPr/>
+      <p:pic>
+        <p:nvPicPr>
+          <p:cNvPr id="7" name="Picture 6" descr="dispersao_estatica.png"/>
+          <p:cNvPicPr>
+            <a:picLocks noChangeAspect="1"/>
+          </p:cNvPicPr>
           <p:nvPr/>
-        </p:nvSpPr>
-        <p:spPr>
-          <a:xfrm>
-            <a:off x="6660000" y="1080000"/>
-            <a:ext cx="5040000" cy="3240000"/>
-          </a:xfrm>
-          <a:prstGeom prst="roundRect">
-            <a:avLst>
-              <a:gd name="adj" fmla="val 6000"/>
-            </a:avLst>
+        </p:nvPicPr>
+        <p:blipFill>
+          <a:blip r:embed="rId2"/>
+          <a:stretch>
+            <a:fillRect/>
+          </a:stretch>
+        </p:blipFill>
+        <p:spPr>
+          <a:xfrm>
+            <a:off x="6660000" y="1007999"/>
+            <a:ext cx="4536539" cy="4860000"/>
+          </a:xfrm>
+          <a:prstGeom prst="rect">
+            <a:avLst/>
           </a:prstGeom>
-          <a:solidFill>
-            <a:srgbClr val="F4F5F9"/>
-          </a:solidFill>
-          <a:ln>
-            <a:noFill/>
-          </a:ln>
-          <a:effectLst/>
-        </p:spPr>
-        <p:style>
-          <a:lnRef idx="1">
-            <a:schemeClr val="accent1"/>
-          </a:lnRef>
-          <a:fillRef idx="3">
-            <a:schemeClr val="accent1"/>
-          </a:fillRef>
-          <a:effectRef idx="2">
-            <a:schemeClr val="accent1"/>
-          </a:effectRef>
-          <a:fontRef idx="minor">
-            <a:schemeClr val="lt1"/>
-          </a:fontRef>
-        </p:style>
-        <p:txBody>
-          <a:bodyPr rtlCol="0" anchor="t" wrap="square" lIns="90000" rIns="90000" tIns="54000" bIns="54000"/>
-          <a:lstStyle/>
-          <a:p>
-            <a:pPr algn="l">
-              <a:spcAft>
-                <a:spcPts val="400"/>
-              </a:spcAft>
-            </a:pPr>
-            <a:r>
-              <a:rPr sz="1500" b="1">
-                <a:solidFill>
-                  <a:srgbClr val="0D0F14"/>
-                </a:solidFill>
-                <a:latin typeface="Plus Jakarta Sans"/>
-              </a:rPr>
-              <a:t>Ensaio estático (4.5)</a:t>
-            </a:r>
-          </a:p>
-          <a:p>
-            <a:pPr algn="l">
-              <a:spcAft>
-                <a:spcPts val="400"/>
-              </a:spcAft>
-            </a:pPr>
-            <a:r>
-              <a:rPr sz="1500" b="0">
-                <a:solidFill>
-                  <a:srgbClr val="0D0F14"/>
-                </a:solidFill>
-                <a:latin typeface="Plus Jakarta Sans"/>
-              </a:rPr>
-              <a:t>razão de otimismo = σ medido / σ declarado = ⟪após a coleta⟫</a:t>
-            </a:r>
-          </a:p>
-          <a:p>
-            <a:pPr algn="l">
-              <a:spcAft>
-                <a:spcPts val="400"/>
-              </a:spcAft>
-            </a:pPr>
-            <a:r>
-              <a:rPr sz="1500" b="0">
-                <a:solidFill>
-                  <a:srgbClr val="0D0F14"/>
-                </a:solidFill>
-                <a:latin typeface="Plus Jakarta Sans"/>
-              </a:rPr>
-              <a:t>fixos dentro do próprio r68: ⟪após a coleta⟫ (esperado 68%)</a:t>
-            </a:r>
-          </a:p>
-          <a:p>
-            <a:pPr algn="l">
-              <a:spcAft>
-                <a:spcPts val="400"/>
-              </a:spcAft>
-            </a:pPr>
-            <a:r>
-              <a:rPr sz="1500" b="0">
-                <a:solidFill>
-                  <a:srgbClr val="0D0F14"/>
-                </a:solidFill>
-                <a:latin typeface="Plus Jakarta Sans"/>
-              </a:rPr>
-              <a:t/>
-            </a:r>
-          </a:p>
-          <a:p>
-            <a:pPr algn="l">
-              <a:spcAft>
-                <a:spcPts val="400"/>
-              </a:spcAft>
-            </a:pPr>
-            <a:r>
-              <a:rPr sz="1500" b="0">
-                <a:solidFill>
-                  <a:srgbClr val="0D0F14"/>
-                </a:solidFill>
-                <a:latin typeface="Plus Jakarta Sans"/>
-              </a:rPr>
-              <a:t>&gt; 1: o sensor promete mais do que entrega → Σ pequena demais → falsos alarmes.</a:t>
-            </a:r>
-          </a:p>
-        </p:txBody>
-      </p:sp>
+        </p:spPr>
+      </p:pic>
     </p:spTree>
   </p:cSld>
   <p:clrMapOvr>
@@ -6646,7 +6647,7 @@
                 </a:solidFill>
                 <a:latin typeface="Plus Jakarta Sans"/>
               </a:rPr>
-              <a:t>vizinhos SEM detector: ⟪após a coleta⟫</a:t>
+              <a:t>vizinhos SEM detector: 2,94 m</a:t>
             </a:r>
           </a:p>
           <a:p>
@@ -6662,7 +6663,7 @@
                 </a:solidFill>
                 <a:latin typeface="Plus Jakarta Sans"/>
               </a:rPr>
-              <a:t>vizinhos COM detector: ⟪após a coleta⟫</a:t>
+              <a:t>vizinhos COM detector: 0,07 m</a:t>
             </a:r>
           </a:p>
           <a:p>
@@ -7592,7 +7593,7 @@
                 </a:solidFill>
                 <a:latin typeface="Plus Jakarta Sans"/>
               </a:rPr>
-              <a:t>menor salto com ≥ 90% de detecção = ⟪após a coleta⟫</a:t>
+              <a:t>menor salto com ≥ 90% de detecção = 5 m</a:t>
             </a:r>
           </a:p>
           <a:p>
@@ -7608,7 +7609,7 @@
                 </a:solidFill>
                 <a:latin typeface="Plus Jakarta Sans"/>
               </a:rPr>
-              <a:t>Falso alarme sem salto: ⟪após a coleta⟫</a:t>
+              <a:t>Falso alarme sem salto: 0%</a:t>
             </a:r>
           </a:p>
         </p:txBody>
@@ -7894,7 +7895,7 @@
                 </a:solidFill>
                 <a:latin typeface="Plus Jakarta Sans"/>
               </a:rPr>
-              <a:t>notificação na tela de bloqueio: Fixos GNSS · IMU · tempo subindo (ativado 30+ min antes)</a:t>
+              <a:t>notificação na tela de bloqueio: fixos GNSS, IMU e tempo subindo (ativado 30+ min antes; "Permitir o tempo todo", economia de energia desligada)</a:t>
             </a:r>
           </a:p>
         </p:txBody>

--- a/docs/presentations/apresentacao_I_AV1.pptx
+++ b/docs/presentations/apresentacao_I_AV1.pptx
@@ -3778,7 +3778,7 @@
                           </a:solidFill>
                           <a:latin typeface="Plus Jakarta Sans"/>
                         </a:rPr>
-                        <a:t>36,2 min · IMU 50,0 Hz · 0 leituras perdidas</a:t>
+                        <a:t>36,3 min · IMU 50,1 Hz · 0 leituras perdidas</a:t>
                       </a:r>
                     </a:p>
                   </a:txBody>
@@ -3802,7 +3802,7 @@
                           </a:solidFill>
                           <a:latin typeface="Plus Jakarta Sans"/>
                         </a:rPr>
-                        <a:t>Posição com a tela apagada</a:t>
+                        <a:t>GPS com a tela apagada</a:t>
                       </a:r>
                     </a:p>
                   </a:txBody>
@@ -3824,7 +3824,7 @@
                           </a:solidFill>
                           <a:latin typeface="Plus Jakarta Sans"/>
                         </a:rPr>
-                        <a:t>mesmo trecho</a:t>
+                        <a:t>mesmo trecho; antes da D-23 entre parênteses</a:t>
                       </a:r>
                     </a:p>
                   </a:txBody>
@@ -3846,7 +3846,7 @@
                           </a:solidFill>
                           <a:latin typeface="Plus Jakarta Sans"/>
                         </a:rPr>
-                        <a:t>GPS em 62% do tempo · sem GPS, rede a cada ≤ 20 s (r68 100 m)</a:t>
+                        <a:t>87% do tempo (62%) · sem GPS, rede a cada ≤ 20 s</a:t>
                       </a:r>
                     </a:p>
                   </a:txBody>
@@ -3914,7 +3914,7 @@
                           </a:solidFill>
                           <a:latin typeface="Plus Jakarta Sans"/>
                         </a:rPr>
-                        <a:t>8,3 %/h</a:t>
+                        <a:t>5,0 %/h</a:t>
                       </a:r>
                     </a:p>
                   </a:txBody>
@@ -3960,7 +3960,7 @@
                           </a:solidFill>
                           <a:latin typeface="Plus Jakarta Sans"/>
                         </a:rPr>
-                        <a:t>aparelho parado, mesma sessão</a:t>
+                        <a:t>parado; 99% dos fixos retidos</a:t>
                       </a:r>
                     </a:p>
                   </a:txBody>
@@ -3982,7 +3982,7 @@
                           </a:solidFill>
                           <a:latin typeface="Plus Jakarta Sans"/>
                         </a:rPr>
-                        <a:t>3,32</a:t>
+                        <a:t>0,56 (não mede o ruído)</a:t>
                       </a:r>
                     </a:p>
                   </a:txBody>
@@ -4167,7 +4167,7 @@
                 </a:solidFill>
                 <a:latin typeface="Plus Jakarta Sans"/>
               </a:rPr>
-              <a:t>Aparelho: Samsung SM-S926B · local: campus da UFLA · coletas: 22/10/2026 · comando: scripts\av1_evidencias.ps1 · semente 20261020</a:t>
+              <a:t>Aparelho: Samsung SM-S926B · coletas: 22/10/2026, campus da UFLA (sessão bloqueada de 21h12 fora do campus, coordenadas deslocadas) · scripts\av1_evidencias.ps1 · semente 20261020</a:t>
             </a:r>
           </a:p>
         </p:txBody>
@@ -4433,7 +4433,7 @@
                 </a:solidFill>
                 <a:latin typeface="Plus Jakarta Sans"/>
               </a:rPr>
-              <a:t>Sessão gravada: GPS parou ~3 min após a tela apagar (faltava a localização em segundo plano; corrigido e conferido em teste curto).</a:t>
+              <a:t>Sem localização em segundo plano o GPS parava ~3 min após apagar a tela; com ela, 87% do tempo e uma pausa de 4,5 min sem causa conhecida.</a:t>
             </a:r>
           </a:p>
           <a:p>
@@ -4449,7 +4449,7 @@
                 </a:solidFill>
                 <a:latin typeface="Plus Jakarta Sans"/>
               </a:rPr>
-              <a:t>Parado, o receptor retém a posição: a razão de otimismo mistura viés inicial e posição congelada.</a:t>
+              <a:t>Parado, o receptor retém a posição: o ensaio estático não mede o ruído.</a:t>
             </a:r>
           </a:p>
           <a:p>
@@ -4540,7 +4540,7 @@
                 </a:solidFill>
                 <a:latin typeface="Plus Jakarta Sans"/>
               </a:rPr>
-              <a:t>Pedir a localização em segundo plano dentro do app e regravar os 30 min com GPS</a:t>
+              <a:t>Pedir a localização em segundo plano no app; consumidor IMU com taxa fixa (D-22)</a:t>
             </a:r>
           </a:p>
           <a:p>

--- a/docs/presentations/apresentacao_I_AV1.pptx
+++ b/docs/presentations/apresentacao_I_AV1.pptx
@@ -3450,7 +3450,7 @@
                 </a:solidFill>
                 <a:latin typeface="Plus Jakarta Sans"/>
               </a:rPr>
-              <a:t>Resultados · ⟪quem apresenta⟫ · 5 min</a:t>
+              <a:t>Resultados · 5 min</a:t>
             </a:r>
           </a:p>
         </p:txBody>
@@ -3620,7 +3620,7 @@
                           </a:solidFill>
                           <a:latin typeface="Plus Jakarta Sans"/>
                         </a:rPr>
-                        <a:t>gradlew test</a:t>
+                        <a:t>gradlew test no 710ef50</a:t>
                       </a:r>
                     </a:p>
                   </a:txBody>
@@ -3642,7 +3642,7 @@
                           </a:solidFill>
                           <a:latin typeface="Plus Jakarta Sans"/>
                         </a:rPr>
-                        <a:t>ver testes_unidade.md</a:t>
+                        <a:t>161 testes em 29 classes · 0 falhas</a:t>
                       </a:r>
                     </a:p>
                   </a:txBody>
@@ -3710,7 +3710,7 @@
                           </a:solidFill>
                           <a:latin typeface="Plus Jakarta Sans"/>
                         </a:rPr>
-                        <a:t>ver corrida_10_execucoes.md</a:t>
+                        <a:t>10 de 10 passaram</a:t>
                       </a:r>
                     </a:p>
                   </a:txBody>
@@ -4006,7 +4006,7 @@
                           </a:solidFill>
                           <a:latin typeface="Plus Jakarta Sans"/>
                         </a:rPr>
-                        <a:t>Resíduo RMS</a:t>
+                        <a:t>Resíduo RMS (média)</a:t>
                       </a:r>
                     </a:p>
                   </a:txBody>
@@ -4050,7 +4050,7 @@
                           </a:solidFill>
                           <a:latin typeface="Plus Jakarta Sans"/>
                         </a:rPr>
-                        <a:t>0,24 m → 2e-15 m</a:t>
+                        <a:t>0,24 m → 2·10⁻¹⁵ m</a:t>
                       </a:r>
                     </a:p>
                   </a:txBody>
@@ -4307,7 +4307,7 @@
                 </a:solidFill>
                 <a:latin typeface="Plus Jakarta Sans"/>
               </a:rPr>
-              <a:t>Resultados · ⟪quem apresenta⟫</a:t>
+              <a:t>Resultados</a:t>
             </a:r>
           </a:p>
         </p:txBody>
@@ -4744,7 +4744,7 @@
                 </a:solidFill>
                 <a:latin typeface="Plus Jakarta Sans"/>
               </a:rPr>
-              <a:t>Fundamentação · ⟪quem apresenta⟫</a:t>
+              <a:t>Fundamentação</a:t>
             </a:r>
           </a:p>
         </p:txBody>
@@ -5267,7 +5267,7 @@
                 </a:solidFill>
                 <a:latin typeface="Plus Jakarta Sans"/>
               </a:rPr>
-              <a:t>Fundamentação · ⟪quem apresenta⟫</a:t>
+              <a:t>Fundamentação</a:t>
             </a:r>
           </a:p>
         </p:txBody>
@@ -5610,7 +5610,7 @@
                 </a:solidFill>
                 <a:latin typeface="Plus Jakarta Sans"/>
               </a:rPr>
-              <a:t>Fundamentação · ⟪quem apresenta⟫</a:t>
+              <a:t>Fundamentação</a:t>
             </a:r>
           </a:p>
         </p:txBody>
@@ -5982,7 +5982,7 @@
                 </a:solidFill>
                 <a:latin typeface="Plus Jakarta Sans"/>
               </a:rPr>
-              <a:t>Fundamentação · ⟪quem apresenta⟫</a:t>
+              <a:t>Fundamentação</a:t>
             </a:r>
           </a:p>
         </p:txBody>
@@ -6355,7 +6355,7 @@
                 </a:solidFill>
                 <a:latin typeface="Plus Jakarta Sans"/>
               </a:rPr>
-              <a:t>Fundamentação · ⟪quem apresenta⟫</a:t>
+              <a:t>Fundamentação</a:t>
             </a:r>
           </a:p>
         </p:txBody>
@@ -6819,7 +6819,7 @@
                 </a:solidFill>
                 <a:latin typeface="Plus Jakarta Sans"/>
               </a:rPr>
-              <a:t>Fundamentação · ⟪quem apresenta⟫</a:t>
+              <a:t>Fundamentação</a:t>
             </a:r>
           </a:p>
         </p:txBody>
@@ -7358,7 +7358,7 @@
                 </a:solidFill>
                 <a:latin typeface="Plus Jakarta Sans"/>
               </a:rPr>
-              <a:t>Fundamentação · ⟪quem apresenta⟫</a:t>
+              <a:t>Fundamentação</a:t>
             </a:r>
           </a:p>
         </p:txBody>
@@ -7749,7 +7749,7 @@
                 </a:solidFill>
                 <a:latin typeface="Plus Jakarta Sans"/>
               </a:rPr>
-              <a:t>MVP ao vivo · ⟪quem apresenta⟫ · 9 min</a:t>
+              <a:t>MVP ao vivo · 9 min</a:t>
             </a:r>
           </a:p>
         </p:txBody>

--- a/docs/presentations/apresentacao_I_AV1.pptx
+++ b/docs/presentations/apresentacao_I_AV1.pptx
@@ -5,19 +5,19 @@
     <p:sldMasterId id="2147483648" r:id="rId1"/>
   </p:sldMasterIdLst>
   <p:sldIdLst>
-    <p:sldId id="256" r:id="rId7"/>
-    <p:sldId id="257" r:id="rId8"/>
-    <p:sldId id="258" r:id="rId9"/>
-    <p:sldId id="259" r:id="rId10"/>
-    <p:sldId id="260" r:id="rId11"/>
-    <p:sldId id="261" r:id="rId12"/>
-    <p:sldId id="262" r:id="rId13"/>
-    <p:sldId id="263" r:id="rId14"/>
-    <p:sldId id="264" r:id="rId15"/>
-    <p:sldId id="265" r:id="rId16"/>
-    <p:sldId id="266" r:id="rId17"/>
+    <p:sldId id="256" r:id="rId2"/>
+    <p:sldId id="257" r:id="rId3"/>
+    <p:sldId id="258" r:id="rId4"/>
+    <p:sldId id="259" r:id="rId5"/>
+    <p:sldId id="260" r:id="rId6"/>
+    <p:sldId id="261" r:id="rId7"/>
+    <p:sldId id="262" r:id="rId8"/>
+    <p:sldId id="263" r:id="rId9"/>
+    <p:sldId id="264" r:id="rId10"/>
+    <p:sldId id="265" r:id="rId11"/>
+    <p:sldId id="266" r:id="rId12"/>
   </p:sldIdLst>
-  <p:sldSz cx="12192000" cy="6858000" type="screen4x3"/>
+  <p:sldSz cx="12192000" cy="6858000"/>
   <p:notesSz cx="6858000" cy="9144000"/>
   <p:defaultTextStyle>
     <a:defPPr>
@@ -114,6 +114,22 @@
       </a:defRPr>
     </a:lvl9pPr>
   </p:defaultTextStyle>
+  <p:extLst>
+    <p:ext uri="{EFAFB233-063F-42B5-8137-9DF3F51BA10A}">
+      <p15:sldGuideLst xmlns:p15="http://schemas.microsoft.com/office/powerpoint/2012/main">
+        <p15:guide id="1" orient="horz" pos="2160">
+          <p15:clr>
+            <a:srgbClr val="A4A3A4"/>
+          </p15:clr>
+        </p15:guide>
+        <p15:guide id="2" pos="2880">
+          <p15:clr>
+            <a:srgbClr val="A4A3A4"/>
+          </p15:clr>
+        </p15:guide>
+      </p15:sldGuideLst>
+    </p:ext>
+  </p:extLst>
 </p:presentation>
 </file>
 
@@ -155,10 +171,9 @@
           <a:lstStyle/>
           <a:p>
             <a:r>
-              <a:rPr lang="en-US" smtClean="0"/>
+              <a:rPr lang="en-US"/>
               <a:t>Click to edit Master title style</a:t>
             </a:r>
-            <a:endParaRPr lang="en-US"/>
           </a:p>
         </p:txBody>
       </p:sp>
@@ -274,10 +289,9 @@
           </a:lstStyle>
           <a:p>
             <a:r>
-              <a:rPr lang="en-US" smtClean="0"/>
+              <a:rPr lang="en-US"/>
               <a:t>Click to edit Master subtitle style</a:t>
             </a:r>
-            <a:endParaRPr lang="en-US"/>
           </a:p>
         </p:txBody>
       </p:sp>
@@ -298,7 +312,7 @@
           <a:p>
             <a:fld id="{5BCAD085-E8A6-8845-BD4E-CB4CCA059FC4}" type="datetimeFigureOut">
               <a:rPr lang="en-US" smtClean="0"/>
-              <a:t>1/27/13</a:t>
+              <a:t>10/24/2026</a:t>
             </a:fld>
             <a:endParaRPr lang="en-US"/>
           </a:p>
@@ -340,7 +354,7 @@
           <a:p>
             <a:fld id="{C1FF6DA9-008F-8B48-92A6-B652298478BF}" type="slidenum">
               <a:rPr lang="en-US" smtClean="0"/>
-              <a:t>‹#›</a:t>
+              <a:t>‹nº›</a:t>
             </a:fld>
             <a:endParaRPr lang="en-US"/>
           </a:p>
@@ -392,10 +406,9 @@
           <a:lstStyle/>
           <a:p>
             <a:r>
-              <a:rPr lang="en-US" smtClean="0"/>
+              <a:rPr lang="en-US"/>
               <a:t>Click to edit Master title style</a:t>
             </a:r>
-            <a:endParaRPr lang="en-US"/>
           </a:p>
         </p:txBody>
       </p:sp>
@@ -416,38 +429,37 @@
           <a:p>
             <a:pPr lvl="0"/>
             <a:r>
-              <a:rPr lang="en-US" smtClean="0"/>
+              <a:rPr lang="en-US"/>
               <a:t>Click to edit Master text styles</a:t>
             </a:r>
           </a:p>
           <a:p>
             <a:pPr lvl="1"/>
             <a:r>
-              <a:rPr lang="en-US" smtClean="0"/>
+              <a:rPr lang="en-US"/>
               <a:t>Second level</a:t>
             </a:r>
           </a:p>
           <a:p>
             <a:pPr lvl="2"/>
             <a:r>
-              <a:rPr lang="en-US" smtClean="0"/>
+              <a:rPr lang="en-US"/>
               <a:t>Third level</a:t>
             </a:r>
           </a:p>
           <a:p>
             <a:pPr lvl="3"/>
             <a:r>
-              <a:rPr lang="en-US" smtClean="0"/>
+              <a:rPr lang="en-US"/>
               <a:t>Fourth level</a:t>
             </a:r>
           </a:p>
           <a:p>
             <a:pPr lvl="4"/>
             <a:r>
-              <a:rPr lang="en-US" smtClean="0"/>
+              <a:rPr lang="en-US"/>
               <a:t>Fifth level</a:t>
             </a:r>
-            <a:endParaRPr lang="en-US"/>
           </a:p>
         </p:txBody>
       </p:sp>
@@ -468,7 +480,7 @@
           <a:p>
             <a:fld id="{5BCAD085-E8A6-8845-BD4E-CB4CCA059FC4}" type="datetimeFigureOut">
               <a:rPr lang="en-US" smtClean="0"/>
-              <a:t>1/27/13</a:t>
+              <a:t>10/24/2026</a:t>
             </a:fld>
             <a:endParaRPr lang="en-US"/>
           </a:p>
@@ -510,7 +522,7 @@
           <a:p>
             <a:fld id="{C1FF6DA9-008F-8B48-92A6-B652298478BF}" type="slidenum">
               <a:rPr lang="en-US" smtClean="0"/>
-              <a:t>‹#›</a:t>
+              <a:t>‹nº›</a:t>
             </a:fld>
             <a:endParaRPr lang="en-US"/>
           </a:p>
@@ -567,10 +579,9 @@
           <a:lstStyle/>
           <a:p>
             <a:r>
-              <a:rPr lang="en-US" smtClean="0"/>
+              <a:rPr lang="en-US"/>
               <a:t>Click to edit Master title style</a:t>
             </a:r>
-            <a:endParaRPr lang="en-US"/>
           </a:p>
         </p:txBody>
       </p:sp>
@@ -596,38 +607,37 @@
           <a:p>
             <a:pPr lvl="0"/>
             <a:r>
-              <a:rPr lang="en-US" smtClean="0"/>
+              <a:rPr lang="en-US"/>
               <a:t>Click to edit Master text styles</a:t>
             </a:r>
           </a:p>
           <a:p>
             <a:pPr lvl="1"/>
             <a:r>
-              <a:rPr lang="en-US" smtClean="0"/>
+              <a:rPr lang="en-US"/>
               <a:t>Second level</a:t>
             </a:r>
           </a:p>
           <a:p>
             <a:pPr lvl="2"/>
             <a:r>
-              <a:rPr lang="en-US" smtClean="0"/>
+              <a:rPr lang="en-US"/>
               <a:t>Third level</a:t>
             </a:r>
           </a:p>
           <a:p>
             <a:pPr lvl="3"/>
             <a:r>
-              <a:rPr lang="en-US" smtClean="0"/>
+              <a:rPr lang="en-US"/>
               <a:t>Fourth level</a:t>
             </a:r>
           </a:p>
           <a:p>
             <a:pPr lvl="4"/>
             <a:r>
-              <a:rPr lang="en-US" smtClean="0"/>
+              <a:rPr lang="en-US"/>
               <a:t>Fifth level</a:t>
             </a:r>
-            <a:endParaRPr lang="en-US"/>
           </a:p>
         </p:txBody>
       </p:sp>
@@ -648,7 +658,7 @@
           <a:p>
             <a:fld id="{5BCAD085-E8A6-8845-BD4E-CB4CCA059FC4}" type="datetimeFigureOut">
               <a:rPr lang="en-US" smtClean="0"/>
-              <a:t>1/27/13</a:t>
+              <a:t>10/24/2026</a:t>
             </a:fld>
             <a:endParaRPr lang="en-US"/>
           </a:p>
@@ -690,7 +700,7 @@
           <a:p>
             <a:fld id="{C1FF6DA9-008F-8B48-92A6-B652298478BF}" type="slidenum">
               <a:rPr lang="en-US" smtClean="0"/>
-              <a:t>‹#›</a:t>
+              <a:t>‹nº›</a:t>
             </a:fld>
             <a:endParaRPr lang="en-US"/>
           </a:p>
@@ -742,10 +752,9 @@
           <a:lstStyle/>
           <a:p>
             <a:r>
-              <a:rPr lang="en-US" smtClean="0"/>
+              <a:rPr lang="en-US"/>
               <a:t>Click to edit Master title style</a:t>
             </a:r>
-            <a:endParaRPr lang="en-US"/>
           </a:p>
         </p:txBody>
       </p:sp>
@@ -766,38 +775,37 @@
           <a:p>
             <a:pPr lvl="0"/>
             <a:r>
-              <a:rPr lang="en-US" smtClean="0"/>
+              <a:rPr lang="en-US"/>
               <a:t>Click to edit Master text styles</a:t>
             </a:r>
           </a:p>
           <a:p>
             <a:pPr lvl="1"/>
             <a:r>
-              <a:rPr lang="en-US" smtClean="0"/>
+              <a:rPr lang="en-US"/>
               <a:t>Second level</a:t>
             </a:r>
           </a:p>
           <a:p>
             <a:pPr lvl="2"/>
             <a:r>
-              <a:rPr lang="en-US" smtClean="0"/>
+              <a:rPr lang="en-US"/>
               <a:t>Third level</a:t>
             </a:r>
           </a:p>
           <a:p>
             <a:pPr lvl="3"/>
             <a:r>
-              <a:rPr lang="en-US" smtClean="0"/>
+              <a:rPr lang="en-US"/>
               <a:t>Fourth level</a:t>
             </a:r>
           </a:p>
           <a:p>
             <a:pPr lvl="4"/>
             <a:r>
-              <a:rPr lang="en-US" smtClean="0"/>
+              <a:rPr lang="en-US"/>
               <a:t>Fifth level</a:t>
             </a:r>
-            <a:endParaRPr lang="en-US"/>
           </a:p>
         </p:txBody>
       </p:sp>
@@ -818,7 +826,7 @@
           <a:p>
             <a:fld id="{5BCAD085-E8A6-8845-BD4E-CB4CCA059FC4}" type="datetimeFigureOut">
               <a:rPr lang="en-US" smtClean="0"/>
-              <a:t>1/27/13</a:t>
+              <a:t>10/24/2026</a:t>
             </a:fld>
             <a:endParaRPr lang="en-US"/>
           </a:p>
@@ -860,7 +868,7 @@
           <a:p>
             <a:fld id="{C1FF6DA9-008F-8B48-92A6-B652298478BF}" type="slidenum">
               <a:rPr lang="en-US" smtClean="0"/>
-              <a:t>‹#›</a:t>
+              <a:t>‹nº›</a:t>
             </a:fld>
             <a:endParaRPr lang="en-US"/>
           </a:p>
@@ -921,10 +929,9 @@
           </a:lstStyle>
           <a:p>
             <a:r>
-              <a:rPr lang="en-US" smtClean="0"/>
+              <a:rPr lang="en-US"/>
               <a:t>Click to edit Master title style</a:t>
             </a:r>
-            <a:endParaRPr lang="en-US"/>
           </a:p>
         </p:txBody>
       </p:sp>
@@ -1041,7 +1048,7 @@
           <a:p>
             <a:pPr lvl="0"/>
             <a:r>
-              <a:rPr lang="en-US" smtClean="0"/>
+              <a:rPr lang="en-US"/>
               <a:t>Click to edit Master text styles</a:t>
             </a:r>
           </a:p>
@@ -1064,7 +1071,7 @@
           <a:p>
             <a:fld id="{5BCAD085-E8A6-8845-BD4E-CB4CCA059FC4}" type="datetimeFigureOut">
               <a:rPr lang="en-US" smtClean="0"/>
-              <a:t>1/27/13</a:t>
+              <a:t>10/24/2026</a:t>
             </a:fld>
             <a:endParaRPr lang="en-US"/>
           </a:p>
@@ -1106,7 +1113,7 @@
           <a:p>
             <a:fld id="{C1FF6DA9-008F-8B48-92A6-B652298478BF}" type="slidenum">
               <a:rPr lang="en-US" smtClean="0"/>
-              <a:t>‹#›</a:t>
+              <a:t>‹nº›</a:t>
             </a:fld>
             <a:endParaRPr lang="en-US"/>
           </a:p>
@@ -1158,10 +1165,9 @@
           <a:lstStyle/>
           <a:p>
             <a:r>
-              <a:rPr lang="en-US" smtClean="0"/>
+              <a:rPr lang="en-US"/>
               <a:t>Click to edit Master title style</a:t>
             </a:r>
-            <a:endParaRPr lang="en-US"/>
           </a:p>
         </p:txBody>
       </p:sp>
@@ -1215,38 +1221,37 @@
           <a:p>
             <a:pPr lvl="0"/>
             <a:r>
-              <a:rPr lang="en-US" smtClean="0"/>
+              <a:rPr lang="en-US"/>
               <a:t>Click to edit Master text styles</a:t>
             </a:r>
           </a:p>
           <a:p>
             <a:pPr lvl="1"/>
             <a:r>
-              <a:rPr lang="en-US" smtClean="0"/>
+              <a:rPr lang="en-US"/>
               <a:t>Second level</a:t>
             </a:r>
           </a:p>
           <a:p>
             <a:pPr lvl="2"/>
             <a:r>
-              <a:rPr lang="en-US" smtClean="0"/>
+              <a:rPr lang="en-US"/>
               <a:t>Third level</a:t>
             </a:r>
           </a:p>
           <a:p>
             <a:pPr lvl="3"/>
             <a:r>
-              <a:rPr lang="en-US" smtClean="0"/>
+              <a:rPr lang="en-US"/>
               <a:t>Fourth level</a:t>
             </a:r>
           </a:p>
           <a:p>
             <a:pPr lvl="4"/>
             <a:r>
-              <a:rPr lang="en-US" smtClean="0"/>
+              <a:rPr lang="en-US"/>
               <a:t>Fifth level</a:t>
             </a:r>
-            <a:endParaRPr lang="en-US"/>
           </a:p>
         </p:txBody>
       </p:sp>
@@ -1300,38 +1305,37 @@
           <a:p>
             <a:pPr lvl="0"/>
             <a:r>
-              <a:rPr lang="en-US" smtClean="0"/>
+              <a:rPr lang="en-US"/>
               <a:t>Click to edit Master text styles</a:t>
             </a:r>
           </a:p>
           <a:p>
             <a:pPr lvl="1"/>
             <a:r>
-              <a:rPr lang="en-US" smtClean="0"/>
+              <a:rPr lang="en-US"/>
               <a:t>Second level</a:t>
             </a:r>
           </a:p>
           <a:p>
             <a:pPr lvl="2"/>
             <a:r>
-              <a:rPr lang="en-US" smtClean="0"/>
+              <a:rPr lang="en-US"/>
               <a:t>Third level</a:t>
             </a:r>
           </a:p>
           <a:p>
             <a:pPr lvl="3"/>
             <a:r>
-              <a:rPr lang="en-US" smtClean="0"/>
+              <a:rPr lang="en-US"/>
               <a:t>Fourth level</a:t>
             </a:r>
           </a:p>
           <a:p>
             <a:pPr lvl="4"/>
             <a:r>
-              <a:rPr lang="en-US" smtClean="0"/>
+              <a:rPr lang="en-US"/>
               <a:t>Fifth level</a:t>
             </a:r>
-            <a:endParaRPr lang="en-US"/>
           </a:p>
         </p:txBody>
       </p:sp>
@@ -1352,7 +1356,7 @@
           <a:p>
             <a:fld id="{5BCAD085-E8A6-8845-BD4E-CB4CCA059FC4}" type="datetimeFigureOut">
               <a:rPr lang="en-US" smtClean="0"/>
-              <a:t>1/27/13</a:t>
+              <a:t>10/24/2026</a:t>
             </a:fld>
             <a:endParaRPr lang="en-US"/>
           </a:p>
@@ -1394,7 +1398,7 @@
           <a:p>
             <a:fld id="{C1FF6DA9-008F-8B48-92A6-B652298478BF}" type="slidenum">
               <a:rPr lang="en-US" smtClean="0"/>
-              <a:t>‹#›</a:t>
+              <a:t>‹nº›</a:t>
             </a:fld>
             <a:endParaRPr lang="en-US"/>
           </a:p>
@@ -1450,10 +1454,9 @@
           </a:lstStyle>
           <a:p>
             <a:r>
-              <a:rPr lang="en-US" smtClean="0"/>
+              <a:rPr lang="en-US"/>
               <a:t>Click to edit Master title style</a:t>
             </a:r>
-            <a:endParaRPr lang="en-US"/>
           </a:p>
         </p:txBody>
       </p:sp>
@@ -1516,7 +1519,7 @@
           <a:p>
             <a:pPr lvl="0"/>
             <a:r>
-              <a:rPr lang="en-US" smtClean="0"/>
+              <a:rPr lang="en-US"/>
               <a:t>Click to edit Master text styles</a:t>
             </a:r>
           </a:p>
@@ -1572,38 +1575,37 @@
           <a:p>
             <a:pPr lvl="0"/>
             <a:r>
-              <a:rPr lang="en-US" smtClean="0"/>
+              <a:rPr lang="en-US"/>
               <a:t>Click to edit Master text styles</a:t>
             </a:r>
           </a:p>
           <a:p>
             <a:pPr lvl="1"/>
             <a:r>
-              <a:rPr lang="en-US" smtClean="0"/>
+              <a:rPr lang="en-US"/>
               <a:t>Second level</a:t>
             </a:r>
           </a:p>
           <a:p>
             <a:pPr lvl="2"/>
             <a:r>
-              <a:rPr lang="en-US" smtClean="0"/>
+              <a:rPr lang="en-US"/>
               <a:t>Third level</a:t>
             </a:r>
           </a:p>
           <a:p>
             <a:pPr lvl="3"/>
             <a:r>
-              <a:rPr lang="en-US" smtClean="0"/>
+              <a:rPr lang="en-US"/>
               <a:t>Fourth level</a:t>
             </a:r>
           </a:p>
           <a:p>
             <a:pPr lvl="4"/>
             <a:r>
-              <a:rPr lang="en-US" smtClean="0"/>
+              <a:rPr lang="en-US"/>
               <a:t>Fifth level</a:t>
             </a:r>
-            <a:endParaRPr lang="en-US"/>
           </a:p>
         </p:txBody>
       </p:sp>
@@ -1666,7 +1668,7 @@
           <a:p>
             <a:pPr lvl="0"/>
             <a:r>
-              <a:rPr lang="en-US" smtClean="0"/>
+              <a:rPr lang="en-US"/>
               <a:t>Click to edit Master text styles</a:t>
             </a:r>
           </a:p>
@@ -1722,38 +1724,37 @@
           <a:p>
             <a:pPr lvl="0"/>
             <a:r>
-              <a:rPr lang="en-US" smtClean="0"/>
+              <a:rPr lang="en-US"/>
               <a:t>Click to edit Master text styles</a:t>
             </a:r>
           </a:p>
           <a:p>
             <a:pPr lvl="1"/>
             <a:r>
-              <a:rPr lang="en-US" smtClean="0"/>
+              <a:rPr lang="en-US"/>
               <a:t>Second level</a:t>
             </a:r>
           </a:p>
           <a:p>
             <a:pPr lvl="2"/>
             <a:r>
-              <a:rPr lang="en-US" smtClean="0"/>
+              <a:rPr lang="en-US"/>
               <a:t>Third level</a:t>
             </a:r>
           </a:p>
           <a:p>
             <a:pPr lvl="3"/>
             <a:r>
-              <a:rPr lang="en-US" smtClean="0"/>
+              <a:rPr lang="en-US"/>
               <a:t>Fourth level</a:t>
             </a:r>
           </a:p>
           <a:p>
             <a:pPr lvl="4"/>
             <a:r>
-              <a:rPr lang="en-US" smtClean="0"/>
+              <a:rPr lang="en-US"/>
               <a:t>Fifth level</a:t>
             </a:r>
-            <a:endParaRPr lang="en-US"/>
           </a:p>
         </p:txBody>
       </p:sp>
@@ -1774,7 +1775,7 @@
           <a:p>
             <a:fld id="{5BCAD085-E8A6-8845-BD4E-CB4CCA059FC4}" type="datetimeFigureOut">
               <a:rPr lang="en-US" smtClean="0"/>
-              <a:t>1/27/13</a:t>
+              <a:t>10/24/2026</a:t>
             </a:fld>
             <a:endParaRPr lang="en-US"/>
           </a:p>
@@ -1816,7 +1817,7 @@
           <a:p>
             <a:fld id="{C1FF6DA9-008F-8B48-92A6-B652298478BF}" type="slidenum">
               <a:rPr lang="en-US" smtClean="0"/>
-              <a:t>‹#›</a:t>
+              <a:t>‹nº›</a:t>
             </a:fld>
             <a:endParaRPr lang="en-US"/>
           </a:p>
@@ -1868,10 +1869,9 @@
           <a:lstStyle/>
           <a:p>
             <a:r>
-              <a:rPr lang="en-US" smtClean="0"/>
+              <a:rPr lang="en-US"/>
               <a:t>Click to edit Master title style</a:t>
             </a:r>
-            <a:endParaRPr lang="en-US"/>
           </a:p>
         </p:txBody>
       </p:sp>
@@ -1892,7 +1892,7 @@
           <a:p>
             <a:fld id="{5BCAD085-E8A6-8845-BD4E-CB4CCA059FC4}" type="datetimeFigureOut">
               <a:rPr lang="en-US" smtClean="0"/>
-              <a:t>1/27/13</a:t>
+              <a:t>10/24/2026</a:t>
             </a:fld>
             <a:endParaRPr lang="en-US"/>
           </a:p>
@@ -1934,7 +1934,7 @@
           <a:p>
             <a:fld id="{C1FF6DA9-008F-8B48-92A6-B652298478BF}" type="slidenum">
               <a:rPr lang="en-US" smtClean="0"/>
-              <a:t>‹#›</a:t>
+              <a:t>‹nº›</a:t>
             </a:fld>
             <a:endParaRPr lang="en-US"/>
           </a:p>
@@ -1987,7 +1987,7 @@
           <a:p>
             <a:fld id="{5BCAD085-E8A6-8845-BD4E-CB4CCA059FC4}" type="datetimeFigureOut">
               <a:rPr lang="en-US" smtClean="0"/>
-              <a:t>1/27/13</a:t>
+              <a:t>10/24/2026</a:t>
             </a:fld>
             <a:endParaRPr lang="en-US"/>
           </a:p>
@@ -2029,7 +2029,7 @@
           <a:p>
             <a:fld id="{C1FF6DA9-008F-8B48-92A6-B652298478BF}" type="slidenum">
               <a:rPr lang="en-US" smtClean="0"/>
-              <a:t>‹#›</a:t>
+              <a:t>‹nº›</a:t>
             </a:fld>
             <a:endParaRPr lang="en-US"/>
           </a:p>
@@ -2090,10 +2090,9 @@
           </a:lstStyle>
           <a:p>
             <a:r>
-              <a:rPr lang="en-US" smtClean="0"/>
+              <a:rPr lang="en-US"/>
               <a:t>Click to edit Master title style</a:t>
             </a:r>
-            <a:endParaRPr lang="en-US"/>
           </a:p>
         </p:txBody>
       </p:sp>
@@ -2147,38 +2146,37 @@
           <a:p>
             <a:pPr lvl="0"/>
             <a:r>
-              <a:rPr lang="en-US" smtClean="0"/>
+              <a:rPr lang="en-US"/>
               <a:t>Click to edit Master text styles</a:t>
             </a:r>
           </a:p>
           <a:p>
             <a:pPr lvl="1"/>
             <a:r>
-              <a:rPr lang="en-US" smtClean="0"/>
+              <a:rPr lang="en-US"/>
               <a:t>Second level</a:t>
             </a:r>
           </a:p>
           <a:p>
             <a:pPr lvl="2"/>
             <a:r>
-              <a:rPr lang="en-US" smtClean="0"/>
+              <a:rPr lang="en-US"/>
               <a:t>Third level</a:t>
             </a:r>
           </a:p>
           <a:p>
             <a:pPr lvl="3"/>
             <a:r>
-              <a:rPr lang="en-US" smtClean="0"/>
+              <a:rPr lang="en-US"/>
               <a:t>Fourth level</a:t>
             </a:r>
           </a:p>
           <a:p>
             <a:pPr lvl="4"/>
             <a:r>
-              <a:rPr lang="en-US" smtClean="0"/>
+              <a:rPr lang="en-US"/>
               <a:t>Fifth level</a:t>
             </a:r>
-            <a:endParaRPr lang="en-US"/>
           </a:p>
         </p:txBody>
       </p:sp>
@@ -2241,7 +2239,7 @@
           <a:p>
             <a:pPr lvl="0"/>
             <a:r>
-              <a:rPr lang="en-US" smtClean="0"/>
+              <a:rPr lang="en-US"/>
               <a:t>Click to edit Master text styles</a:t>
             </a:r>
           </a:p>
@@ -2264,7 +2262,7 @@
           <a:p>
             <a:fld id="{5BCAD085-E8A6-8845-BD4E-CB4CCA059FC4}" type="datetimeFigureOut">
               <a:rPr lang="en-US" smtClean="0"/>
-              <a:t>1/27/13</a:t>
+              <a:t>10/24/2026</a:t>
             </a:fld>
             <a:endParaRPr lang="en-US"/>
           </a:p>
@@ -2306,7 +2304,7 @@
           <a:p>
             <a:fld id="{C1FF6DA9-008F-8B48-92A6-B652298478BF}" type="slidenum">
               <a:rPr lang="en-US" smtClean="0"/>
-              <a:t>‹#›</a:t>
+              <a:t>‹nº›</a:t>
             </a:fld>
             <a:endParaRPr lang="en-US"/>
           </a:p>
@@ -2367,10 +2365,9 @@
           </a:lstStyle>
           <a:p>
             <a:r>
-              <a:rPr lang="en-US" smtClean="0"/>
+              <a:rPr lang="en-US"/>
               <a:t>Click to edit Master title style</a:t>
             </a:r>
-            <a:endParaRPr lang="en-US"/>
           </a:p>
         </p:txBody>
       </p:sp>
@@ -2494,7 +2491,7 @@
           <a:p>
             <a:pPr lvl="0"/>
             <a:r>
-              <a:rPr lang="en-US" smtClean="0"/>
+              <a:rPr lang="en-US"/>
               <a:t>Click to edit Master text styles</a:t>
             </a:r>
           </a:p>
@@ -2517,7 +2514,7 @@
           <a:p>
             <a:fld id="{5BCAD085-E8A6-8845-BD4E-CB4CCA059FC4}" type="datetimeFigureOut">
               <a:rPr lang="en-US" smtClean="0"/>
-              <a:t>1/27/13</a:t>
+              <a:t>10/24/2026</a:t>
             </a:fld>
             <a:endParaRPr lang="en-US"/>
           </a:p>
@@ -2559,7 +2556,7 @@
           <a:p>
             <a:fld id="{C1FF6DA9-008F-8B48-92A6-B652298478BF}" type="slidenum">
               <a:rPr lang="en-US" smtClean="0"/>
-              <a:t>‹#›</a:t>
+              <a:t>‹nº›</a:t>
             </a:fld>
             <a:endParaRPr lang="en-US"/>
           </a:p>
@@ -2626,10 +2623,9 @@
           <a:lstStyle/>
           <a:p>
             <a:r>
-              <a:rPr lang="en-US" smtClean="0"/>
+              <a:rPr lang="en-US"/>
               <a:t>Click to edit Master title style</a:t>
             </a:r>
-            <a:endParaRPr lang="en-US"/>
           </a:p>
         </p:txBody>
       </p:sp>
@@ -2660,38 +2656,37 @@
           <a:p>
             <a:pPr lvl="0"/>
             <a:r>
-              <a:rPr lang="en-US" smtClean="0"/>
+              <a:rPr lang="en-US"/>
               <a:t>Click to edit Master text styles</a:t>
             </a:r>
           </a:p>
           <a:p>
             <a:pPr lvl="1"/>
             <a:r>
-              <a:rPr lang="en-US" smtClean="0"/>
+              <a:rPr lang="en-US"/>
               <a:t>Second level</a:t>
             </a:r>
           </a:p>
           <a:p>
             <a:pPr lvl="2"/>
             <a:r>
-              <a:rPr lang="en-US" smtClean="0"/>
+              <a:rPr lang="en-US"/>
               <a:t>Third level</a:t>
             </a:r>
           </a:p>
           <a:p>
             <a:pPr lvl="3"/>
             <a:r>
-              <a:rPr lang="en-US" smtClean="0"/>
+              <a:rPr lang="en-US"/>
               <a:t>Fourth level</a:t>
             </a:r>
           </a:p>
           <a:p>
             <a:pPr lvl="4"/>
             <a:r>
-              <a:rPr lang="en-US" smtClean="0"/>
+              <a:rPr lang="en-US"/>
               <a:t>Fifth level</a:t>
             </a:r>
-            <a:endParaRPr lang="en-US"/>
           </a:p>
         </p:txBody>
       </p:sp>
@@ -2730,7 +2725,7 @@
           <a:p>
             <a:fld id="{5BCAD085-E8A6-8845-BD4E-CB4CCA059FC4}" type="datetimeFigureOut">
               <a:rPr lang="en-US" smtClean="0"/>
-              <a:t>1/27/13</a:t>
+              <a:t>10/24/2026</a:t>
             </a:fld>
             <a:endParaRPr lang="en-US"/>
           </a:p>
@@ -2808,7 +2803,7 @@
           <a:p>
             <a:fld id="{C1FF6DA9-008F-8B48-92A6-B652298478BF}" type="slidenum">
               <a:rPr lang="en-US" smtClean="0"/>
-              <a:t>‹#›</a:t>
+              <a:t>‹nº›</a:t>
             </a:fld>
             <a:endParaRPr lang="en-US"/>
           </a:p>
@@ -3089,7 +3084,7 @@
 </file>
 
 <file path=ppt/slides/slide1.xml><?xml version="1.0" encoding="utf-8"?>
-<p:sld xmlns:a="http://schemas.openxmlformats.org/drawingml/2006/main" xmlns:p="http://schemas.openxmlformats.org/presentationml/2006/main" xmlns:r="http://schemas.openxmlformats.org/officeDocument/2006/relationships">
+<p:sld xmlns:a="http://schemas.openxmlformats.org/drawingml/2006/main" xmlns:r="http://schemas.openxmlformats.org/officeDocument/2006/relationships" xmlns:p="http://schemas.openxmlformats.org/presentationml/2006/main">
   <p:cSld>
     <p:spTree>
       <p:nvGrpSpPr>
@@ -3097,7 +3092,14 @@
         <p:cNvGrpSpPr/>
         <p:nvPr/>
       </p:nvGrpSpPr>
-      <p:grpSpPr/>
+      <p:grpSpPr>
+        <a:xfrm>
+          <a:off x="0" y="0"/>
+          <a:ext cx="0" cy="0"/>
+          <a:chOff x="0" y="0"/>
+          <a:chExt cx="0" cy="0"/>
+        </a:xfrm>
+      </p:grpSpPr>
       <p:sp>
         <p:nvSpPr>
           <p:cNvPr id="2" name="Rectangle 1"/>
@@ -3139,6 +3141,7 @@
           <a:lstStyle/>
           <a:p>
             <a:pPr algn="ctr"/>
+            <a:endParaRPr/>
           </a:p>
         </p:txBody>
       </p:sp>
@@ -3183,7 +3186,7 @@
           <a:noFill/>
         </p:spPr>
         <p:txBody>
-          <a:bodyPr wrap="square" lIns="90000" rIns="90000" tIns="54000" bIns="54000" anchor="t">
+          <a:bodyPr wrap="square" lIns="90000" tIns="54000" rIns="90000" bIns="54000" anchor="t">
             <a:spAutoFit/>
           </a:bodyPr>
           <a:lstStyle/>
@@ -3222,7 +3225,7 @@
           <a:noFill/>
         </p:spPr>
         <p:txBody>
-          <a:bodyPr wrap="square" lIns="90000" rIns="90000" tIns="54000" bIns="54000" anchor="t">
+          <a:bodyPr wrap="square" lIns="90000" tIns="54000" rIns="90000" bIns="54000" anchor="t">
             <a:spAutoFit/>
           </a:bodyPr>
           <a:lstStyle/>
@@ -3261,7 +3264,7 @@
           <a:noFill/>
         </p:spPr>
         <p:txBody>
-          <a:bodyPr wrap="square" lIns="90000" rIns="90000" tIns="54000" bIns="54000" anchor="t">
+          <a:bodyPr wrap="square" lIns="90000" tIns="54000" rIns="90000" bIns="54000" anchor="t">
             <a:spAutoFit/>
           </a:bodyPr>
           <a:lstStyle/>
@@ -3324,7 +3327,7 @@
 </file>
 
 <file path=ppt/slides/slide10.xml><?xml version="1.0" encoding="utf-8"?>
-<p:sld xmlns:a="http://schemas.openxmlformats.org/drawingml/2006/main" xmlns:p="http://schemas.openxmlformats.org/presentationml/2006/main" xmlns:r="http://schemas.openxmlformats.org/officeDocument/2006/relationships">
+<p:sld xmlns:a="http://schemas.openxmlformats.org/drawingml/2006/main" xmlns:r="http://schemas.openxmlformats.org/officeDocument/2006/relationships" xmlns:p="http://schemas.openxmlformats.org/presentationml/2006/main">
   <p:cSld>
     <p:spTree>
       <p:nvGrpSpPr>
@@ -3332,7 +3335,14 @@
         <p:cNvGrpSpPr/>
         <p:nvPr/>
       </p:nvGrpSpPr>
-      <p:grpSpPr/>
+      <p:grpSpPr>
+        <a:xfrm>
+          <a:off x="0" y="0"/>
+          <a:ext cx="0" cy="0"/>
+          <a:chOff x="0" y="0"/>
+          <a:chExt cx="0" cy="0"/>
+        </a:xfrm>
+      </p:grpSpPr>
       <p:sp>
         <p:nvSpPr>
           <p:cNvPr id="2" name="Rectangle 1"/>
@@ -3374,6 +3384,7 @@
           <a:lstStyle/>
           <a:p>
             <a:pPr algn="ctr"/>
+            <a:endParaRPr/>
           </a:p>
         </p:txBody>
       </p:sp>
@@ -3394,7 +3405,7 @@
           <a:noFill/>
         </p:spPr>
         <p:txBody>
-          <a:bodyPr wrap="square" lIns="90000" rIns="90000" tIns="54000" bIns="54000" anchor="t">
+          <a:bodyPr wrap="square" lIns="90000" tIns="54000" rIns="90000" bIns="54000" anchor="t">
             <a:spAutoFit/>
           </a:bodyPr>
           <a:lstStyle/>
@@ -3433,7 +3444,7 @@
           <a:noFill/>
         </p:spPr>
         <p:txBody>
-          <a:bodyPr wrap="square" lIns="90000" rIns="90000" tIns="54000" bIns="54000" anchor="t">
+          <a:bodyPr wrap="square" lIns="90000" tIns="54000" rIns="90000" bIns="54000" anchor="t">
             <a:spAutoFit/>
           </a:bodyPr>
           <a:lstStyle/>
@@ -3450,7 +3461,7 @@
                 </a:solidFill>
                 <a:latin typeface="Plus Jakarta Sans"/>
               </a:rPr>
-              <a:t>Resultados · 5 min</a:t>
+              <a:t>Resultados · ⟪quem apresenta⟫ · 5 min</a:t>
             </a:r>
           </a:p>
         </p:txBody>
@@ -3472,7 +3483,7 @@
           <a:noFill/>
         </p:spPr>
         <p:txBody>
-          <a:bodyPr wrap="square" lIns="90000" rIns="90000" tIns="54000" bIns="54000" anchor="t">
+          <a:bodyPr wrap="square" lIns="90000" tIns="54000" rIns="90000" bIns="54000" anchor="t">
             <a:spAutoFit/>
           </a:bodyPr>
           <a:lstStyle/>
@@ -3513,9 +3524,27 @@
                 <a:tableStyleId>{5C22544A-7EE6-4342-B048-85BDC9FD1C3A}</a:tableStyleId>
               </a:tblPr>
               <a:tblGrid>
-                <a:gridCol w="3780000"/>
-                <a:gridCol w="3780000"/>
-                <a:gridCol w="3780000"/>
+                <a:gridCol w="3780000">
+                  <a:extLst>
+                    <a:ext uri="{9D8B030D-6E8A-4147-A177-3AD203B41FA5}">
+                      <a16:colId xmlns:a16="http://schemas.microsoft.com/office/drawing/2014/main" val="20000"/>
+                    </a:ext>
+                  </a:extLst>
+                </a:gridCol>
+                <a:gridCol w="3780000">
+                  <a:extLst>
+                    <a:ext uri="{9D8B030D-6E8A-4147-A177-3AD203B41FA5}">
+                      <a16:colId xmlns:a16="http://schemas.microsoft.com/office/drawing/2014/main" val="20001"/>
+                    </a:ext>
+                  </a:extLst>
+                </a:gridCol>
+                <a:gridCol w="3780000">
+                  <a:extLst>
+                    <a:ext uri="{9D8B030D-6E8A-4147-A177-3AD203B41FA5}">
+                      <a16:colId xmlns:a16="http://schemas.microsoft.com/office/drawing/2014/main" val="20002"/>
+                    </a:ext>
+                  </a:extLst>
+                </a:gridCol>
               </a:tblGrid>
               <a:tr h="480000">
                 <a:tc>
@@ -3584,6 +3613,11 @@
                     </a:solidFill>
                   </a:tcPr>
                 </a:tc>
+                <a:extLst>
+                  <a:ext uri="{0D108BD9-81ED-4DB2-BD59-A6C34878D82A}">
+                    <a16:rowId xmlns:a16="http://schemas.microsoft.com/office/drawing/2014/main" val="10000"/>
+                  </a:ext>
+                </a:extLst>
               </a:tr>
               <a:tr h="480000">
                 <a:tc>
@@ -3620,7 +3654,7 @@
                           </a:solidFill>
                           <a:latin typeface="Plus Jakarta Sans"/>
                         </a:rPr>
-                        <a:t>gradlew test no 710ef50</a:t>
+                        <a:t>gradlew test</a:t>
                       </a:r>
                     </a:p>
                   </a:txBody>
@@ -3642,7 +3676,7 @@
                           </a:solidFill>
                           <a:latin typeface="Plus Jakarta Sans"/>
                         </a:rPr>
-                        <a:t>161 testes em 29 classes · 0 falhas</a:t>
+                        <a:t>ver testes_unidade.md</a:t>
                       </a:r>
                     </a:p>
                   </a:txBody>
@@ -3652,6 +3686,11 @@
                     </a:solidFill>
                   </a:tcPr>
                 </a:tc>
+                <a:extLst>
+                  <a:ext uri="{0D108BD9-81ED-4DB2-BD59-A6C34878D82A}">
+                    <a16:rowId xmlns:a16="http://schemas.microsoft.com/office/drawing/2014/main" val="10001"/>
+                  </a:ext>
+                </a:extLst>
               </a:tr>
               <a:tr h="480000">
                 <a:tc>
@@ -3710,7 +3749,7 @@
                           </a:solidFill>
                           <a:latin typeface="Plus Jakarta Sans"/>
                         </a:rPr>
-                        <a:t>10 de 10 passaram</a:t>
+                        <a:t>ver corrida_10_execucoes.md</a:t>
                       </a:r>
                     </a:p>
                   </a:txBody>
@@ -3720,6 +3759,11 @@
                     </a:solidFill>
                   </a:tcPr>
                 </a:tc>
+                <a:extLst>
+                  <a:ext uri="{0D108BD9-81ED-4DB2-BD59-A6C34878D82A}">
+                    <a16:rowId xmlns:a16="http://schemas.microsoft.com/office/drawing/2014/main" val="10002"/>
+                  </a:ext>
+                </a:extLst>
               </a:tr>
               <a:tr h="480000">
                 <a:tc>
@@ -3788,6 +3832,11 @@
                     </a:solidFill>
                   </a:tcPr>
                 </a:tc>
+                <a:extLst>
+                  <a:ext uri="{0D108BD9-81ED-4DB2-BD59-A6C34878D82A}">
+                    <a16:rowId xmlns:a16="http://schemas.microsoft.com/office/drawing/2014/main" val="10003"/>
+                  </a:ext>
+                </a:extLst>
               </a:tr>
               <a:tr h="480000">
                 <a:tc>
@@ -3856,6 +3905,11 @@
                     </a:solidFill>
                   </a:tcPr>
                 </a:tc>
+                <a:extLst>
+                  <a:ext uri="{0D108BD9-81ED-4DB2-BD59-A6C34878D82A}">
+                    <a16:rowId xmlns:a16="http://schemas.microsoft.com/office/drawing/2014/main" val="10004"/>
+                  </a:ext>
+                </a:extLst>
               </a:tr>
               <a:tr h="480000">
                 <a:tc>
@@ -3924,6 +3978,11 @@
                     </a:solidFill>
                   </a:tcPr>
                 </a:tc>
+                <a:extLst>
+                  <a:ext uri="{0D108BD9-81ED-4DB2-BD59-A6C34878D82A}">
+                    <a16:rowId xmlns:a16="http://schemas.microsoft.com/office/drawing/2014/main" val="10005"/>
+                  </a:ext>
+                </a:extLst>
               </a:tr>
               <a:tr h="480000">
                 <a:tc>
@@ -3992,6 +4051,11 @@
                     </a:solidFill>
                   </a:tcPr>
                 </a:tc>
+                <a:extLst>
+                  <a:ext uri="{0D108BD9-81ED-4DB2-BD59-A6C34878D82A}">
+                    <a16:rowId xmlns:a16="http://schemas.microsoft.com/office/drawing/2014/main" val="10006"/>
+                  </a:ext>
+                </a:extLst>
               </a:tr>
               <a:tr h="480000">
                 <a:tc>
@@ -4006,7 +4070,7 @@
                           </a:solidFill>
                           <a:latin typeface="Plus Jakarta Sans"/>
                         </a:rPr>
-                        <a:t>Resíduo RMS (média)</a:t>
+                        <a:t>Resíduo RMS</a:t>
                       </a:r>
                     </a:p>
                   </a:txBody>
@@ -4050,7 +4114,7 @@
                           </a:solidFill>
                           <a:latin typeface="Plus Jakarta Sans"/>
                         </a:rPr>
-                        <a:t>0,24 m → 2·10⁻¹⁵ m</a:t>
+                        <a:t>0,24 m → 2e-15 m</a:t>
                       </a:r>
                     </a:p>
                   </a:txBody>
@@ -4060,6 +4124,11 @@
                     </a:solidFill>
                   </a:tcPr>
                 </a:tc>
+                <a:extLst>
+                  <a:ext uri="{0D108BD9-81ED-4DB2-BD59-A6C34878D82A}">
+                    <a16:rowId xmlns:a16="http://schemas.microsoft.com/office/drawing/2014/main" val="10007"/>
+                  </a:ext>
+                </a:extLst>
               </a:tr>
               <a:tr h="480000">
                 <a:tc>
@@ -4128,6 +4197,11 @@
                     </a:solidFill>
                   </a:tcPr>
                 </a:tc>
+                <a:extLst>
+                  <a:ext uri="{0D108BD9-81ED-4DB2-BD59-A6C34878D82A}">
+                    <a16:rowId xmlns:a16="http://schemas.microsoft.com/office/drawing/2014/main" val="10008"/>
+                  </a:ext>
+                </a:extLst>
               </a:tr>
             </a:tbl>
           </a:graphicData>
@@ -4150,7 +4224,7 @@
           <a:noFill/>
         </p:spPr>
         <p:txBody>
-          <a:bodyPr wrap="square" lIns="90000" rIns="90000" tIns="54000" bIns="54000" anchor="t">
+          <a:bodyPr wrap="square" lIns="90000" tIns="54000" rIns="90000" bIns="54000" anchor="t">
             <a:spAutoFit/>
           </a:bodyPr>
           <a:lstStyle/>
@@ -4181,7 +4255,7 @@
 </file>
 
 <file path=ppt/slides/slide11.xml><?xml version="1.0" encoding="utf-8"?>
-<p:sld xmlns:a="http://schemas.openxmlformats.org/drawingml/2006/main" xmlns:p="http://schemas.openxmlformats.org/presentationml/2006/main" xmlns:r="http://schemas.openxmlformats.org/officeDocument/2006/relationships">
+<p:sld xmlns:a="http://schemas.openxmlformats.org/drawingml/2006/main" xmlns:r="http://schemas.openxmlformats.org/officeDocument/2006/relationships" xmlns:p="http://schemas.openxmlformats.org/presentationml/2006/main">
   <p:cSld>
     <p:spTree>
       <p:nvGrpSpPr>
@@ -4189,7 +4263,14 @@
         <p:cNvGrpSpPr/>
         <p:nvPr/>
       </p:nvGrpSpPr>
-      <p:grpSpPr/>
+      <p:grpSpPr>
+        <a:xfrm>
+          <a:off x="0" y="0"/>
+          <a:ext cx="0" cy="0"/>
+          <a:chOff x="0" y="0"/>
+          <a:chExt cx="0" cy="0"/>
+        </a:xfrm>
+      </p:grpSpPr>
       <p:sp>
         <p:nvSpPr>
           <p:cNvPr id="2" name="Rectangle 1"/>
@@ -4231,6 +4312,7 @@
           <a:lstStyle/>
           <a:p>
             <a:pPr algn="ctr"/>
+            <a:endParaRPr/>
           </a:p>
         </p:txBody>
       </p:sp>
@@ -4251,7 +4333,7 @@
           <a:noFill/>
         </p:spPr>
         <p:txBody>
-          <a:bodyPr wrap="square" lIns="90000" rIns="90000" tIns="54000" bIns="54000" anchor="t">
+          <a:bodyPr wrap="square" lIns="90000" tIns="54000" rIns="90000" bIns="54000" anchor="t">
             <a:spAutoFit/>
           </a:bodyPr>
           <a:lstStyle/>
@@ -4290,7 +4372,7 @@
           <a:noFill/>
         </p:spPr>
         <p:txBody>
-          <a:bodyPr wrap="square" lIns="90000" rIns="90000" tIns="54000" bIns="54000" anchor="t">
+          <a:bodyPr wrap="square" lIns="90000" tIns="54000" rIns="90000" bIns="54000" anchor="t">
             <a:spAutoFit/>
           </a:bodyPr>
           <a:lstStyle/>
@@ -4307,7 +4389,7 @@
                 </a:solidFill>
                 <a:latin typeface="Plus Jakarta Sans"/>
               </a:rPr>
-              <a:t>Resultados</a:t>
+              <a:t>Resultados · ⟪quem apresenta⟫</a:t>
             </a:r>
           </a:p>
         </p:txBody>
@@ -4329,7 +4411,7 @@
           <a:noFill/>
         </p:spPr>
         <p:txBody>
-          <a:bodyPr wrap="square" lIns="90000" rIns="90000" tIns="54000" bIns="54000" anchor="t">
+          <a:bodyPr wrap="square" lIns="90000" tIns="54000" rIns="90000" bIns="54000" anchor="t">
             <a:spAutoFit/>
           </a:bodyPr>
           <a:lstStyle/>
@@ -4368,7 +4450,7 @@
           <a:noFill/>
         </p:spPr>
         <p:txBody>
-          <a:bodyPr wrap="square" lIns="90000" rIns="90000" tIns="54000" bIns="54000" anchor="t">
+          <a:bodyPr wrap="square" lIns="90000" tIns="54000" rIns="90000" bIns="54000" anchor="t">
             <a:spAutoFit/>
           </a:bodyPr>
           <a:lstStyle/>
@@ -4509,7 +4591,7 @@
           </a:fontRef>
         </p:style>
         <p:txBody>
-          <a:bodyPr rtlCol="0" anchor="t" wrap="square" lIns="90000" rIns="90000" tIns="54000" bIns="54000"/>
+          <a:bodyPr wrap="square" lIns="90000" tIns="54000" rIns="90000" bIns="54000" rtlCol="0" anchor="t"/>
           <a:lstStyle/>
           <a:p>
             <a:pPr algn="l">
@@ -4618,7 +4700,7 @@
 </file>
 
 <file path=ppt/slides/slide2.xml><?xml version="1.0" encoding="utf-8"?>
-<p:sld xmlns:a="http://schemas.openxmlformats.org/drawingml/2006/main" xmlns:p="http://schemas.openxmlformats.org/presentationml/2006/main" xmlns:r="http://schemas.openxmlformats.org/officeDocument/2006/relationships">
+<p:sld xmlns:a="http://schemas.openxmlformats.org/drawingml/2006/main" xmlns:r="http://schemas.openxmlformats.org/officeDocument/2006/relationships" xmlns:p="http://schemas.openxmlformats.org/presentationml/2006/main">
   <p:cSld>
     <p:spTree>
       <p:nvGrpSpPr>
@@ -4626,7 +4708,14 @@
         <p:cNvGrpSpPr/>
         <p:nvPr/>
       </p:nvGrpSpPr>
-      <p:grpSpPr/>
+      <p:grpSpPr>
+        <a:xfrm>
+          <a:off x="0" y="0"/>
+          <a:ext cx="0" cy="0"/>
+          <a:chOff x="0" y="0"/>
+          <a:chExt cx="0" cy="0"/>
+        </a:xfrm>
+      </p:grpSpPr>
       <p:sp>
         <p:nvSpPr>
           <p:cNvPr id="2" name="Rectangle 1"/>
@@ -4668,6 +4757,7 @@
           <a:lstStyle/>
           <a:p>
             <a:pPr algn="ctr"/>
+            <a:endParaRPr/>
           </a:p>
         </p:txBody>
       </p:sp>
@@ -4688,7 +4778,7 @@
           <a:noFill/>
         </p:spPr>
         <p:txBody>
-          <a:bodyPr wrap="square" lIns="90000" rIns="90000" tIns="54000" bIns="54000" anchor="t">
+          <a:bodyPr wrap="square" lIns="90000" tIns="54000" rIns="90000" bIns="54000" anchor="t">
             <a:spAutoFit/>
           </a:bodyPr>
           <a:lstStyle/>
@@ -4727,7 +4817,7 @@
           <a:noFill/>
         </p:spPr>
         <p:txBody>
-          <a:bodyPr wrap="square" lIns="90000" rIns="90000" tIns="54000" bIns="54000" anchor="t">
+          <a:bodyPr wrap="square" lIns="90000" tIns="54000" rIns="90000" bIns="54000" anchor="t">
             <a:spAutoFit/>
           </a:bodyPr>
           <a:lstStyle/>
@@ -4744,7 +4834,7 @@
                 </a:solidFill>
                 <a:latin typeface="Plus Jakarta Sans"/>
               </a:rPr>
-              <a:t>Fundamentação</a:t>
+              <a:t>Fundamentação · ⟪quem apresenta⟫</a:t>
             </a:r>
           </a:p>
         </p:txBody>
@@ -4766,7 +4856,7 @@
           <a:noFill/>
         </p:spPr>
         <p:txBody>
-          <a:bodyPr wrap="square" lIns="90000" rIns="90000" tIns="54000" bIns="54000" anchor="t">
+          <a:bodyPr wrap="square" lIns="90000" tIns="54000" rIns="90000" bIns="54000" anchor="t">
             <a:spAutoFit/>
           </a:bodyPr>
           <a:lstStyle/>
@@ -4805,7 +4895,7 @@
           <a:noFill/>
         </p:spPr>
         <p:txBody>
-          <a:bodyPr wrap="square" lIns="90000" rIns="90000" tIns="54000" bIns="54000" anchor="t">
+          <a:bodyPr wrap="square" lIns="90000" tIns="54000" rIns="90000" bIns="54000" anchor="t">
             <a:spAutoFit/>
           </a:bodyPr>
           <a:lstStyle/>
@@ -4858,15 +4948,12 @@
                 <a:spcPts val="400"/>
               </a:spcAft>
             </a:pPr>
-            <a:r>
-              <a:rPr sz="1900" b="0">
-                <a:solidFill>
-                  <a:srgbClr val="0D0F14"/>
-                </a:solidFill>
-                <a:latin typeface="Plus Jakarta Sans"/>
-              </a:rPr>
-              <a:t/>
-            </a:r>
+            <a:endParaRPr sz="1900" b="0">
+              <a:solidFill>
+                <a:srgbClr val="0D0F14"/>
+              </a:solidFill>
+              <a:latin typeface="Plus Jakarta Sans"/>
+            </a:endParaRPr>
           </a:p>
           <a:p>
             <a:pPr algn="l">
@@ -4984,7 +5071,7 @@
           </a:fontRef>
         </p:style>
         <p:txBody>
-          <a:bodyPr rtlCol="0" anchor="t" wrap="square" lIns="90000" rIns="90000" tIns="54000" bIns="54000"/>
+          <a:bodyPr wrap="square" lIns="90000" tIns="54000" rIns="90000" bIns="54000" rtlCol="0" anchor="t"/>
           <a:lstStyle/>
           <a:p>
             <a:pPr algn="l">
@@ -5104,15 +5191,12 @@
                 <a:spcPts val="400"/>
               </a:spcAft>
             </a:pPr>
-            <a:r>
-              <a:rPr sz="1800" b="0">
-                <a:solidFill>
-                  <a:srgbClr val="0D0F14"/>
-                </a:solidFill>
-                <a:latin typeface="Plus Jakarta Sans"/>
-              </a:rPr>
-              <a:t/>
-            </a:r>
+            <a:endParaRPr sz="1800" b="0">
+              <a:solidFill>
+                <a:srgbClr val="0D0F14"/>
+              </a:solidFill>
+              <a:latin typeface="Plus Jakarta Sans"/>
+            </a:endParaRPr>
           </a:p>
           <a:p>
             <a:pPr algn="l">
@@ -5141,7 +5225,7 @@
 </file>
 
 <file path=ppt/slides/slide3.xml><?xml version="1.0" encoding="utf-8"?>
-<p:sld xmlns:a="http://schemas.openxmlformats.org/drawingml/2006/main" xmlns:p="http://schemas.openxmlformats.org/presentationml/2006/main" xmlns:r="http://schemas.openxmlformats.org/officeDocument/2006/relationships">
+<p:sld xmlns:a="http://schemas.openxmlformats.org/drawingml/2006/main" xmlns:r="http://schemas.openxmlformats.org/officeDocument/2006/relationships" xmlns:p="http://schemas.openxmlformats.org/presentationml/2006/main">
   <p:cSld>
     <p:spTree>
       <p:nvGrpSpPr>
@@ -5149,7 +5233,14 @@
         <p:cNvGrpSpPr/>
         <p:nvPr/>
       </p:nvGrpSpPr>
-      <p:grpSpPr/>
+      <p:grpSpPr>
+        <a:xfrm>
+          <a:off x="0" y="0"/>
+          <a:ext cx="0" cy="0"/>
+          <a:chOff x="0" y="0"/>
+          <a:chExt cx="0" cy="0"/>
+        </a:xfrm>
+      </p:grpSpPr>
       <p:sp>
         <p:nvSpPr>
           <p:cNvPr id="2" name="Rectangle 1"/>
@@ -5191,6 +5282,7 @@
           <a:lstStyle/>
           <a:p>
             <a:pPr algn="ctr"/>
+            <a:endParaRPr/>
           </a:p>
         </p:txBody>
       </p:sp>
@@ -5211,7 +5303,7 @@
           <a:noFill/>
         </p:spPr>
         <p:txBody>
-          <a:bodyPr wrap="square" lIns="90000" rIns="90000" tIns="54000" bIns="54000" anchor="t">
+          <a:bodyPr wrap="square" lIns="90000" tIns="54000" rIns="90000" bIns="54000" anchor="t">
             <a:spAutoFit/>
           </a:bodyPr>
           <a:lstStyle/>
@@ -5228,7 +5320,7 @@
                 </a:solidFill>
                 <a:latin typeface="Plus Jakarta Sans"/>
               </a:rPr>
-              <a:t>Estruturas de capacidade fixa</a:t>
+              <a:t>Memória estável durante a coleta</a:t>
             </a:r>
           </a:p>
         </p:txBody>
@@ -5250,7 +5342,7 @@
           <a:noFill/>
         </p:spPr>
         <p:txBody>
-          <a:bodyPr wrap="square" lIns="90000" rIns="90000" tIns="54000" bIns="54000" anchor="t">
+          <a:bodyPr wrap="square" lIns="90000" tIns="54000" rIns="90000" bIns="54000" anchor="t">
             <a:spAutoFit/>
           </a:bodyPr>
           <a:lstStyle/>
@@ -5267,7 +5359,7 @@
                 </a:solidFill>
                 <a:latin typeface="Plus Jakarta Sans"/>
               </a:rPr>
-              <a:t>Fundamentação</a:t>
+              <a:t>Fundamentação · Juliano Cesar</a:t>
             </a:r>
           </a:p>
         </p:txBody>
@@ -5289,7 +5381,7 @@
           <a:noFill/>
         </p:spPr>
         <p:txBody>
-          <a:bodyPr wrap="square" lIns="90000" rIns="90000" tIns="54000" bIns="54000" anchor="t">
+          <a:bodyPr wrap="square" lIns="90000" tIns="54000" rIns="90000" bIns="54000" anchor="t">
             <a:spAutoFit/>
           </a:bodyPr>
           <a:lstStyle/>
@@ -5313,14 +5405,14 @@
       </p:sp>
       <p:sp>
         <p:nvSpPr>
-          <p:cNvPr id="6" name="TextBox 5"/>
+          <p:cNvPr id="6" name="Lead"/>
           <p:cNvSpPr txBox="1"/>
           <p:nvPr/>
         </p:nvSpPr>
         <p:spPr>
           <a:xfrm>
             <a:off x="432000" y="1080000"/>
-            <a:ext cx="11160000" cy="2160000"/>
+            <a:ext cx="11328000" cy="460000"/>
           </a:xfrm>
           <a:prstGeom prst="rect">
             <a:avLst/>
@@ -5328,8 +5420,8 @@
           <a:noFill/>
         </p:spPr>
         <p:txBody>
-          <a:bodyPr wrap="square" lIns="90000" rIns="90000" tIns="54000" bIns="54000" anchor="t">
-            <a:spAutoFit/>
+          <a:bodyPr wrap="square" lIns="90000" tIns="54000" rIns="90000" bIns="54000" anchor="ctr">
+            <a:noAutofit/>
           </a:bodyPr>
           <a:lstStyle/>
           <a:p>
@@ -5339,7 +5431,161 @@
               </a:spcAft>
             </a:pPr>
             <a:r>
-              <a:rPr sz="2100" b="1">
+              <a:rPr sz="2200" b="1">
+                <a:solidFill>
+                  <a:srgbClr val="0D0F14"/>
+                </a:solidFill>
+                <a:latin typeface="Plus Jakarta Sans"/>
+              </a:rPr>
+              <a:t>Duas estruturas, uma regra: </a:t>
+            </a:r>
+            <a:r>
+              <a:rPr sz="2200" b="1">
+                <a:solidFill>
+                  <a:srgbClr val="5E4AE3"/>
+                </a:solidFill>
+                <a:latin typeface="Plus Jakarta Sans"/>
+              </a:rPr>
+              <a:t>a memória não cresce.</a:t>
+            </a:r>
+          </a:p>
+        </p:txBody>
+      </p:sp>
+      <p:sp>
+        <p:nvSpPr>
+          <p:cNvPr id="7" name="Card Trajeto"/>
+          <p:cNvSpPr/>
+          <p:nvPr/>
+        </p:nvSpPr>
+        <p:spPr>
+          <a:xfrm>
+            <a:off x="432000" y="1740000"/>
+            <a:ext cx="5484000" cy="1420000"/>
+          </a:xfrm>
+          <a:prstGeom prst="roundRect">
+            <a:avLst>
+              <a:gd name="adj" fmla="val 6000"/>
+            </a:avLst>
+          </a:prstGeom>
+          <a:solidFill>
+            <a:srgbClr val="F4F5F9"/>
+          </a:solidFill>
+          <a:ln>
+            <a:noFill/>
+          </a:ln>
+          <a:effectLst/>
+        </p:spPr>
+        <p:style>
+          <a:lnRef idx="1">
+            <a:schemeClr val="accent1"/>
+          </a:lnRef>
+          <a:fillRef idx="3">
+            <a:schemeClr val="accent1"/>
+          </a:fillRef>
+          <a:effectRef idx="2">
+            <a:schemeClr val="accent1"/>
+          </a:effectRef>
+          <a:fontRef idx="minor">
+            <a:schemeClr val="lt1"/>
+          </a:fontRef>
+        </p:style>
+        <p:txBody>
+          <a:bodyPr wrap="square" lIns="90000" tIns="54000" rIns="90000" bIns="54000" rtlCol="0" anchor="ctr"/>
+          <a:lstStyle/>
+          <a:p>
+            <a:pPr algn="ctr"/>
+            <a:endParaRPr/>
+          </a:p>
+        </p:txBody>
+      </p:sp>
+      <p:sp>
+        <p:nvSpPr>
+          <p:cNvPr id="8" name="Número 1"/>
+          <p:cNvSpPr/>
+          <p:nvPr/>
+        </p:nvSpPr>
+        <p:spPr>
+          <a:xfrm>
+            <a:off x="672000" y="2126000"/>
+            <a:ext cx="576000" cy="648000"/>
+          </a:xfrm>
+          <a:prstGeom prst="roundRect">
+            <a:avLst>
+              <a:gd name="adj" fmla="val 6000"/>
+            </a:avLst>
+          </a:prstGeom>
+          <a:solidFill>
+            <a:srgbClr val="5E4AE3"/>
+          </a:solidFill>
+          <a:ln>
+            <a:noFill/>
+          </a:ln>
+          <a:effectLst/>
+        </p:spPr>
+        <p:style>
+          <a:lnRef idx="1">
+            <a:schemeClr val="accent1"/>
+          </a:lnRef>
+          <a:fillRef idx="3">
+            <a:schemeClr val="accent1"/>
+          </a:fillRef>
+          <a:effectRef idx="2">
+            <a:schemeClr val="accent1"/>
+          </a:effectRef>
+          <a:fontRef idx="minor">
+            <a:schemeClr val="lt1"/>
+          </a:fontRef>
+        </p:style>
+        <p:txBody>
+          <a:bodyPr wrap="square" lIns="90000" tIns="54000" rIns="90000" bIns="54000" rtlCol="0" anchor="ctr"/>
+          <a:lstStyle/>
+          <a:p>
+            <a:pPr algn="ctr">
+              <a:spcAft>
+                <a:spcPts val="0"/>
+              </a:spcAft>
+            </a:pPr>
+            <a:r>
+              <a:rPr sz="2000" b="1">
+                <a:solidFill>
+                  <a:srgbClr val="FFFFFF"/>
+                </a:solidFill>
+                <a:latin typeface="Plus Jakarta Sans"/>
+              </a:rPr>
+              <a:t>1</a:t>
+            </a:r>
+          </a:p>
+        </p:txBody>
+      </p:sp>
+      <p:sp>
+        <p:nvSpPr>
+          <p:cNvPr id="9" name="Texto Trajeto"/>
+          <p:cNvSpPr txBox="1"/>
+          <p:nvPr/>
+        </p:nvSpPr>
+        <p:spPr>
+          <a:xfrm>
+            <a:off x="1448000" y="1740000"/>
+            <a:ext cx="4308000" cy="1420000"/>
+          </a:xfrm>
+          <a:prstGeom prst="rect">
+            <a:avLst/>
+          </a:prstGeom>
+          <a:noFill/>
+        </p:spPr>
+        <p:txBody>
+          <a:bodyPr wrap="square" lIns="90000" tIns="54000" rIns="90000" bIns="54000" anchor="ctr">
+            <a:noAutofit/>
+          </a:bodyPr>
+          <a:lstStyle/>
+          <a:p>
+            <a:pPr algn="l">
+              <a:spcAft>
+                <a:spcPts val="400"/>
+              </a:spcAft>
+            </a:pPr>
+            <a:r>
+              <a:rPr sz="2200" b="1">
                 <a:solidFill>
                   <a:srgbClr val="0D0F14"/>
                 </a:solidFill>
@@ -5347,15 +5593,6 @@
               </a:rPr>
               <a:t>Trajeto</a:t>
             </a:r>
-            <a:r>
-              <a:rPr sz="2100" b="0">
-                <a:solidFill>
-                  <a:srgbClr val="0D0F14"/>
-                </a:solidFill>
-                <a:latin typeface="Plus Jakarta Sans"/>
-              </a:rPr>
-              <a:t> (imutável): tamanho O(1) · média e recorte temporal O(n), n ≤ capacidade · inserção copia a janela O(n)</a:t>
-            </a:r>
           </a:p>
           <a:p>
             <a:pPr algn="l">
@@ -5364,24 +5601,144 @@
               </a:spcAft>
             </a:pPr>
             <a:r>
-              <a:rPr sz="2100" b="1">
-                <a:solidFill>
-                  <a:srgbClr val="0D0F14"/>
-                </a:solidFill>
-                <a:latin typeface="Plus Jakarta Sans"/>
-              </a:rPr>
-              <a:t>CircularImuBuffer</a:t>
-            </a:r>
-            <a:r>
-              <a:rPr sz="2100" b="0">
-                <a:solidFill>
-                  <a:srgbClr val="0D0F14"/>
-                </a:solidFill>
-                <a:latin typeface="Plus Jakarta Sans"/>
-              </a:rPr>
-              <a:t> (anel de 500 ≈ 10 s): inserção O(1) · descarta o mais antigo e conta · snapshot/drenar O(n) devolvem CÓPIA</a:t>
-            </a:r>
-          </a:p>
+              <a:rPr sz="1700" b="0">
+                <a:solidFill>
+                  <a:srgbClr val="0D0F14"/>
+                </a:solidFill>
+                <a:latin typeface="Plus Jakarta Sans"/>
+              </a:rPr>
+              <a:t>guarda somente as últimas posições.</a:t>
+            </a:r>
+          </a:p>
+        </p:txBody>
+      </p:sp>
+      <p:sp>
+        <p:nvSpPr>
+          <p:cNvPr id="10" name="Card Buffer IMU"/>
+          <p:cNvSpPr/>
+          <p:nvPr/>
+        </p:nvSpPr>
+        <p:spPr>
+          <a:xfrm>
+            <a:off x="6276000" y="1740000"/>
+            <a:ext cx="5484000" cy="1420000"/>
+          </a:xfrm>
+          <a:prstGeom prst="roundRect">
+            <a:avLst>
+              <a:gd name="adj" fmla="val 6000"/>
+            </a:avLst>
+          </a:prstGeom>
+          <a:solidFill>
+            <a:srgbClr val="F4F5F9"/>
+          </a:solidFill>
+          <a:ln>
+            <a:noFill/>
+          </a:ln>
+          <a:effectLst/>
+        </p:spPr>
+        <p:style>
+          <a:lnRef idx="1">
+            <a:schemeClr val="accent1"/>
+          </a:lnRef>
+          <a:fillRef idx="3">
+            <a:schemeClr val="accent1"/>
+          </a:fillRef>
+          <a:effectRef idx="2">
+            <a:schemeClr val="accent1"/>
+          </a:effectRef>
+          <a:fontRef idx="minor">
+            <a:schemeClr val="lt1"/>
+          </a:fontRef>
+        </p:style>
+        <p:txBody>
+          <a:bodyPr wrap="square" lIns="90000" tIns="54000" rIns="90000" bIns="54000" rtlCol="0" anchor="ctr"/>
+          <a:lstStyle/>
+          <a:p>
+            <a:pPr algn="ctr"/>
+            <a:endParaRPr/>
+          </a:p>
+        </p:txBody>
+      </p:sp>
+      <p:sp>
+        <p:nvSpPr>
+          <p:cNvPr id="11" name="Número 2"/>
+          <p:cNvSpPr/>
+          <p:nvPr/>
+        </p:nvSpPr>
+        <p:spPr>
+          <a:xfrm>
+            <a:off x="6516000" y="2126000"/>
+            <a:ext cx="576000" cy="648000"/>
+          </a:xfrm>
+          <a:prstGeom prst="roundRect">
+            <a:avLst>
+              <a:gd name="adj" fmla="val 6000"/>
+            </a:avLst>
+          </a:prstGeom>
+          <a:solidFill>
+            <a:srgbClr val="5E4AE3"/>
+          </a:solidFill>
+          <a:ln>
+            <a:noFill/>
+          </a:ln>
+          <a:effectLst/>
+        </p:spPr>
+        <p:style>
+          <a:lnRef idx="1">
+            <a:schemeClr val="accent1"/>
+          </a:lnRef>
+          <a:fillRef idx="3">
+            <a:schemeClr val="accent1"/>
+          </a:fillRef>
+          <a:effectRef idx="2">
+            <a:schemeClr val="accent1"/>
+          </a:effectRef>
+          <a:fontRef idx="minor">
+            <a:schemeClr val="lt1"/>
+          </a:fontRef>
+        </p:style>
+        <p:txBody>
+          <a:bodyPr wrap="square" lIns="90000" tIns="54000" rIns="90000" bIns="54000" rtlCol="0" anchor="ctr"/>
+          <a:lstStyle/>
+          <a:p>
+            <a:pPr algn="ctr">
+              <a:spcAft>
+                <a:spcPts val="0"/>
+              </a:spcAft>
+            </a:pPr>
+            <a:r>
+              <a:rPr sz="2000" b="1">
+                <a:solidFill>
+                  <a:srgbClr val="FFFFFF"/>
+                </a:solidFill>
+                <a:latin typeface="Plus Jakarta Sans"/>
+              </a:rPr>
+              <a:t>2</a:t>
+            </a:r>
+          </a:p>
+        </p:txBody>
+      </p:sp>
+      <p:sp>
+        <p:nvSpPr>
+          <p:cNvPr id="12" name="Texto Buffer IMU"/>
+          <p:cNvSpPr txBox="1"/>
+          <p:nvPr/>
+        </p:nvSpPr>
+        <p:spPr>
+          <a:xfrm>
+            <a:off x="7292000" y="1740000"/>
+            <a:ext cx="4308000" cy="1420000"/>
+          </a:xfrm>
+          <a:prstGeom prst="rect">
+            <a:avLst/>
+          </a:prstGeom>
+          <a:noFill/>
+        </p:spPr>
+        <p:txBody>
+          <a:bodyPr wrap="square" lIns="90000" tIns="54000" rIns="90000" bIns="54000" anchor="ctr">
+            <a:noAutofit/>
+          </a:bodyPr>
+          <a:lstStyle/>
           <a:p>
             <a:pPr algn="l">
               <a:spcAft>
@@ -5389,13 +5746,13 @@
               </a:spcAft>
             </a:pPr>
             <a:r>
-              <a:rPr sz="2100" b="0">
-                <a:solidFill>
-                  <a:srgbClr val="0D0F14"/>
-                </a:solidFill>
-                <a:latin typeface="Plus Jakarta Sans"/>
-              </a:rPr>
-              <a:t/>
+              <a:rPr sz="2200" b="1">
+                <a:solidFill>
+                  <a:srgbClr val="0D0F14"/>
+                </a:solidFill>
+                <a:latin typeface="Plus Jakarta Sans"/>
+              </a:rPr>
+              <a:t>Buffer IMU</a:t>
             </a:r>
           </a:p>
           <a:p>
@@ -5405,24 +5762,103 @@
               </a:spcAft>
             </a:pPr>
             <a:r>
-              <a:rPr sz="2100" b="1">
-                <a:solidFill>
-                  <a:srgbClr val="0D0F14"/>
-                </a:solidFill>
-                <a:latin typeface="Plus Jakarta Sans"/>
-              </a:rPr>
-              <a:t>Por que capacidade fixa? </a:t>
-            </a:r>
-            <a:r>
-              <a:rPr sz="2100" b="0">
-                <a:solidFill>
-                  <a:srgbClr val="0D0F14"/>
-                </a:solidFill>
-                <a:latin typeface="Plus Jakarta Sans"/>
-              </a:rPr>
-              <a:t>o nó roda por tempo ilimitado; memória constante não depende do tempo de operação.</a:t>
-            </a:r>
-          </a:p>
+              <a:rPr sz="1700" b="0">
+                <a:solidFill>
+                  <a:srgbClr val="0D0F14"/>
+                </a:solidFill>
+                <a:latin typeface="Plus Jakarta Sans"/>
+              </a:rPr>
+              <a:t>guarda </a:t>
+            </a:r>
+            <a:r>
+              <a:rPr sz="1700" b="1">
+                <a:solidFill>
+                  <a:srgbClr val="5E4AE3"/>
+                </a:solidFill>
+                <a:latin typeface="Plus Jakarta Sans"/>
+              </a:rPr>
+              <a:t>500 leituras</a:t>
+            </a:r>
+            <a:r>
+              <a:rPr sz="1700" b="0">
+                <a:solidFill>
+                  <a:srgbClr val="0D0F14"/>
+                </a:solidFill>
+                <a:latin typeface="Plus Jakarta Sans"/>
+              </a:rPr>
+              <a:t>, cerca de 10 segundos.</a:t>
+            </a:r>
+          </a:p>
+        </p:txBody>
+      </p:sp>
+      <p:sp>
+        <p:nvSpPr>
+          <p:cNvPr id="13" name="Card regra"/>
+          <p:cNvSpPr/>
+          <p:nvPr/>
+        </p:nvSpPr>
+        <p:spPr>
+          <a:xfrm>
+            <a:off x="432000" y="3400000"/>
+            <a:ext cx="11328000" cy="1440000"/>
+          </a:xfrm>
+          <a:prstGeom prst="roundRect">
+            <a:avLst>
+              <a:gd name="adj" fmla="val 6000"/>
+            </a:avLst>
+          </a:prstGeom>
+          <a:solidFill>
+            <a:srgbClr val="F4F5F9"/>
+          </a:solidFill>
+          <a:ln>
+            <a:noFill/>
+          </a:ln>
+          <a:effectLst/>
+        </p:spPr>
+        <p:style>
+          <a:lnRef idx="1">
+            <a:schemeClr val="accent1"/>
+          </a:lnRef>
+          <a:fillRef idx="3">
+            <a:schemeClr val="accent1"/>
+          </a:fillRef>
+          <a:effectRef idx="2">
+            <a:schemeClr val="accent1"/>
+          </a:effectRef>
+          <a:fontRef idx="minor">
+            <a:schemeClr val="lt1"/>
+          </a:fontRef>
+        </p:style>
+        <p:txBody>
+          <a:bodyPr wrap="square" lIns="90000" tIns="54000" rIns="90000" bIns="54000" rtlCol="0" anchor="ctr"/>
+          <a:lstStyle/>
+          <a:p>
+            <a:pPr algn="ctr"/>
+            <a:endParaRPr/>
+          </a:p>
+        </p:txBody>
+      </p:sp>
+      <p:sp>
+        <p:nvSpPr>
+          <p:cNvPr id="14" name="Texto regra"/>
+          <p:cNvSpPr txBox="1"/>
+          <p:nvPr/>
+        </p:nvSpPr>
+        <p:spPr>
+          <a:xfrm>
+            <a:off x="672000" y="3400000"/>
+            <a:ext cx="4200000" cy="1440000"/>
+          </a:xfrm>
+          <a:prstGeom prst="rect">
+            <a:avLst/>
+          </a:prstGeom>
+          <a:noFill/>
+        </p:spPr>
+        <p:txBody>
+          <a:bodyPr wrap="square" lIns="90000" tIns="54000" rIns="90000" bIns="54000" anchor="ctr">
+            <a:noAutofit/>
+          </a:bodyPr>
+          <a:lstStyle/>
           <a:p>
             <a:pPr algn="l">
               <a:spcAft>
@@ -5430,22 +5866,13 @@
               </a:spcAft>
             </a:pPr>
             <a:r>
-              <a:rPr sz="2100" b="1">
-                <a:solidFill>
-                  <a:srgbClr val="0D0F14"/>
-                </a:solidFill>
-                <a:latin typeface="Plus Jakarta Sans"/>
-              </a:rPr>
-              <a:t>Por que cópia? </a:t>
-            </a:r>
-            <a:r>
-              <a:rPr sz="2100" b="0">
-                <a:solidFill>
-                  <a:srgbClr val="0D0F14"/>
-                </a:solidFill>
-                <a:latin typeface="Plus Jakarta Sans"/>
-              </a:rPr>
-              <a:t>sem ela o consumidor itera o vetor que o produtor sobrescreve → leitura fora de ordem intermitente.</a:t>
+              <a:rPr sz="1900" b="1">
+                <a:solidFill>
+                  <a:srgbClr val="0D0F14"/>
+                </a:solidFill>
+                <a:latin typeface="Plus Jakarta Sans"/>
+              </a:rPr>
+              <a:t>Chegou uma leitura e está cheio?</a:t>
             </a:r>
           </a:p>
           <a:p>
@@ -5455,22 +5882,655 @@
               </a:spcAft>
             </a:pPr>
             <a:r>
-              <a:rPr sz="2100" b="1">
-                <a:solidFill>
-                  <a:srgbClr val="0D0F14"/>
-                </a:solidFill>
-                <a:latin typeface="Plus Jakarta Sans"/>
-              </a:rPr>
-              <a:t>O que poderia ser melhor: </a:t>
-            </a:r>
-            <a:r>
-              <a:rPr sz="2100" b="0">
-                <a:solidFill>
-                  <a:srgbClr val="0D0F14"/>
-                </a:solidFill>
-                <a:latin typeface="Plus Jakarta Sans"/>
-              </a:rPr>
-              <a:t>a inserção do Trajeto (O(n)); um anel mutável protegido a deixa O(1).</a:t>
+              <a:rPr sz="1900" b="1">
+                <a:solidFill>
+                  <a:srgbClr val="5E4AE3"/>
+                </a:solidFill>
+                <a:latin typeface="Plus Jakarta Sans"/>
+              </a:rPr>
+              <a:t>A mais antiga sai.</a:t>
+            </a:r>
+          </a:p>
+        </p:txBody>
+      </p:sp>
+      <p:sp>
+        <p:nvSpPr>
+          <p:cNvPr id="15" name="Célula 1"/>
+          <p:cNvSpPr/>
+          <p:nvPr/>
+        </p:nvSpPr>
+        <p:spPr>
+          <a:xfrm>
+            <a:off x="5150000" y="3640000"/>
+            <a:ext cx="760000" cy="640000"/>
+          </a:xfrm>
+          <a:prstGeom prst="roundRect">
+            <a:avLst>
+              <a:gd name="adj" fmla="val 12000"/>
+            </a:avLst>
+          </a:prstGeom>
+          <a:solidFill>
+            <a:srgbClr val="D5D8E3"/>
+          </a:solidFill>
+          <a:ln>
+            <a:noFill/>
+          </a:ln>
+          <a:effectLst/>
+        </p:spPr>
+        <p:style>
+          <a:lnRef idx="1">
+            <a:schemeClr val="accent1"/>
+          </a:lnRef>
+          <a:fillRef idx="3">
+            <a:schemeClr val="accent1"/>
+          </a:fillRef>
+          <a:effectRef idx="2">
+            <a:schemeClr val="accent1"/>
+          </a:effectRef>
+          <a:fontRef idx="minor">
+            <a:schemeClr val="lt1"/>
+          </a:fontRef>
+        </p:style>
+        <p:txBody>
+          <a:bodyPr wrap="square" lIns="90000" tIns="54000" rIns="90000" bIns="54000" rtlCol="0" anchor="ctr"/>
+          <a:lstStyle/>
+          <a:p>
+            <a:pPr algn="ctr"/>
+            <a:endParaRPr/>
+          </a:p>
+        </p:txBody>
+      </p:sp>
+      <p:sp>
+        <p:nvSpPr>
+          <p:cNvPr id="16" name="Célula 2"/>
+          <p:cNvSpPr/>
+          <p:nvPr/>
+        </p:nvSpPr>
+        <p:spPr>
+          <a:xfrm>
+            <a:off x="6040000" y="3640000"/>
+            <a:ext cx="760000" cy="640000"/>
+          </a:xfrm>
+          <a:prstGeom prst="roundRect">
+            <a:avLst>
+              <a:gd name="adj" fmla="val 12000"/>
+            </a:avLst>
+          </a:prstGeom>
+          <a:solidFill>
+            <a:srgbClr val="B9B0F4"/>
+          </a:solidFill>
+          <a:ln>
+            <a:noFill/>
+          </a:ln>
+          <a:effectLst/>
+        </p:spPr>
+        <p:style>
+          <a:lnRef idx="1">
+            <a:schemeClr val="accent1"/>
+          </a:lnRef>
+          <a:fillRef idx="3">
+            <a:schemeClr val="accent1"/>
+          </a:fillRef>
+          <a:effectRef idx="2">
+            <a:schemeClr val="accent1"/>
+          </a:effectRef>
+          <a:fontRef idx="minor">
+            <a:schemeClr val="lt1"/>
+          </a:fontRef>
+        </p:style>
+        <p:txBody>
+          <a:bodyPr wrap="square" lIns="90000" tIns="54000" rIns="90000" bIns="54000" rtlCol="0" anchor="ctr"/>
+          <a:lstStyle/>
+          <a:p>
+            <a:pPr algn="ctr"/>
+            <a:endParaRPr/>
+          </a:p>
+        </p:txBody>
+      </p:sp>
+      <p:sp>
+        <p:nvSpPr>
+          <p:cNvPr id="17" name="Célula 3"/>
+          <p:cNvSpPr/>
+          <p:nvPr/>
+        </p:nvSpPr>
+        <p:spPr>
+          <a:xfrm>
+            <a:off x="6930000" y="3640000"/>
+            <a:ext cx="760000" cy="640000"/>
+          </a:xfrm>
+          <a:prstGeom prst="roundRect">
+            <a:avLst>
+              <a:gd name="adj" fmla="val 12000"/>
+            </a:avLst>
+          </a:prstGeom>
+          <a:solidFill>
+            <a:srgbClr val="B9B0F4"/>
+          </a:solidFill>
+          <a:ln>
+            <a:noFill/>
+          </a:ln>
+          <a:effectLst/>
+        </p:spPr>
+        <p:style>
+          <a:lnRef idx="1">
+            <a:schemeClr val="accent1"/>
+          </a:lnRef>
+          <a:fillRef idx="3">
+            <a:schemeClr val="accent1"/>
+          </a:fillRef>
+          <a:effectRef idx="2">
+            <a:schemeClr val="accent1"/>
+          </a:effectRef>
+          <a:fontRef idx="minor">
+            <a:schemeClr val="lt1"/>
+          </a:fontRef>
+        </p:style>
+        <p:txBody>
+          <a:bodyPr wrap="square" lIns="90000" tIns="54000" rIns="90000" bIns="54000" rtlCol="0" anchor="ctr"/>
+          <a:lstStyle/>
+          <a:p>
+            <a:pPr algn="ctr"/>
+            <a:endParaRPr/>
+          </a:p>
+        </p:txBody>
+      </p:sp>
+      <p:sp>
+        <p:nvSpPr>
+          <p:cNvPr id="18" name="Célula 4"/>
+          <p:cNvSpPr/>
+          <p:nvPr/>
+        </p:nvSpPr>
+        <p:spPr>
+          <a:xfrm>
+            <a:off x="7820000" y="3640000"/>
+            <a:ext cx="760000" cy="640000"/>
+          </a:xfrm>
+          <a:prstGeom prst="roundRect">
+            <a:avLst>
+              <a:gd name="adj" fmla="val 12000"/>
+            </a:avLst>
+          </a:prstGeom>
+          <a:solidFill>
+            <a:srgbClr val="B9B0F4"/>
+          </a:solidFill>
+          <a:ln>
+            <a:noFill/>
+          </a:ln>
+          <a:effectLst/>
+        </p:spPr>
+        <p:style>
+          <a:lnRef idx="1">
+            <a:schemeClr val="accent1"/>
+          </a:lnRef>
+          <a:fillRef idx="3">
+            <a:schemeClr val="accent1"/>
+          </a:fillRef>
+          <a:effectRef idx="2">
+            <a:schemeClr val="accent1"/>
+          </a:effectRef>
+          <a:fontRef idx="minor">
+            <a:schemeClr val="lt1"/>
+          </a:fontRef>
+        </p:style>
+        <p:txBody>
+          <a:bodyPr wrap="square" lIns="90000" tIns="54000" rIns="90000" bIns="54000" rtlCol="0" anchor="ctr"/>
+          <a:lstStyle/>
+          <a:p>
+            <a:pPr algn="ctr"/>
+            <a:endParaRPr/>
+          </a:p>
+        </p:txBody>
+      </p:sp>
+      <p:sp>
+        <p:nvSpPr>
+          <p:cNvPr id="19" name="Célula 5"/>
+          <p:cNvSpPr/>
+          <p:nvPr/>
+        </p:nvSpPr>
+        <p:spPr>
+          <a:xfrm>
+            <a:off x="8710000" y="3640000"/>
+            <a:ext cx="760000" cy="640000"/>
+          </a:xfrm>
+          <a:prstGeom prst="roundRect">
+            <a:avLst>
+              <a:gd name="adj" fmla="val 12000"/>
+            </a:avLst>
+          </a:prstGeom>
+          <a:solidFill>
+            <a:srgbClr val="B9B0F4"/>
+          </a:solidFill>
+          <a:ln>
+            <a:noFill/>
+          </a:ln>
+          <a:effectLst/>
+        </p:spPr>
+        <p:style>
+          <a:lnRef idx="1">
+            <a:schemeClr val="accent1"/>
+          </a:lnRef>
+          <a:fillRef idx="3">
+            <a:schemeClr val="accent1"/>
+          </a:fillRef>
+          <a:effectRef idx="2">
+            <a:schemeClr val="accent1"/>
+          </a:effectRef>
+          <a:fontRef idx="minor">
+            <a:schemeClr val="lt1"/>
+          </a:fontRef>
+        </p:style>
+        <p:txBody>
+          <a:bodyPr wrap="square" lIns="90000" tIns="54000" rIns="90000" bIns="54000" rtlCol="0" anchor="ctr"/>
+          <a:lstStyle/>
+          <a:p>
+            <a:pPr algn="ctr"/>
+            <a:endParaRPr/>
+          </a:p>
+        </p:txBody>
+      </p:sp>
+      <p:sp>
+        <p:nvSpPr>
+          <p:cNvPr id="20" name="Célula 6"/>
+          <p:cNvSpPr/>
+          <p:nvPr/>
+        </p:nvSpPr>
+        <p:spPr>
+          <a:xfrm>
+            <a:off x="9600000" y="3640000"/>
+            <a:ext cx="760000" cy="640000"/>
+          </a:xfrm>
+          <a:prstGeom prst="roundRect">
+            <a:avLst>
+              <a:gd name="adj" fmla="val 12000"/>
+            </a:avLst>
+          </a:prstGeom>
+          <a:solidFill>
+            <a:srgbClr val="B9B0F4"/>
+          </a:solidFill>
+          <a:ln>
+            <a:noFill/>
+          </a:ln>
+          <a:effectLst/>
+        </p:spPr>
+        <p:style>
+          <a:lnRef idx="1">
+            <a:schemeClr val="accent1"/>
+          </a:lnRef>
+          <a:fillRef idx="3">
+            <a:schemeClr val="accent1"/>
+          </a:fillRef>
+          <a:effectRef idx="2">
+            <a:schemeClr val="accent1"/>
+          </a:effectRef>
+          <a:fontRef idx="minor">
+            <a:schemeClr val="lt1"/>
+          </a:fontRef>
+        </p:style>
+        <p:txBody>
+          <a:bodyPr wrap="square" lIns="90000" tIns="54000" rIns="90000" bIns="54000" rtlCol="0" anchor="ctr"/>
+          <a:lstStyle/>
+          <a:p>
+            <a:pPr algn="ctr"/>
+            <a:endParaRPr/>
+          </a:p>
+        </p:txBody>
+      </p:sp>
+      <p:sp>
+        <p:nvSpPr>
+          <p:cNvPr id="21" name="Célula 7"/>
+          <p:cNvSpPr/>
+          <p:nvPr/>
+        </p:nvSpPr>
+        <p:spPr>
+          <a:xfrm>
+            <a:off x="10490000" y="3640000"/>
+            <a:ext cx="760000" cy="640000"/>
+          </a:xfrm>
+          <a:prstGeom prst="roundRect">
+            <a:avLst>
+              <a:gd name="adj" fmla="val 12000"/>
+            </a:avLst>
+          </a:prstGeom>
+          <a:solidFill>
+            <a:srgbClr val="5E4AE3"/>
+          </a:solidFill>
+          <a:ln>
+            <a:noFill/>
+          </a:ln>
+          <a:effectLst/>
+        </p:spPr>
+        <p:style>
+          <a:lnRef idx="1">
+            <a:schemeClr val="accent1"/>
+          </a:lnRef>
+          <a:fillRef idx="3">
+            <a:schemeClr val="accent1"/>
+          </a:fillRef>
+          <a:effectRef idx="2">
+            <a:schemeClr val="accent1"/>
+          </a:effectRef>
+          <a:fontRef idx="minor">
+            <a:schemeClr val="lt1"/>
+          </a:fontRef>
+        </p:style>
+        <p:txBody>
+          <a:bodyPr wrap="square" lIns="90000" tIns="54000" rIns="90000" bIns="54000" rtlCol="0" anchor="ctr"/>
+          <a:lstStyle/>
+          <a:p>
+            <a:pPr algn="ctr"/>
+            <a:endParaRPr/>
+          </a:p>
+        </p:txBody>
+      </p:sp>
+      <p:sp>
+        <p:nvSpPr>
+          <p:cNvPr id="22" name="Rótulo sai"/>
+          <p:cNvSpPr txBox="1"/>
+          <p:nvPr/>
+        </p:nvSpPr>
+        <p:spPr>
+          <a:xfrm>
+            <a:off x="4980000" y="4340000"/>
+            <a:ext cx="1100000" cy="340000"/>
+          </a:xfrm>
+          <a:prstGeom prst="rect">
+            <a:avLst/>
+          </a:prstGeom>
+          <a:noFill/>
+        </p:spPr>
+        <p:txBody>
+          <a:bodyPr wrap="square" lIns="0" tIns="0" rIns="0" bIns="0" anchor="t">
+            <a:noAutofit/>
+          </a:bodyPr>
+          <a:lstStyle/>
+          <a:p>
+            <a:pPr algn="ctr">
+              <a:spcAft>
+                <a:spcPts val="0"/>
+              </a:spcAft>
+            </a:pPr>
+            <a:r>
+              <a:rPr lang="pt-BR" sz="1400" b="1" dirty="0">
+                <a:solidFill>
+                  <a:srgbClr val="6B6F80"/>
+                </a:solidFill>
+                <a:latin typeface="Plus Jakarta Sans"/>
+              </a:rPr>
+              <a:t>←</a:t>
+            </a:r>
+          </a:p>
+        </p:txBody>
+      </p:sp>
+      <p:sp>
+        <p:nvSpPr>
+          <p:cNvPr id="23" name="Rótulo buffer"/>
+          <p:cNvSpPr txBox="1"/>
+          <p:nvPr/>
+        </p:nvSpPr>
+        <p:spPr>
+          <a:xfrm>
+            <a:off x="6040000" y="4340000"/>
+            <a:ext cx="4320000" cy="340000"/>
+          </a:xfrm>
+          <a:prstGeom prst="rect">
+            <a:avLst/>
+          </a:prstGeom>
+          <a:noFill/>
+        </p:spPr>
+        <p:txBody>
+          <a:bodyPr wrap="square" lIns="0" tIns="0" rIns="0" bIns="0" anchor="t">
+            <a:noAutofit/>
+          </a:bodyPr>
+          <a:lstStyle/>
+          <a:p>
+            <a:pPr algn="ctr">
+              <a:spcAft>
+                <a:spcPts val="0"/>
+              </a:spcAft>
+            </a:pPr>
+            <a:r>
+              <a:rPr sz="1400" b="1">
+                <a:solidFill>
+                  <a:srgbClr val="0D0F14"/>
+                </a:solidFill>
+                <a:latin typeface="Plus Jakarta Sans"/>
+              </a:rPr>
+              <a:t>500 leituras · ≈ 10 s</a:t>
+            </a:r>
+          </a:p>
+        </p:txBody>
+      </p:sp>
+      <p:sp>
+        <p:nvSpPr>
+          <p:cNvPr id="24" name="Rótulo entra"/>
+          <p:cNvSpPr txBox="1"/>
+          <p:nvPr/>
+        </p:nvSpPr>
+        <p:spPr>
+          <a:xfrm>
+            <a:off x="10320000" y="4340000"/>
+            <a:ext cx="1100000" cy="340000"/>
+          </a:xfrm>
+          <a:prstGeom prst="rect">
+            <a:avLst/>
+          </a:prstGeom>
+          <a:noFill/>
+        </p:spPr>
+        <p:txBody>
+          <a:bodyPr wrap="square" lIns="0" tIns="0" rIns="0" bIns="0" anchor="t">
+            <a:noAutofit/>
+          </a:bodyPr>
+          <a:lstStyle/>
+          <a:p>
+            <a:pPr algn="ctr">
+              <a:spcAft>
+                <a:spcPts val="0"/>
+              </a:spcAft>
+            </a:pPr>
+            <a:r>
+              <a:rPr lang="pt-BR" sz="1400" b="1" dirty="0">
+                <a:solidFill>
+                  <a:srgbClr val="5E4AE3"/>
+                </a:solidFill>
+                <a:latin typeface="Plus Jakarta Sans"/>
+              </a:rPr>
+              <a:t>→</a:t>
+            </a:r>
+            <a:endParaRPr sz="1400" b="1" dirty="0">
+              <a:solidFill>
+                <a:srgbClr val="5E4AE3"/>
+              </a:solidFill>
+              <a:latin typeface="Plus Jakarta Sans"/>
+            </a:endParaRPr>
+          </a:p>
+        </p:txBody>
+      </p:sp>
+      <p:sp>
+        <p:nvSpPr>
+          <p:cNvPr id="25" name="Card cópia"/>
+          <p:cNvSpPr/>
+          <p:nvPr/>
+        </p:nvSpPr>
+        <p:spPr>
+          <a:xfrm>
+            <a:off x="432000" y="5060000"/>
+            <a:ext cx="5484000" cy="1040000"/>
+          </a:xfrm>
+          <a:prstGeom prst="roundRect">
+            <a:avLst>
+              <a:gd name="adj" fmla="val 6000"/>
+            </a:avLst>
+          </a:prstGeom>
+          <a:solidFill>
+            <a:srgbClr val="F4F5F9"/>
+          </a:solidFill>
+          <a:ln>
+            <a:noFill/>
+          </a:ln>
+          <a:effectLst/>
+        </p:spPr>
+        <p:style>
+          <a:lnRef idx="1">
+            <a:schemeClr val="accent1"/>
+          </a:lnRef>
+          <a:fillRef idx="3">
+            <a:schemeClr val="accent1"/>
+          </a:fillRef>
+          <a:effectRef idx="2">
+            <a:schemeClr val="accent1"/>
+          </a:effectRef>
+          <a:fontRef idx="minor">
+            <a:schemeClr val="lt1"/>
+          </a:fontRef>
+        </p:style>
+        <p:txBody>
+          <a:bodyPr wrap="square" lIns="90000" tIns="54000" rIns="90000" bIns="54000" rtlCol="0" anchor="ctr"/>
+          <a:lstStyle/>
+          <a:p>
+            <a:pPr algn="ctr"/>
+            <a:endParaRPr/>
+          </a:p>
+        </p:txBody>
+      </p:sp>
+      <p:sp>
+        <p:nvSpPr>
+          <p:cNvPr id="26" name="Texto cópia"/>
+          <p:cNvSpPr txBox="1"/>
+          <p:nvPr/>
+        </p:nvSpPr>
+        <p:spPr>
+          <a:xfrm>
+            <a:off x="672000" y="5060000"/>
+            <a:ext cx="5004000" cy="1040000"/>
+          </a:xfrm>
+          <a:prstGeom prst="rect">
+            <a:avLst/>
+          </a:prstGeom>
+          <a:noFill/>
+        </p:spPr>
+        <p:txBody>
+          <a:bodyPr wrap="square" lIns="90000" tIns="54000" rIns="90000" bIns="54000" anchor="ctr">
+            <a:noAutofit/>
+          </a:bodyPr>
+          <a:lstStyle/>
+          <a:p>
+            <a:pPr algn="l">
+              <a:spcAft>
+                <a:spcPts val="0"/>
+              </a:spcAft>
+            </a:pPr>
+            <a:r>
+              <a:rPr sz="1600" b="0">
+                <a:solidFill>
+                  <a:srgbClr val="0D0F14"/>
+                </a:solidFill>
+                <a:latin typeface="Plus Jakarta Sans"/>
+              </a:rPr>
+              <a:t>Quem lê o buffer recebe </a:t>
+            </a:r>
+            <a:r>
+              <a:rPr sz="1600" b="1">
+                <a:solidFill>
+                  <a:srgbClr val="5E4AE3"/>
+                </a:solidFill>
+                <a:latin typeface="Plus Jakarta Sans"/>
+              </a:rPr>
+              <a:t>uma cópia</a:t>
+            </a:r>
+            <a:r>
+              <a:rPr sz="1600" b="0">
+                <a:solidFill>
+                  <a:srgbClr val="0D0F14"/>
+                </a:solidFill>
+                <a:latin typeface="Plus Jakarta Sans"/>
+              </a:rPr>
+              <a:t>: a leitura não se mistura com uma gravação em andamento.</a:t>
+            </a:r>
+          </a:p>
+        </p:txBody>
+      </p:sp>
+      <p:sp>
+        <p:nvSpPr>
+          <p:cNvPr id="27" name="Card conclusão"/>
+          <p:cNvSpPr/>
+          <p:nvPr/>
+        </p:nvSpPr>
+        <p:spPr>
+          <a:xfrm>
+            <a:off x="6276000" y="5060000"/>
+            <a:ext cx="5484000" cy="1040000"/>
+          </a:xfrm>
+          <a:prstGeom prst="roundRect">
+            <a:avLst>
+              <a:gd name="adj" fmla="val 6000"/>
+            </a:avLst>
+          </a:prstGeom>
+          <a:solidFill>
+            <a:srgbClr val="5E4AE3"/>
+          </a:solidFill>
+          <a:ln>
+            <a:noFill/>
+          </a:ln>
+          <a:effectLst/>
+        </p:spPr>
+        <p:style>
+          <a:lnRef idx="1">
+            <a:schemeClr val="accent1"/>
+          </a:lnRef>
+          <a:fillRef idx="3">
+            <a:schemeClr val="accent1"/>
+          </a:fillRef>
+          <a:effectRef idx="2">
+            <a:schemeClr val="accent1"/>
+          </a:effectRef>
+          <a:fontRef idx="minor">
+            <a:schemeClr val="lt1"/>
+          </a:fontRef>
+        </p:style>
+        <p:txBody>
+          <a:bodyPr wrap="square" lIns="90000" tIns="54000" rIns="90000" bIns="54000" rtlCol="0" anchor="ctr"/>
+          <a:lstStyle/>
+          <a:p>
+            <a:pPr algn="ctr"/>
+            <a:endParaRPr/>
+          </a:p>
+        </p:txBody>
+      </p:sp>
+      <p:sp>
+        <p:nvSpPr>
+          <p:cNvPr id="28" name="Texto conclusão"/>
+          <p:cNvSpPr txBox="1"/>
+          <p:nvPr/>
+        </p:nvSpPr>
+        <p:spPr>
+          <a:xfrm>
+            <a:off x="6516000" y="5060000"/>
+            <a:ext cx="5004000" cy="1040000"/>
+          </a:xfrm>
+          <a:prstGeom prst="rect">
+            <a:avLst/>
+          </a:prstGeom>
+          <a:noFill/>
+        </p:spPr>
+        <p:txBody>
+          <a:bodyPr wrap="square" lIns="90000" tIns="54000" rIns="90000" bIns="54000" anchor="ctr">
+            <a:noAutofit/>
+          </a:bodyPr>
+          <a:lstStyle/>
+          <a:p>
+            <a:pPr algn="l">
+              <a:spcAft>
+                <a:spcPts val="0"/>
+              </a:spcAft>
+            </a:pPr>
+            <a:r>
+              <a:rPr sz="1600" b="1">
+                <a:solidFill>
+                  <a:srgbClr val="FFFFFF"/>
+                </a:solidFill>
+                <a:latin typeface="Plus Jakarta Sans"/>
+              </a:rPr>
+              <a:t>Assim, o app pode ficar ligado por muito tempo sem aumentar o uso de memória.</a:t>
             </a:r>
           </a:p>
         </p:txBody>
@@ -5484,7 +6544,7 @@
 </file>
 
 <file path=ppt/slides/slide4.xml><?xml version="1.0" encoding="utf-8"?>
-<p:sld xmlns:a="http://schemas.openxmlformats.org/drawingml/2006/main" xmlns:p="http://schemas.openxmlformats.org/presentationml/2006/main" xmlns:r="http://schemas.openxmlformats.org/officeDocument/2006/relationships">
+<p:sld xmlns:a="http://schemas.openxmlformats.org/drawingml/2006/main" xmlns:r="http://schemas.openxmlformats.org/officeDocument/2006/relationships" xmlns:p="http://schemas.openxmlformats.org/presentationml/2006/main">
   <p:cSld>
     <p:spTree>
       <p:nvGrpSpPr>
@@ -5492,7 +6552,14 @@
         <p:cNvGrpSpPr/>
         <p:nvPr/>
       </p:nvGrpSpPr>
-      <p:grpSpPr/>
+      <p:grpSpPr>
+        <a:xfrm>
+          <a:off x="0" y="0"/>
+          <a:ext cx="0" cy="0"/>
+          <a:chOff x="0" y="0"/>
+          <a:chExt cx="0" cy="0"/>
+        </a:xfrm>
+      </p:grpSpPr>
       <p:sp>
         <p:nvSpPr>
           <p:cNvPr id="2" name="Rectangle 1"/>
@@ -5534,6 +6601,7 @@
           <a:lstStyle/>
           <a:p>
             <a:pPr algn="ctr"/>
+            <a:endParaRPr/>
           </a:p>
         </p:txBody>
       </p:sp>
@@ -5554,7 +6622,7 @@
           <a:noFill/>
         </p:spPr>
         <p:txBody>
-          <a:bodyPr wrap="square" lIns="90000" rIns="90000" tIns="54000" bIns="54000" anchor="t">
+          <a:bodyPr wrap="square" lIns="90000" tIns="54000" rIns="90000" bIns="54000" anchor="t">
             <a:spAutoFit/>
           </a:bodyPr>
           <a:lstStyle/>
@@ -5571,7 +6639,7 @@
                 </a:solidFill>
                 <a:latin typeface="Plus Jakarta Sans"/>
               </a:rPr>
-              <a:t>Incerteza vem do sensor</a:t>
+              <a:t>A precisão vem do próprio GPS</a:t>
             </a:r>
           </a:p>
         </p:txBody>
@@ -5593,7 +6661,7 @@
           <a:noFill/>
         </p:spPr>
         <p:txBody>
-          <a:bodyPr wrap="square" lIns="90000" rIns="90000" tIns="54000" bIns="54000" anchor="t">
+          <a:bodyPr wrap="square" lIns="90000" tIns="54000" rIns="90000" bIns="54000" anchor="t">
             <a:spAutoFit/>
           </a:bodyPr>
           <a:lstStyle/>
@@ -5610,7 +6678,7 @@
                 </a:solidFill>
                 <a:latin typeface="Plus Jakarta Sans"/>
               </a:rPr>
-              <a:t>Fundamentação</a:t>
+              <a:t>Fundamentação · Juliano Cesar</a:t>
             </a:r>
           </a:p>
         </p:txBody>
@@ -5632,7 +6700,7 @@
           <a:noFill/>
         </p:spPr>
         <p:txBody>
-          <a:bodyPr wrap="square" lIns="90000" rIns="90000" tIns="54000" bIns="54000" anchor="t">
+          <a:bodyPr wrap="square" lIns="90000" tIns="54000" rIns="90000" bIns="54000" anchor="t">
             <a:spAutoFit/>
           </a:bodyPr>
           <a:lstStyle/>
@@ -5656,14 +6724,73 @@
       </p:sp>
       <p:sp>
         <p:nvSpPr>
-          <p:cNvPr id="6" name="TextBox 5"/>
+          <p:cNvPr id="6" name="Número 1"/>
+          <p:cNvSpPr/>
+          <p:nvPr/>
+        </p:nvSpPr>
+        <p:spPr>
+          <a:xfrm>
+            <a:off x="432000" y="1080000"/>
+            <a:ext cx="576000" cy="648000"/>
+          </a:xfrm>
+          <a:prstGeom prst="roundRect">
+            <a:avLst>
+              <a:gd name="adj" fmla="val 6000"/>
+            </a:avLst>
+          </a:prstGeom>
+          <a:solidFill>
+            <a:srgbClr val="5E4AE3"/>
+          </a:solidFill>
+          <a:ln>
+            <a:noFill/>
+          </a:ln>
+          <a:effectLst/>
+        </p:spPr>
+        <p:style>
+          <a:lnRef idx="1">
+            <a:schemeClr val="accent1"/>
+          </a:lnRef>
+          <a:fillRef idx="3">
+            <a:schemeClr val="accent1"/>
+          </a:fillRef>
+          <a:effectRef idx="2">
+            <a:schemeClr val="accent1"/>
+          </a:effectRef>
+          <a:fontRef idx="minor">
+            <a:schemeClr val="lt1"/>
+          </a:fontRef>
+        </p:style>
+        <p:txBody>
+          <a:bodyPr wrap="square" lIns="90000" tIns="54000" rIns="90000" bIns="54000" rtlCol="0" anchor="ctr"/>
+          <a:lstStyle/>
+          <a:p>
+            <a:pPr algn="ctr">
+              <a:spcAft>
+                <a:spcPts val="0"/>
+              </a:spcAft>
+            </a:pPr>
+            <a:r>
+              <a:rPr sz="2000" b="1">
+                <a:solidFill>
+                  <a:srgbClr val="FFFFFF"/>
+                </a:solidFill>
+                <a:latin typeface="Plus Jakarta Sans"/>
+              </a:rPr>
+              <a:t>1</a:t>
+            </a:r>
+          </a:p>
+        </p:txBody>
+      </p:sp>
+      <p:sp>
+        <p:nvSpPr>
+          <p:cNvPr id="7" name="Passo 1"/>
           <p:cNvSpPr txBox="1"/>
           <p:nvPr/>
         </p:nvSpPr>
         <p:spPr>
           <a:xfrm>
-            <a:off x="432000" y="1080000"/>
-            <a:ext cx="5760000" cy="4680000"/>
+            <a:off x="1152000" y="1080000"/>
+            <a:ext cx="5280000" cy="648000"/>
           </a:xfrm>
           <a:prstGeom prst="rect">
             <a:avLst/>
@@ -5671,161 +6798,644 @@
           <a:noFill/>
         </p:spPr>
         <p:txBody>
-          <a:bodyPr wrap="square" lIns="90000" rIns="90000" tIns="54000" bIns="54000" anchor="t">
-            <a:spAutoFit/>
+          <a:bodyPr wrap="square" lIns="90000" tIns="54000" rIns="90000" bIns="54000" anchor="ctr">
+            <a:noAutofit/>
           </a:bodyPr>
           <a:lstStyle/>
           <a:p>
             <a:pPr algn="l">
               <a:spcAft>
-                <a:spcPts val="400"/>
-              </a:spcAft>
-            </a:pPr>
-            <a:r>
-              <a:rPr sz="1800" b="1">
-                <a:solidFill>
-                  <a:srgbClr val="0D0F14"/>
-                </a:solidFill>
-                <a:latin typeface="Plus Jakarta Sans"/>
-              </a:rPr>
-              <a:t>Posição: </a:t>
-            </a:r>
-            <a:r>
-              <a:rPr sz="1800" b="0">
-                <a:solidFill>
-                  <a:srgbClr val="0D0F14"/>
-                </a:solidFill>
-                <a:latin typeface="Plus Jakarta Sans"/>
-              </a:rPr>
-              <a:t>o Android dá um raio r68 (68%), não σ.</a:t>
-            </a:r>
-          </a:p>
-          <a:p>
-            <a:pPr algn="l">
-              <a:spcAft>
-                <a:spcPts val="400"/>
-              </a:spcAft>
-            </a:pPr>
-            <a:r>
-              <a:rPr sz="1800" b="0">
-                <a:solidFill>
-                  <a:srgbClr val="0D0F14"/>
-                </a:solidFill>
-                <a:latin typeface="Plus Jakarta Sans"/>
-              </a:rPr>
-              <a:t>P(|e| ≤ r68) = 1 − exp(−r68²/2σ²) = 0,68</a:t>
-            </a:r>
-          </a:p>
-          <a:p>
-            <a:pPr algn="l">
-              <a:spcAft>
-                <a:spcPts val="400"/>
-              </a:spcAft>
-            </a:pPr>
-            <a:r>
-              <a:rPr sz="1800" b="1">
-                <a:solidFill>
-                  <a:srgbClr val="0D0F14"/>
-                </a:solidFill>
-                <a:latin typeface="Plus Jakarta Sans"/>
-              </a:rPr>
-              <a:t>σ² = r68² / (−2 ln 0,32) ≈ r68² / 2,279</a:t>
-            </a:r>
-          </a:p>
-          <a:p>
-            <a:pPr algn="l">
-              <a:spcAft>
-                <a:spcPts val="400"/>
-              </a:spcAft>
-            </a:pPr>
-            <a:r>
-              <a:rPr sz="1800" b="0">
-                <a:solidFill>
-                  <a:srgbClr val="0D0F14"/>
-                </a:solidFill>
-                <a:latin typeface="Plus Jakarta Sans"/>
-              </a:rPr>
-              <a:t>σ² = variância por eixo (m²); r68 = raio informado (m)</a:t>
-            </a:r>
-          </a:p>
-          <a:p>
-            <a:pPr algn="l">
-              <a:spcAft>
-                <a:spcPts val="400"/>
-              </a:spcAft>
-            </a:pPr>
-            <a:r>
-              <a:rPr sz="1800" b="0">
-                <a:solidFill>
-                  <a:srgbClr val="0D0F14"/>
-                </a:solidFill>
-                <a:latin typeface="Plus Jakarta Sans"/>
-              </a:rPr>
-              <a:t/>
-            </a:r>
-          </a:p>
-          <a:p>
-            <a:pPr algn="l">
-              <a:spcAft>
-                <a:spcPts val="400"/>
-              </a:spcAft>
-            </a:pPr>
-            <a:r>
-              <a:rPr sz="1800" b="1">
-                <a:solidFill>
-                  <a:srgbClr val="0D0F14"/>
-                </a:solidFill>
-                <a:latin typeface="Plus Jakarta Sans"/>
-              </a:rPr>
-              <a:t>Velocidade: </a:t>
-            </a:r>
-            <a:r>
-              <a:rPr sz="1800" b="0">
-                <a:solidFill>
-                  <a:srgbClr val="0D0F14"/>
-                </a:solidFill>
-                <a:latin typeface="Plus Jakarta Sans"/>
-              </a:rPr>
-              <a:t>vE = s·sen θ, vN = s·cos θ;  Σv = J·diag(σs², σθ²)·Jᵀ</a:t>
-            </a:r>
-          </a:p>
-          <a:p>
-            <a:pPr algn="l">
-              <a:spcAft>
-                <a:spcPts val="400"/>
-              </a:spcAft>
-            </a:pPr>
-            <a:r>
-              <a:rPr sz="1800" b="0">
-                <a:solidFill>
-                  <a:srgbClr val="0D0F14"/>
-                </a:solidFill>
-                <a:latin typeface="Plus Jakarta Sans"/>
-              </a:rPr>
-              <a:t>J = jacobiano de (vE, vN) em relação a (s, θ); σθ em rad</a:t>
-            </a:r>
-          </a:p>
-          <a:p>
-            <a:pPr algn="l">
-              <a:spcAft>
-                <a:spcPts val="400"/>
-              </a:spcAft>
-            </a:pPr>
-            <a:r>
-              <a:rPr sz="1800" b="0">
-                <a:solidFill>
-                  <a:srgbClr val="0D0F14"/>
-                </a:solidFill>
-                <a:latin typeface="Plus Jakarta Sans"/>
-              </a:rPr>
-              <a:t>Parado (sem rumo): média 0, variância σs² + s²/2</a:t>
-            </a:r>
+                <a:spcPts val="0"/>
+              </a:spcAft>
+            </a:pPr>
+            <a:r>
+              <a:rPr sz="1600" b="0">
+                <a:solidFill>
+                  <a:srgbClr val="0D0F14"/>
+                </a:solidFill>
+                <a:latin typeface="Plus Jakarta Sans"/>
+              </a:rPr>
+              <a:t>O GPS não entrega só a posição: ele também informa uma </a:t>
+            </a:r>
+            <a:r>
+              <a:rPr sz="1600" b="1">
+                <a:solidFill>
+                  <a:srgbClr val="0D0F14"/>
+                </a:solidFill>
+                <a:latin typeface="Plus Jakarta Sans"/>
+              </a:rPr>
+              <a:t>margem de erro</a:t>
+            </a:r>
+            <a:r>
+              <a:rPr sz="1600" b="0">
+                <a:solidFill>
+                  <a:srgbClr val="0D0F14"/>
+                </a:solidFill>
+                <a:latin typeface="Plus Jakarta Sans"/>
+              </a:rPr>
+              <a:t>.</a:t>
+            </a:r>
+          </a:p>
+        </p:txBody>
+      </p:sp>
+      <p:sp>
+        <p:nvSpPr>
+          <p:cNvPr id="8" name="Número 2"/>
+          <p:cNvSpPr/>
+          <p:nvPr/>
+        </p:nvSpPr>
+        <p:spPr>
+          <a:xfrm>
+            <a:off x="432000" y="1840000"/>
+            <a:ext cx="576000" cy="648000"/>
+          </a:xfrm>
+          <a:prstGeom prst="roundRect">
+            <a:avLst>
+              <a:gd name="adj" fmla="val 6000"/>
+            </a:avLst>
+          </a:prstGeom>
+          <a:solidFill>
+            <a:srgbClr val="5E4AE3"/>
+          </a:solidFill>
+          <a:ln>
+            <a:noFill/>
+          </a:ln>
+          <a:effectLst/>
+        </p:spPr>
+        <p:style>
+          <a:lnRef idx="1">
+            <a:schemeClr val="accent1"/>
+          </a:lnRef>
+          <a:fillRef idx="3">
+            <a:schemeClr val="accent1"/>
+          </a:fillRef>
+          <a:effectRef idx="2">
+            <a:schemeClr val="accent1"/>
+          </a:effectRef>
+          <a:fontRef idx="minor">
+            <a:schemeClr val="lt1"/>
+          </a:fontRef>
+        </p:style>
+        <p:txBody>
+          <a:bodyPr wrap="square" lIns="90000" tIns="54000" rIns="90000" bIns="54000" rtlCol="0" anchor="ctr"/>
+          <a:lstStyle/>
+          <a:p>
+            <a:pPr algn="ctr">
+              <a:spcAft>
+                <a:spcPts val="0"/>
+              </a:spcAft>
+            </a:pPr>
+            <a:r>
+              <a:rPr sz="2000" b="1">
+                <a:solidFill>
+                  <a:srgbClr val="FFFFFF"/>
+                </a:solidFill>
+                <a:latin typeface="Plus Jakarta Sans"/>
+              </a:rPr>
+              <a:t>2</a:t>
+            </a:r>
+          </a:p>
+        </p:txBody>
+      </p:sp>
+      <p:sp>
+        <p:nvSpPr>
+          <p:cNvPr id="9" name="Passo 2"/>
+          <p:cNvSpPr txBox="1"/>
+          <p:nvPr/>
+        </p:nvSpPr>
+        <p:spPr>
+          <a:xfrm>
+            <a:off x="1152000" y="1840000"/>
+            <a:ext cx="5280000" cy="648000"/>
+          </a:xfrm>
+          <a:prstGeom prst="rect">
+            <a:avLst/>
+          </a:prstGeom>
+          <a:noFill/>
+        </p:spPr>
+        <p:txBody>
+          <a:bodyPr wrap="square" lIns="90000" tIns="54000" rIns="90000" bIns="54000" anchor="ctr">
+            <a:noAutofit/>
+          </a:bodyPr>
+          <a:lstStyle/>
+          <a:p>
+            <a:pPr algn="l">
+              <a:spcAft>
+                <a:spcPts val="0"/>
+              </a:spcAft>
+            </a:pPr>
+            <a:r>
+              <a:rPr sz="1600" b="0">
+                <a:solidFill>
+                  <a:srgbClr val="0D0F14"/>
+                </a:solidFill>
+                <a:latin typeface="Plus Jakarta Sans"/>
+              </a:rPr>
+              <a:t>O Android representa essa margem como um </a:t>
+            </a:r>
+            <a:r>
+              <a:rPr sz="1600" b="1">
+                <a:solidFill>
+                  <a:srgbClr val="0D0F14"/>
+                </a:solidFill>
+                <a:latin typeface="Plus Jakarta Sans"/>
+              </a:rPr>
+              <a:t>círculo de precisão de 68%</a:t>
+            </a:r>
+            <a:r>
+              <a:rPr sz="1600" b="0">
+                <a:solidFill>
+                  <a:srgbClr val="0D0F14"/>
+                </a:solidFill>
+                <a:latin typeface="Plus Jakarta Sans"/>
+              </a:rPr>
+              <a:t>.</a:t>
+            </a:r>
+          </a:p>
+        </p:txBody>
+      </p:sp>
+      <p:sp>
+        <p:nvSpPr>
+          <p:cNvPr id="10" name="Número 3"/>
+          <p:cNvSpPr/>
+          <p:nvPr/>
+        </p:nvSpPr>
+        <p:spPr>
+          <a:xfrm>
+            <a:off x="432000" y="2600000"/>
+            <a:ext cx="576000" cy="648000"/>
+          </a:xfrm>
+          <a:prstGeom prst="roundRect">
+            <a:avLst>
+              <a:gd name="adj" fmla="val 6000"/>
+            </a:avLst>
+          </a:prstGeom>
+          <a:solidFill>
+            <a:srgbClr val="5E4AE3"/>
+          </a:solidFill>
+          <a:ln>
+            <a:noFill/>
+          </a:ln>
+          <a:effectLst/>
+        </p:spPr>
+        <p:style>
+          <a:lnRef idx="1">
+            <a:schemeClr val="accent1"/>
+          </a:lnRef>
+          <a:fillRef idx="3">
+            <a:schemeClr val="accent1"/>
+          </a:fillRef>
+          <a:effectRef idx="2">
+            <a:schemeClr val="accent1"/>
+          </a:effectRef>
+          <a:fontRef idx="minor">
+            <a:schemeClr val="lt1"/>
+          </a:fontRef>
+        </p:style>
+        <p:txBody>
+          <a:bodyPr wrap="square" lIns="90000" tIns="54000" rIns="90000" bIns="54000" rtlCol="0" anchor="ctr"/>
+          <a:lstStyle/>
+          <a:p>
+            <a:pPr algn="ctr">
+              <a:spcAft>
+                <a:spcPts val="0"/>
+              </a:spcAft>
+            </a:pPr>
+            <a:r>
+              <a:rPr sz="2000" b="1">
+                <a:solidFill>
+                  <a:srgbClr val="FFFFFF"/>
+                </a:solidFill>
+                <a:latin typeface="Plus Jakarta Sans"/>
+              </a:rPr>
+              <a:t>3</a:t>
+            </a:r>
+          </a:p>
+        </p:txBody>
+      </p:sp>
+      <p:sp>
+        <p:nvSpPr>
+          <p:cNvPr id="11" name="Passo 3"/>
+          <p:cNvSpPr txBox="1"/>
+          <p:nvPr/>
+        </p:nvSpPr>
+        <p:spPr>
+          <a:xfrm>
+            <a:off x="1152000" y="2600000"/>
+            <a:ext cx="5280000" cy="648000"/>
+          </a:xfrm>
+          <a:prstGeom prst="rect">
+            <a:avLst/>
+          </a:prstGeom>
+          <a:noFill/>
+        </p:spPr>
+        <p:txBody>
+          <a:bodyPr wrap="square" lIns="90000" tIns="54000" rIns="90000" bIns="54000" anchor="ctr">
+            <a:noAutofit/>
+          </a:bodyPr>
+          <a:lstStyle/>
+          <a:p>
+            <a:pPr algn="l">
+              <a:spcAft>
+                <a:spcPts val="0"/>
+              </a:spcAft>
+            </a:pPr>
+            <a:r>
+              <a:rPr sz="1600" b="0">
+                <a:solidFill>
+                  <a:srgbClr val="0D0F14"/>
+                </a:solidFill>
+                <a:latin typeface="Plus Jakarta Sans"/>
+              </a:rPr>
+              <a:t>Nós transformamos esse círculo em uma </a:t>
+            </a:r>
+            <a:r>
+              <a:rPr sz="1600" b="1">
+                <a:solidFill>
+                  <a:srgbClr val="5E4AE3"/>
+                </a:solidFill>
+                <a:latin typeface="Plus Jakarta Sans"/>
+              </a:rPr>
+              <a:t>medida de incerteza</a:t>
+            </a:r>
+            <a:r>
+              <a:rPr sz="1600" b="0">
+                <a:solidFill>
+                  <a:srgbClr val="0D0F14"/>
+                </a:solidFill>
+                <a:latin typeface="Plus Jakarta Sans"/>
+              </a:rPr>
+              <a:t> para a correção.</a:t>
+            </a:r>
+          </a:p>
+        </p:txBody>
+      </p:sp>
+      <p:sp>
+        <p:nvSpPr>
+          <p:cNvPr id="12" name="Card exemplo"/>
+          <p:cNvSpPr/>
+          <p:nvPr/>
+        </p:nvSpPr>
+        <p:spPr>
+          <a:xfrm>
+            <a:off x="432000" y="3400000"/>
+            <a:ext cx="6000000" cy="940000"/>
+          </a:xfrm>
+          <a:prstGeom prst="roundRect">
+            <a:avLst>
+              <a:gd name="adj" fmla="val 6000"/>
+            </a:avLst>
+          </a:prstGeom>
+          <a:solidFill>
+            <a:srgbClr val="5E4AE3"/>
+          </a:solidFill>
+          <a:ln>
+            <a:noFill/>
+          </a:ln>
+          <a:effectLst/>
+        </p:spPr>
+        <p:style>
+          <a:lnRef idx="1">
+            <a:schemeClr val="accent1"/>
+          </a:lnRef>
+          <a:fillRef idx="3">
+            <a:schemeClr val="accent1"/>
+          </a:fillRef>
+          <a:effectRef idx="2">
+            <a:schemeClr val="accent1"/>
+          </a:effectRef>
+          <a:fontRef idx="minor">
+            <a:schemeClr val="lt1"/>
+          </a:fontRef>
+        </p:style>
+        <p:txBody>
+          <a:bodyPr wrap="square" lIns="90000" tIns="54000" rIns="90000" bIns="54000" rtlCol="0" anchor="ctr"/>
+          <a:lstStyle/>
+          <a:p>
+            <a:pPr algn="ctr"/>
+            <a:endParaRPr/>
+          </a:p>
+        </p:txBody>
+      </p:sp>
+      <p:sp>
+        <p:nvSpPr>
+          <p:cNvPr id="13" name="Exemplo precisão"/>
+          <p:cNvSpPr txBox="1"/>
+          <p:nvPr/>
+        </p:nvSpPr>
+        <p:spPr>
+          <a:xfrm>
+            <a:off x="672000" y="3400000"/>
+            <a:ext cx="2000000" cy="940000"/>
+          </a:xfrm>
+          <a:prstGeom prst="rect">
+            <a:avLst/>
+          </a:prstGeom>
+          <a:noFill/>
+        </p:spPr>
+        <p:txBody>
+          <a:bodyPr wrap="square" lIns="0" tIns="0" rIns="0" bIns="0" anchor="ctr">
+            <a:noAutofit/>
+          </a:bodyPr>
+          <a:lstStyle/>
+          <a:p>
+            <a:pPr algn="l">
+              <a:spcAft>
+                <a:spcPts val="0"/>
+              </a:spcAft>
+            </a:pPr>
+            <a:r>
+              <a:rPr sz="3200" b="1">
+                <a:solidFill>
+                  <a:srgbClr val="FFFFFF"/>
+                </a:solidFill>
+                <a:latin typeface="Plus Jakarta Sans"/>
+              </a:rPr>
+              <a:t>6 m</a:t>
+            </a:r>
+          </a:p>
+          <a:p>
+            <a:pPr algn="l">
+              <a:spcAft>
+                <a:spcPts val="0"/>
+              </a:spcAft>
+            </a:pPr>
+            <a:r>
+              <a:rPr sz="1300" b="0">
+                <a:solidFill>
+                  <a:srgbClr val="E4E0FB"/>
+                </a:solidFill>
+                <a:latin typeface="Plus Jakarta Sans"/>
+              </a:rPr>
+              <a:t>precisão (exemplo)</a:t>
+            </a:r>
+          </a:p>
+        </p:txBody>
+      </p:sp>
+      <p:sp>
+        <p:nvSpPr>
+          <p:cNvPr id="14" name="Seta"/>
+          <p:cNvSpPr txBox="1"/>
+          <p:nvPr/>
+        </p:nvSpPr>
+        <p:spPr>
+          <a:xfrm>
+            <a:off x="2700000" y="3400000"/>
+            <a:ext cx="600000" cy="940000"/>
+          </a:xfrm>
+          <a:prstGeom prst="rect">
+            <a:avLst/>
+          </a:prstGeom>
+          <a:noFill/>
+        </p:spPr>
+        <p:txBody>
+          <a:bodyPr wrap="square" lIns="0" tIns="0" rIns="0" bIns="0" anchor="ctr">
+            <a:noAutofit/>
+          </a:bodyPr>
+          <a:lstStyle/>
+          <a:p>
+            <a:pPr algn="ctr">
+              <a:spcAft>
+                <a:spcPts val="0"/>
+              </a:spcAft>
+            </a:pPr>
+            <a:r>
+              <a:rPr sz="3200" b="1">
+                <a:solidFill>
+                  <a:srgbClr val="FFFFFF"/>
+                </a:solidFill>
+                <a:latin typeface="Plus Jakarta Sans"/>
+              </a:rPr>
+              <a:t>→</a:t>
+            </a:r>
+          </a:p>
+        </p:txBody>
+      </p:sp>
+      <p:sp>
+        <p:nvSpPr>
+          <p:cNvPr id="15" name="Exemplo incerteza"/>
+          <p:cNvSpPr txBox="1"/>
+          <p:nvPr/>
+        </p:nvSpPr>
+        <p:spPr>
+          <a:xfrm>
+            <a:off x="3400000" y="3400000"/>
+            <a:ext cx="2900000" cy="940000"/>
+          </a:xfrm>
+          <a:prstGeom prst="rect">
+            <a:avLst/>
+          </a:prstGeom>
+          <a:noFill/>
+        </p:spPr>
+        <p:txBody>
+          <a:bodyPr wrap="square" lIns="0" tIns="0" rIns="0" bIns="0" anchor="ctr">
+            <a:noAutofit/>
+          </a:bodyPr>
+          <a:lstStyle/>
+          <a:p>
+            <a:pPr algn="l">
+              <a:spcAft>
+                <a:spcPts val="0"/>
+              </a:spcAft>
+            </a:pPr>
+            <a:r>
+              <a:rPr sz="3200" b="1">
+                <a:solidFill>
+                  <a:srgbClr val="FFFFFF"/>
+                </a:solidFill>
+                <a:latin typeface="Plus Jakarta Sans"/>
+              </a:rPr>
+              <a:t>≈ 4 m</a:t>
+            </a:r>
+          </a:p>
+          <a:p>
+            <a:pPr algn="l">
+              <a:spcAft>
+                <a:spcPts val="0"/>
+              </a:spcAft>
+            </a:pPr>
+            <a:r>
+              <a:rPr sz="1300" b="0">
+                <a:solidFill>
+                  <a:srgbClr val="E4E0FB"/>
+                </a:solidFill>
+                <a:latin typeface="Plus Jakarta Sans"/>
+              </a:rPr>
+              <a:t>de incerteza em cada direção</a:t>
+            </a:r>
+          </a:p>
+        </p:txBody>
+      </p:sp>
+      <p:sp>
+        <p:nvSpPr>
+          <p:cNvPr id="16" name="Card velocidade"/>
+          <p:cNvSpPr/>
+          <p:nvPr/>
+        </p:nvSpPr>
+        <p:spPr>
+          <a:xfrm>
+            <a:off x="432000" y="4520000"/>
+            <a:ext cx="6000000" cy="1580000"/>
+          </a:xfrm>
+          <a:prstGeom prst="roundRect">
+            <a:avLst>
+              <a:gd name="adj" fmla="val 6000"/>
+            </a:avLst>
+          </a:prstGeom>
+          <a:solidFill>
+            <a:srgbClr val="F4F5F9"/>
+          </a:solidFill>
+          <a:ln>
+            <a:noFill/>
+          </a:ln>
+          <a:effectLst/>
+        </p:spPr>
+        <p:style>
+          <a:lnRef idx="1">
+            <a:schemeClr val="accent1"/>
+          </a:lnRef>
+          <a:fillRef idx="3">
+            <a:schemeClr val="accent1"/>
+          </a:fillRef>
+          <a:effectRef idx="2">
+            <a:schemeClr val="accent1"/>
+          </a:effectRef>
+          <a:fontRef idx="minor">
+            <a:schemeClr val="lt1"/>
+          </a:fontRef>
+        </p:style>
+        <p:txBody>
+          <a:bodyPr wrap="square" lIns="90000" tIns="54000" rIns="90000" bIns="54000" rtlCol="0" anchor="ctr"/>
+          <a:lstStyle/>
+          <a:p>
+            <a:pPr algn="ctr"/>
+            <a:endParaRPr/>
+          </a:p>
+        </p:txBody>
+      </p:sp>
+      <p:sp>
+        <p:nvSpPr>
+          <p:cNvPr id="17" name="Texto velocidade"/>
+          <p:cNvSpPr txBox="1"/>
+          <p:nvPr/>
+        </p:nvSpPr>
+        <p:spPr>
+          <a:xfrm>
+            <a:off x="672000" y="4520000"/>
+            <a:ext cx="5520000" cy="1580000"/>
+          </a:xfrm>
+          <a:prstGeom prst="rect">
+            <a:avLst/>
+          </a:prstGeom>
+          <a:noFill/>
+        </p:spPr>
+        <p:txBody>
+          <a:bodyPr wrap="square" lIns="90000" tIns="54000" rIns="90000" bIns="54000" anchor="ctr">
+            <a:noAutofit/>
+          </a:bodyPr>
+          <a:lstStyle/>
+          <a:p>
+            <a:pPr algn="l">
+              <a:spcAft>
+                <a:spcPts val="600"/>
+              </a:spcAft>
+            </a:pPr>
+            <a:r>
+              <a:rPr sz="1500" b="0">
+                <a:solidFill>
+                  <a:srgbClr val="0D0F14"/>
+                </a:solidFill>
+                <a:latin typeface="Plus Jakarta Sans"/>
+              </a:rPr>
+              <a:t>Com a velocidade é igual: usamos o valor, a direção e as margens informadas pelo sensor.</a:t>
+            </a:r>
+          </a:p>
+          <a:p>
+            <a:pPr algn="l">
+              <a:spcAft>
+                <a:spcPts val="0"/>
+              </a:spcAft>
+            </a:pPr>
+            <a:r>
+              <a:rPr sz="1500" b="0">
+                <a:solidFill>
+                  <a:srgbClr val="0D0F14"/>
+                </a:solidFill>
+                <a:latin typeface="Plus Jakarta Sans"/>
+              </a:rPr>
+              <a:t>Se alguma margem não vier informada, o aplicativo </a:t>
+            </a:r>
+            <a:r>
+              <a:rPr sz="1500" b="1">
+                <a:solidFill>
+                  <a:srgbClr val="5E4AE3"/>
+                </a:solidFill>
+                <a:latin typeface="Plus Jakarta Sans"/>
+              </a:rPr>
+              <a:t>não inventa um número</a:t>
+            </a:r>
+            <a:r>
+              <a:rPr sz="1500" b="0">
+                <a:solidFill>
+                  <a:srgbClr val="0D0F14"/>
+                </a:solidFill>
+                <a:latin typeface="Plus Jakarta Sans"/>
+              </a:rPr>
+              <a:t>. Assim, uma leitura incerta não é tratada como se fosse confiável.</a:t>
+            </a:r>
+          </a:p>
+        </p:txBody>
+      </p:sp>
+      <p:sp>
+        <p:nvSpPr>
+          <p:cNvPr id="18" name="Card gráfico"/>
+          <p:cNvSpPr/>
+          <p:nvPr/>
+        </p:nvSpPr>
+        <p:spPr>
+          <a:xfrm>
+            <a:off x="6760000" y="1080000"/>
+            <a:ext cx="5000000" cy="5020000"/>
+          </a:xfrm>
+          <a:prstGeom prst="roundRect">
+            <a:avLst>
+              <a:gd name="adj" fmla="val 6000"/>
+            </a:avLst>
+          </a:prstGeom>
+          <a:solidFill>
+            <a:srgbClr val="F4F5F9"/>
+          </a:solidFill>
+          <a:ln>
+            <a:noFill/>
+          </a:ln>
+          <a:effectLst/>
+        </p:spPr>
+        <p:style>
+          <a:lnRef idx="1">
+            <a:schemeClr val="accent1"/>
+          </a:lnRef>
+          <a:fillRef idx="3">
+            <a:schemeClr val="accent1"/>
+          </a:fillRef>
+          <a:effectRef idx="2">
+            <a:schemeClr val="accent1"/>
+          </a:effectRef>
+          <a:fontRef idx="minor">
+            <a:schemeClr val="lt1"/>
+          </a:fontRef>
+        </p:style>
+        <p:txBody>
+          <a:bodyPr wrap="square" lIns="90000" tIns="54000" rIns="90000" bIns="54000" rtlCol="0" anchor="ctr"/>
+          <a:lstStyle/>
+          <a:p>
+            <a:pPr algn="ctr"/>
+            <a:endParaRPr/>
           </a:p>
         </p:txBody>
       </p:sp>
       <p:pic>
         <p:nvPicPr>
-          <p:cNvPr id="7" name="Picture 6" descr="dispersao_estatica.png"/>
+          <p:cNvPr id="19" name="Picture 6" descr="dispersao_estatica.png"/>
           <p:cNvPicPr>
             <a:picLocks noChangeAspect="1"/>
           </p:cNvPicPr>
@@ -5839,14 +7449,55 @@
         </p:blipFill>
         <p:spPr>
           <a:xfrm>
-            <a:off x="6660000" y="1007999"/>
-            <a:ext cx="4536539" cy="4860000"/>
+            <a:off x="7130020" y="1260000"/>
+            <a:ext cx="4259960" cy="4420000"/>
+          </a:xfrm>
+          <a:prstGeom prst="roundRect">
+            <a:avLst>
+              <a:gd name="adj" fmla="val 2299"/>
+            </a:avLst>
+          </a:prstGeom>
+        </p:spPr>
+      </p:pic>
+      <p:sp>
+        <p:nvSpPr>
+          <p:cNvPr id="20" name="Legenda gráfico"/>
+          <p:cNvSpPr txBox="1"/>
+          <p:nvPr/>
+        </p:nvSpPr>
+        <p:spPr>
+          <a:xfrm>
+            <a:off x="6880000" y="5680000"/>
+            <a:ext cx="4760000" cy="340000"/>
           </a:xfrm>
           <a:prstGeom prst="rect">
             <a:avLst/>
           </a:prstGeom>
-        </p:spPr>
-      </p:pic>
+          <a:noFill/>
+        </p:spPr>
+        <p:txBody>
+          <a:bodyPr wrap="square" lIns="0" tIns="0" rIns="0" bIns="0" anchor="ctr">
+            <a:noAutofit/>
+          </a:bodyPr>
+          <a:lstStyle/>
+          <a:p>
+            <a:pPr algn="ctr">
+              <a:spcAft>
+                <a:spcPts val="0"/>
+              </a:spcAft>
+            </a:pPr>
+            <a:r>
+              <a:rPr sz="1200" b="0">
+                <a:solidFill>
+                  <a:srgbClr val="6B6F80"/>
+                </a:solidFill>
+                <a:latin typeface="Plus Jakarta Sans"/>
+              </a:rPr>
+              <a:t>Tracejado: precisão de 68% declarada pelo GPS</a:t>
+            </a:r>
+          </a:p>
+        </p:txBody>
+      </p:sp>
     </p:spTree>
   </p:cSld>
   <p:clrMapOvr>
@@ -5856,7 +7507,7 @@
 </file>
 
 <file path=ppt/slides/slide5.xml><?xml version="1.0" encoding="utf-8"?>
-<p:sld xmlns:a="http://schemas.openxmlformats.org/drawingml/2006/main" xmlns:p="http://schemas.openxmlformats.org/presentationml/2006/main" xmlns:r="http://schemas.openxmlformats.org/officeDocument/2006/relationships">
+<p:sld xmlns:a="http://schemas.openxmlformats.org/drawingml/2006/main" xmlns:r="http://schemas.openxmlformats.org/officeDocument/2006/relationships" xmlns:p="http://schemas.openxmlformats.org/presentationml/2006/main">
   <p:cSld>
     <p:spTree>
       <p:nvGrpSpPr>
@@ -5864,7 +7515,14 @@
         <p:cNvGrpSpPr/>
         <p:nvPr/>
       </p:nvGrpSpPr>
-      <p:grpSpPr/>
+      <p:grpSpPr>
+        <a:xfrm>
+          <a:off x="0" y="0"/>
+          <a:ext cx="0" cy="0"/>
+          <a:chOff x="0" y="0"/>
+          <a:chExt cx="0" cy="0"/>
+        </a:xfrm>
+      </p:grpSpPr>
       <p:sp>
         <p:nvSpPr>
           <p:cNvPr id="2" name="Rectangle 1"/>
@@ -5906,6 +7564,7 @@
           <a:lstStyle/>
           <a:p>
             <a:pPr algn="ctr"/>
+            <a:endParaRPr/>
           </a:p>
         </p:txBody>
       </p:sp>
@@ -5926,7 +7585,7 @@
           <a:noFill/>
         </p:spPr>
         <p:txBody>
-          <a:bodyPr wrap="square" lIns="90000" rIns="90000" tIns="54000" bIns="54000" anchor="t">
+          <a:bodyPr wrap="square" lIns="90000" tIns="54000" rIns="90000" bIns="54000" anchor="t">
             <a:spAutoFit/>
           </a:bodyPr>
           <a:lstStyle/>
@@ -5965,7 +7624,7 @@
           <a:noFill/>
         </p:spPr>
         <p:txBody>
-          <a:bodyPr wrap="square" lIns="90000" rIns="90000" tIns="54000" bIns="54000" anchor="t">
+          <a:bodyPr wrap="square" lIns="90000" tIns="54000" rIns="90000" bIns="54000" anchor="t">
             <a:spAutoFit/>
           </a:bodyPr>
           <a:lstStyle/>
@@ -5982,7 +7641,7 @@
                 </a:solidFill>
                 <a:latin typeface="Plus Jakarta Sans"/>
               </a:rPr>
-              <a:t>Fundamentação</a:t>
+              <a:t>Fundamentação · ⟪quem apresenta⟫</a:t>
             </a:r>
           </a:p>
         </p:txBody>
@@ -6004,7 +7663,7 @@
           <a:noFill/>
         </p:spPr>
         <p:txBody>
-          <a:bodyPr wrap="square" lIns="90000" rIns="90000" tIns="54000" bIns="54000" anchor="t">
+          <a:bodyPr wrap="square" lIns="90000" tIns="54000" rIns="90000" bIns="54000" anchor="t">
             <a:spAutoFit/>
           </a:bodyPr>
           <a:lstStyle/>
@@ -6043,7 +7702,7 @@
           <a:noFill/>
         </p:spPr>
         <p:txBody>
-          <a:bodyPr wrap="square" lIns="90000" rIns="90000" tIns="54000" bIns="54000" anchor="t">
+          <a:bodyPr wrap="square" lIns="90000" tIns="54000" rIns="90000" bIns="54000" anchor="t">
             <a:spAutoFit/>
           </a:bodyPr>
           <a:lstStyle/>
@@ -6119,6 +7778,35 @@
                 <a:spcPts val="400"/>
               </a:spcAft>
             </a:pPr>
+            <a:endParaRPr sz="2000" b="0">
+              <a:solidFill>
+                <a:srgbClr val="0D0F14"/>
+              </a:solidFill>
+              <a:latin typeface="Plus Jakarta Sans"/>
+            </a:endParaRPr>
+          </a:p>
+          <a:p>
+            <a:pPr algn="l">
+              <a:spcAft>
+                <a:spcPts val="400"/>
+              </a:spcAft>
+            </a:pPr>
+            <a:r>
+              <a:rPr sz="2000" b="1">
+                <a:solidFill>
+                  <a:srgbClr val="0D0F14"/>
+                </a:solidFill>
+                <a:latin typeface="Plus Jakarta Sans"/>
+              </a:rPr>
+              <a:t>ŷ = y − Σ·Aᵀ·(A·Σ·Aᵀ)⁻¹·A·y</a:t>
+            </a:r>
+          </a:p>
+          <a:p>
+            <a:pPr algn="l">
+              <a:spcAft>
+                <a:spcPts val="400"/>
+              </a:spcAft>
+            </a:pPr>
             <a:r>
               <a:rPr sz="2000" b="0">
                 <a:solidFill>
@@ -6126,7 +7814,7 @@
                 </a:solidFill>
                 <a:latin typeface="Plus Jakarta Sans"/>
               </a:rPr>
-              <a:t/>
+              <a:t>y = medidas · ŷ = reconciliadas · Σ = covariância do sensor · r = A·y = resíduo antes</a:t>
             </a:r>
           </a:p>
           <a:p>
@@ -6142,7 +7830,7 @@
                 </a:solidFill>
                 <a:latin typeface="Plus Jakarta Sans"/>
               </a:rPr>
-              <a:t>ŷ = y − Σ·Aᵀ·(A·Σ·Aᵀ)⁻¹·A·y</a:t>
+              <a:t>A correção é proporcional a Σ: a medida mais incerta é a que mais se move.</a:t>
             </a:r>
           </a:p>
           <a:p>
@@ -6151,47 +7839,12 @@
                 <a:spcPts val="400"/>
               </a:spcAft>
             </a:pPr>
-            <a:r>
-              <a:rPr sz="2000" b="0">
-                <a:solidFill>
-                  <a:srgbClr val="0D0F14"/>
-                </a:solidFill>
-                <a:latin typeface="Plus Jakarta Sans"/>
-              </a:rPr>
-              <a:t>y = medidas · ŷ = reconciliadas · Σ = covariância do sensor · r = A·y = resíduo antes</a:t>
-            </a:r>
-          </a:p>
-          <a:p>
-            <a:pPr algn="l">
-              <a:spcAft>
-                <a:spcPts val="400"/>
-              </a:spcAft>
-            </a:pPr>
-            <a:r>
-              <a:rPr sz="2000" b="1">
-                <a:solidFill>
-                  <a:srgbClr val="0D0F14"/>
-                </a:solidFill>
-                <a:latin typeface="Plus Jakarta Sans"/>
-              </a:rPr>
-              <a:t>A correção é proporcional a Σ: a medida mais incerta é a que mais se move.</a:t>
-            </a:r>
-          </a:p>
-          <a:p>
-            <a:pPr algn="l">
-              <a:spcAft>
-                <a:spcPts val="400"/>
-              </a:spcAft>
-            </a:pPr>
-            <a:r>
-              <a:rPr sz="2000" b="0">
-                <a:solidFill>
-                  <a:srgbClr val="0D0F14"/>
-                </a:solidFill>
-                <a:latin typeface="Plus Jakarta Sans"/>
-              </a:rPr>
-              <a:t/>
-            </a:r>
+            <a:endParaRPr sz="2000" b="1">
+              <a:solidFill>
+                <a:srgbClr val="0D0F14"/>
+              </a:solidFill>
+              <a:latin typeface="Plus Jakarta Sans"/>
+            </a:endParaRPr>
           </a:p>
           <a:p>
             <a:pPr algn="l">
@@ -6229,7 +7882,7 @@
 </file>
 
 <file path=ppt/slides/slide6.xml><?xml version="1.0" encoding="utf-8"?>
-<p:sld xmlns:a="http://schemas.openxmlformats.org/drawingml/2006/main" xmlns:p="http://schemas.openxmlformats.org/presentationml/2006/main" xmlns:r="http://schemas.openxmlformats.org/officeDocument/2006/relationships">
+<p:sld xmlns:a="http://schemas.openxmlformats.org/drawingml/2006/main" xmlns:r="http://schemas.openxmlformats.org/officeDocument/2006/relationships" xmlns:p="http://schemas.openxmlformats.org/presentationml/2006/main">
   <p:cSld>
     <p:spTree>
       <p:nvGrpSpPr>
@@ -6237,7 +7890,14 @@
         <p:cNvGrpSpPr/>
         <p:nvPr/>
       </p:nvGrpSpPr>
-      <p:grpSpPr/>
+      <p:grpSpPr>
+        <a:xfrm>
+          <a:off x="0" y="0"/>
+          <a:ext cx="0" cy="0"/>
+          <a:chOff x="0" y="0"/>
+          <a:chExt cx="0" cy="0"/>
+        </a:xfrm>
+      </p:grpSpPr>
       <p:sp>
         <p:nvSpPr>
           <p:cNvPr id="2" name="Rectangle 1"/>
@@ -6279,6 +7939,7 @@
           <a:lstStyle/>
           <a:p>
             <a:pPr algn="ctr"/>
+            <a:endParaRPr/>
           </a:p>
         </p:txBody>
       </p:sp>
@@ -6299,7 +7960,7 @@
           <a:noFill/>
         </p:spPr>
         <p:txBody>
-          <a:bodyPr wrap="square" lIns="90000" rIns="90000" tIns="54000" bIns="54000" anchor="t">
+          <a:bodyPr wrap="square" lIns="90000" tIns="54000" rIns="90000" bIns="54000" anchor="t">
             <a:spAutoFit/>
           </a:bodyPr>
           <a:lstStyle/>
@@ -6338,7 +7999,7 @@
           <a:noFill/>
         </p:spPr>
         <p:txBody>
-          <a:bodyPr wrap="square" lIns="90000" rIns="90000" tIns="54000" bIns="54000" anchor="t">
+          <a:bodyPr wrap="square" lIns="90000" tIns="54000" rIns="90000" bIns="54000" anchor="t">
             <a:spAutoFit/>
           </a:bodyPr>
           <a:lstStyle/>
@@ -6355,7 +8016,7 @@
                 </a:solidFill>
                 <a:latin typeface="Plus Jakarta Sans"/>
               </a:rPr>
-              <a:t>Fundamentação</a:t>
+              <a:t>Fundamentação · ⟪quem apresenta⟫</a:t>
             </a:r>
           </a:p>
         </p:txBody>
@@ -6377,7 +8038,7 @@
           <a:noFill/>
         </p:spPr>
         <p:txBody>
-          <a:bodyPr wrap="square" lIns="90000" rIns="90000" tIns="54000" bIns="54000" anchor="t">
+          <a:bodyPr wrap="square" lIns="90000" tIns="54000" rIns="90000" bIns="54000" anchor="t">
             <a:spAutoFit/>
           </a:bodyPr>
           <a:lstStyle/>
@@ -6416,7 +8077,7 @@
           <a:noFill/>
         </p:spPr>
         <p:txBody>
-          <a:bodyPr wrap="square" lIns="90000" rIns="90000" tIns="54000" bIns="54000" anchor="t">
+          <a:bodyPr wrap="square" lIns="90000" tIns="54000" rIns="90000" bIns="54000" anchor="t">
             <a:spAutoFit/>
           </a:bodyPr>
           <a:lstStyle/>
@@ -6524,15 +8185,12 @@
                 <a:spcPts val="400"/>
               </a:spcAft>
             </a:pPr>
-            <a:r>
-              <a:rPr sz="1800" b="0">
-                <a:solidFill>
-                  <a:srgbClr val="0D0F14"/>
-                </a:solidFill>
-                <a:latin typeface="Plus Jakarta Sans"/>
-              </a:rPr>
-              <a:t/>
-            </a:r>
+            <a:endParaRPr sz="1800" b="0">
+              <a:solidFill>
+                <a:srgbClr val="0D0F14"/>
+              </a:solidFill>
+              <a:latin typeface="Plus Jakarta Sans"/>
+            </a:endParaRPr>
           </a:p>
           <a:p>
             <a:pPr algn="l">
@@ -6600,7 +8258,7 @@
           </a:fontRef>
         </p:style>
         <p:txBody>
-          <a:bodyPr rtlCol="0" anchor="t" wrap="square" lIns="90000" rIns="90000" tIns="54000" bIns="54000"/>
+          <a:bodyPr wrap="square" lIns="90000" tIns="54000" rIns="90000" bIns="54000" rtlCol="0" anchor="t"/>
           <a:lstStyle/>
           <a:p>
             <a:pPr algn="l">
@@ -6693,7 +8351,7 @@
 </file>
 
 <file path=ppt/slides/slide7.xml><?xml version="1.0" encoding="utf-8"?>
-<p:sld xmlns:a="http://schemas.openxmlformats.org/drawingml/2006/main" xmlns:p="http://schemas.openxmlformats.org/presentationml/2006/main" xmlns:r="http://schemas.openxmlformats.org/officeDocument/2006/relationships">
+<p:sld xmlns:a="http://schemas.openxmlformats.org/drawingml/2006/main" xmlns:r="http://schemas.openxmlformats.org/officeDocument/2006/relationships" xmlns:p="http://schemas.openxmlformats.org/presentationml/2006/main">
   <p:cSld>
     <p:spTree>
       <p:nvGrpSpPr>
@@ -6701,7 +8359,14 @@
         <p:cNvGrpSpPr/>
         <p:nvPr/>
       </p:nvGrpSpPr>
-      <p:grpSpPr/>
+      <p:grpSpPr>
+        <a:xfrm>
+          <a:off x="0" y="0"/>
+          <a:ext cx="0" cy="0"/>
+          <a:chOff x="0" y="0"/>
+          <a:chExt cx="0" cy="0"/>
+        </a:xfrm>
+      </p:grpSpPr>
       <p:sp>
         <p:nvSpPr>
           <p:cNvPr id="2" name="Rectangle 1"/>
@@ -6743,6 +8408,7 @@
           <a:lstStyle/>
           <a:p>
             <a:pPr algn="ctr"/>
+            <a:endParaRPr/>
           </a:p>
         </p:txBody>
       </p:sp>
@@ -6763,7 +8429,7 @@
           <a:noFill/>
         </p:spPr>
         <p:txBody>
-          <a:bodyPr wrap="square" lIns="90000" rIns="90000" tIns="54000" bIns="54000" anchor="t">
+          <a:bodyPr wrap="square" lIns="90000" tIns="54000" rIns="90000" bIns="54000" anchor="t">
             <a:spAutoFit/>
           </a:bodyPr>
           <a:lstStyle/>
@@ -6780,7 +8446,7 @@
                 </a:solidFill>
                 <a:latin typeface="Plus Jakarta Sans"/>
               </a:rPr>
-              <a:t>Região crítica e aquisição periódica</a:t>
+              <a:t>Coleta contínua, sem conflito</a:t>
             </a:r>
           </a:p>
         </p:txBody>
@@ -6802,7 +8468,7 @@
           <a:noFill/>
         </p:spPr>
         <p:txBody>
-          <a:bodyPr wrap="square" lIns="90000" rIns="90000" tIns="54000" bIns="54000" anchor="t">
+          <a:bodyPr wrap="square" lIns="90000" tIns="54000" rIns="90000" bIns="54000" anchor="t">
             <a:spAutoFit/>
           </a:bodyPr>
           <a:lstStyle/>
@@ -6819,7 +8485,7 @@
                 </a:solidFill>
                 <a:latin typeface="Plus Jakarta Sans"/>
               </a:rPr>
-              <a:t>Fundamentação</a:t>
+              <a:t>Fundamentação · Juliano Cesar</a:t>
             </a:r>
           </a:p>
         </p:txBody>
@@ -6841,7 +8507,7 @@
           <a:noFill/>
         </p:spPr>
         <p:txBody>
-          <a:bodyPr wrap="square" lIns="90000" rIns="90000" tIns="54000" bIns="54000" anchor="t">
+          <a:bodyPr wrap="square" lIns="90000" tIns="54000" rIns="90000" bIns="54000" anchor="t">
             <a:spAutoFit/>
           </a:bodyPr>
           <a:lstStyle/>
@@ -6865,203 +8531,14 @@
       </p:sp>
       <p:sp>
         <p:nvSpPr>
-          <p:cNvPr id="6" name="TextBox 5"/>
-          <p:cNvSpPr txBox="1"/>
+          <p:cNvPr id="6" name="Parte Acelerômetro"/>
+          <p:cNvSpPr/>
           <p:nvPr/>
         </p:nvSpPr>
         <p:spPr>
           <a:xfrm>
             <a:off x="432000" y="1080000"/>
-            <a:ext cx="5940000" cy="5040000"/>
-          </a:xfrm>
-          <a:prstGeom prst="rect">
-            <a:avLst/>
-          </a:prstGeom>
-          <a:noFill/>
-        </p:spPr>
-        <p:txBody>
-          <a:bodyPr wrap="square" lIns="90000" rIns="90000" tIns="54000" bIns="54000" anchor="t">
-            <a:spAutoFit/>
-          </a:bodyPr>
-          <a:lstStyle/>
-          <a:p>
-            <a:pPr algn="l">
-              <a:spcAft>
-                <a:spcPts val="400"/>
-              </a:spcAft>
-            </a:pPr>
-            <a:r>
-              <a:rPr sz="1800" b="1">
-                <a:solidFill>
-                  <a:srgbClr val="0D0F14"/>
-                </a:solidFill>
-                <a:latin typeface="Plus Jakarta Sans"/>
-              </a:rPr>
-              <a:t>rastro-imu-50hz</a:t>
-            </a:r>
-            <a:r>
-              <a:rPr sz="1800" b="0">
-                <a:solidFill>
-                  <a:srgbClr val="0D0F14"/>
-                </a:solidFill>
-                <a:latin typeface="Plus Jakarta Sans"/>
-              </a:rPr>
-              <a:t> produtor, 20 ms</a:t>
-            </a:r>
-          </a:p>
-          <a:p>
-            <a:pPr algn="l">
-              <a:spcAft>
-                <a:spcPts val="400"/>
-              </a:spcAft>
-            </a:pPr>
-            <a:r>
-              <a:rPr sz="1800" b="1">
-                <a:solidFill>
-                  <a:srgbClr val="0D0F14"/>
-                </a:solidFill>
-                <a:latin typeface="Plus Jakarta Sans"/>
-              </a:rPr>
-              <a:t>rastro-consumidor-imu</a:t>
-            </a:r>
-            <a:r>
-              <a:rPr sz="1800" b="0">
-                <a:solidFill>
-                  <a:srgbClr val="0D0F14"/>
-                </a:solidFill>
-                <a:latin typeface="Plus Jakarta Sans"/>
-              </a:rPr>
-              <a:t> drena a cada 1 s</a:t>
-            </a:r>
-          </a:p>
-          <a:p>
-            <a:pPr algn="l">
-              <a:spcAft>
-                <a:spcPts val="400"/>
-              </a:spcAft>
-            </a:pPr>
-            <a:r>
-              <a:rPr sz="1800" b="1">
-                <a:solidFill>
-                  <a:srgbClr val="0D0F14"/>
-                </a:solidFill>
-                <a:latin typeface="Plus Jakarta Sans"/>
-              </a:rPr>
-              <a:t>rastro-registro-1hz</a:t>
-            </a:r>
-            <a:r>
-              <a:rPr sz="1800" b="0">
-                <a:solidFill>
-                  <a:srgbClr val="0D0F14"/>
-                </a:solidFill>
-                <a:latin typeface="Plus Jakarta Sans"/>
-              </a:rPr>
-              <a:t> log de aquisição</a:t>
-            </a:r>
-          </a:p>
-          <a:p>
-            <a:pPr algn="l">
-              <a:spcAft>
-                <a:spcPts val="400"/>
-              </a:spcAft>
-            </a:pPr>
-            <a:r>
-              <a:rPr sz="1800" b="1">
-                <a:solidFill>
-                  <a:srgbClr val="0D0F14"/>
-                </a:solidFill>
-                <a:latin typeface="Plus Jakarta Sans"/>
-              </a:rPr>
-              <a:t>principal</a:t>
-            </a:r>
-            <a:r>
-              <a:rPr sz="1800" b="0">
-                <a:solidFill>
-                  <a:srgbClr val="0D0F14"/>
-                </a:solidFill>
-                <a:latin typeface="Plus Jakarta Sans"/>
-              </a:rPr>
-              <a:t> fixo GNSS a cada 1 s</a:t>
-            </a:r>
-          </a:p>
-          <a:p>
-            <a:pPr algn="l">
-              <a:spcAft>
-                <a:spcPts val="400"/>
-              </a:spcAft>
-            </a:pPr>
-            <a:r>
-              <a:rPr sz="1800" b="0">
-                <a:solidFill>
-                  <a:srgbClr val="0D0F14"/>
-                </a:solidFill>
-                <a:latin typeface="Plus Jakarta Sans"/>
-              </a:rPr>
-              <a:t/>
-            </a:r>
-          </a:p>
-          <a:p>
-            <a:pPr algn="l">
-              <a:spcAft>
-                <a:spcPts val="400"/>
-              </a:spcAft>
-            </a:pPr>
-            <a:r>
-              <a:rPr sz="1800" b="1">
-                <a:solidFill>
-                  <a:srgbClr val="0D0F14"/>
-                </a:solidFill>
-                <a:latin typeface="Plus Jakarta Sans"/>
-              </a:rPr>
-              <a:t>Região crítica: </a:t>
-            </a:r>
-            <a:r>
-              <a:rPr sz="1800" b="0">
-                <a:solidFill>
-                  <a:srgbClr val="0D0F14"/>
-                </a:solidFill>
-                <a:latin typeface="Plus Jakarta Sans"/>
-              </a:rPr>
-              <a:t>índices, slots e contadores do CircularImuBuffer mudam juntos → um monitor (synchronized).</a:t>
-            </a:r>
-          </a:p>
-          <a:p>
-            <a:pPr algn="l">
-              <a:spcAft>
-                <a:spcPts val="400"/>
-              </a:spcAft>
-            </a:pPr>
-            <a:r>
-              <a:rPr sz="1800" b="1">
-                <a:solidFill>
-                  <a:srgbClr val="0D0F14"/>
-                </a:solidFill>
-                <a:latin typeface="Plus Jakarta Sans"/>
-              </a:rPr>
-              <a:t>Descartados: </a:t>
-            </a:r>
-            <a:r>
-              <a:rPr sz="1800" b="0">
-                <a:solidFill>
-                  <a:srgbClr val="0D0F14"/>
-                </a:solidFill>
-                <a:latin typeface="Plus Jakarta Sans"/>
-              </a:rPr>
-              <a:t>ConcurrentLinkedQueue (sem limite nem descarte atômico) · ReentrantLock (não precisamos de tryLock/condições).</a:t>
-            </a:r>
-          </a:p>
-        </p:txBody>
-      </p:sp>
-      <p:sp>
-        <p:nvSpPr>
-          <p:cNvPr id="7" name="Rounded Rectangle 6"/>
-          <p:cNvSpPr/>
-          <p:nvPr/>
-        </p:nvSpPr>
-        <p:spPr>
-          <a:xfrm>
-            <a:off x="6660000" y="1080000"/>
-            <a:ext cx="5148000" cy="4680000"/>
+            <a:ext cx="2700000" cy="720000"/>
           </a:xfrm>
           <a:prstGeom prst="roundRect">
             <a:avLst>
@@ -7091,12 +8568,39 @@
           </a:fontRef>
         </p:style>
         <p:txBody>
-          <a:bodyPr rtlCol="0" anchor="t" wrap="square" lIns="90000" rIns="90000" tIns="54000" bIns="54000"/>
-          <a:lstStyle/>
-          <a:p>
-            <a:pPr algn="l">
-              <a:spcAft>
-                <a:spcPts val="400"/>
+          <a:bodyPr wrap="square" lIns="90000" tIns="54000" rIns="90000" bIns="54000" rtlCol="0" anchor="ctr"/>
+          <a:lstStyle/>
+          <a:p>
+            <a:pPr algn="ctr"/>
+            <a:endParaRPr/>
+          </a:p>
+        </p:txBody>
+      </p:sp>
+      <p:sp>
+        <p:nvSpPr>
+          <p:cNvPr id="7" name="Texto Acelerômetro"/>
+          <p:cNvSpPr txBox="1"/>
+          <p:nvPr/>
+        </p:nvSpPr>
+        <p:spPr>
+          <a:xfrm>
+            <a:off x="612000" y="1080000"/>
+            <a:ext cx="2440000" cy="720000"/>
+          </a:xfrm>
+          <a:prstGeom prst="rect">
+            <a:avLst/>
+          </a:prstGeom>
+          <a:noFill/>
+        </p:spPr>
+        <p:txBody>
+          <a:bodyPr wrap="square" lIns="90000" tIns="54000" rIns="90000" bIns="54000" anchor="ctr">
+            <a:noAutofit/>
+          </a:bodyPr>
+          <a:lstStyle/>
+          <a:p>
+            <a:pPr algn="l">
+              <a:spcAft>
+                <a:spcPts val="100"/>
               </a:spcAft>
             </a:pPr>
             <a:r>
@@ -7106,77 +8610,144 @@
                 </a:solidFill>
                 <a:latin typeface="Plus Jakarta Sans"/>
               </a:rPr>
-              <a:t>10 execuções do teste de corrida</a:t>
-            </a:r>
-          </a:p>
-          <a:p>
-            <a:pPr algn="l">
-              <a:spcAft>
-                <a:spcPts val="400"/>
-              </a:spcAft>
-            </a:pPr>
-            <a:r>
-              <a:rPr sz="1600" b="0">
-                <a:solidFill>
-                  <a:srgbClr val="0D0F14"/>
-                </a:solidFill>
-                <a:latin typeface="Plus Jakarta Sans"/>
-              </a:rPr>
-              <a:t>produtor + consumidor + observador, 10 000 leituras, buffer de 64</a:t>
-            </a:r>
-          </a:p>
-          <a:p>
-            <a:pPr algn="l">
-              <a:spcAft>
-                <a:spcPts val="400"/>
-              </a:spcAft>
-            </a:pPr>
-            <a:r>
-              <a:rPr sz="1600" b="0">
-                <a:solidFill>
-                  <a:srgbClr val="0D0F14"/>
-                </a:solidFill>
-                <a:latin typeface="Plus Jakarta Sans"/>
-              </a:rPr>
-              <a:t>Prova: nenhuma intercalação dessas execuções corrompeu o estado.</a:t>
-            </a:r>
-          </a:p>
-          <a:p>
-            <a:pPr algn="l">
-              <a:spcAft>
-                <a:spcPts val="400"/>
-              </a:spcAft>
-            </a:pPr>
-            <a:r>
-              <a:rPr sz="1600" b="0">
-                <a:solidFill>
-                  <a:srgbClr val="0D0F14"/>
-                </a:solidFill>
-                <a:latin typeface="Plus Jakarta Sans"/>
-              </a:rPr>
-              <a:t>Não prova: ausência de corrida — isso vem do código (todo acesso no monitor).</a:t>
-            </a:r>
-          </a:p>
-          <a:p>
-            <a:pPr algn="l">
-              <a:spcAft>
-                <a:spcPts val="400"/>
-              </a:spcAft>
-            </a:pPr>
-            <a:r>
-              <a:rPr sz="1600" b="0">
-                <a:solidFill>
-                  <a:srgbClr val="0D0F14"/>
-                </a:solidFill>
-                <a:latin typeface="Plus Jakarta Sans"/>
-              </a:rPr>
-              <a:t/>
-            </a:r>
-          </a:p>
-          <a:p>
-            <a:pPr algn="l">
-              <a:spcAft>
-                <a:spcPts val="400"/>
+              <a:t>Acelerômetro</a:t>
+            </a:r>
+          </a:p>
+          <a:p>
+            <a:pPr algn="l">
+              <a:spcAft>
+                <a:spcPts val="0"/>
+              </a:spcAft>
+            </a:pPr>
+            <a:r>
+              <a:rPr sz="1300" b="0">
+                <a:solidFill>
+                  <a:srgbClr val="6B6F80"/>
+                </a:solidFill>
+                <a:latin typeface="Plus Jakarta Sans"/>
+              </a:rPr>
+              <a:t>50 leituras por segundo</a:t>
+            </a:r>
+          </a:p>
+        </p:txBody>
+      </p:sp>
+      <p:sp>
+        <p:nvSpPr>
+          <p:cNvPr id="8" name="Seta Acelerômetro"/>
+          <p:cNvSpPr/>
+          <p:nvPr/>
+        </p:nvSpPr>
+        <p:spPr>
+          <a:xfrm>
+            <a:off x="3230000" y="1310000"/>
+            <a:ext cx="380000" cy="260000"/>
+          </a:xfrm>
+          <a:prstGeom prst="rightArrow">
+            <a:avLst/>
+          </a:prstGeom>
+          <a:solidFill>
+            <a:srgbClr val="B9B0F4"/>
+          </a:solidFill>
+          <a:ln>
+            <a:noFill/>
+          </a:ln>
+          <a:effectLst/>
+        </p:spPr>
+        <p:style>
+          <a:lnRef idx="1">
+            <a:schemeClr val="accent1"/>
+          </a:lnRef>
+          <a:fillRef idx="3">
+            <a:schemeClr val="accent1"/>
+          </a:fillRef>
+          <a:effectRef idx="2">
+            <a:schemeClr val="accent1"/>
+          </a:effectRef>
+          <a:fontRef idx="minor">
+            <a:schemeClr val="lt1"/>
+          </a:fontRef>
+        </p:style>
+        <p:txBody>
+          <a:bodyPr wrap="square" lIns="90000" tIns="54000" rIns="90000" bIns="54000" rtlCol="0" anchor="ctr"/>
+          <a:lstStyle/>
+          <a:p>
+            <a:pPr algn="ctr"/>
+            <a:endParaRPr/>
+          </a:p>
+        </p:txBody>
+      </p:sp>
+      <p:sp>
+        <p:nvSpPr>
+          <p:cNvPr id="9" name="Parte GPS"/>
+          <p:cNvSpPr/>
+          <p:nvPr/>
+        </p:nvSpPr>
+        <p:spPr>
+          <a:xfrm>
+            <a:off x="432000" y="1940000"/>
+            <a:ext cx="2700000" cy="720000"/>
+          </a:xfrm>
+          <a:prstGeom prst="roundRect">
+            <a:avLst>
+              <a:gd name="adj" fmla="val 6000"/>
+            </a:avLst>
+          </a:prstGeom>
+          <a:solidFill>
+            <a:srgbClr val="F4F5F9"/>
+          </a:solidFill>
+          <a:ln>
+            <a:noFill/>
+          </a:ln>
+          <a:effectLst/>
+        </p:spPr>
+        <p:style>
+          <a:lnRef idx="1">
+            <a:schemeClr val="accent1"/>
+          </a:lnRef>
+          <a:fillRef idx="3">
+            <a:schemeClr val="accent1"/>
+          </a:fillRef>
+          <a:effectRef idx="2">
+            <a:schemeClr val="accent1"/>
+          </a:effectRef>
+          <a:fontRef idx="minor">
+            <a:schemeClr val="lt1"/>
+          </a:fontRef>
+        </p:style>
+        <p:txBody>
+          <a:bodyPr wrap="square" lIns="90000" tIns="54000" rIns="90000" bIns="54000" rtlCol="0" anchor="ctr"/>
+          <a:lstStyle/>
+          <a:p>
+            <a:pPr algn="ctr"/>
+            <a:endParaRPr/>
+          </a:p>
+        </p:txBody>
+      </p:sp>
+      <p:sp>
+        <p:nvSpPr>
+          <p:cNvPr id="10" name="Texto GPS"/>
+          <p:cNvSpPr txBox="1"/>
+          <p:nvPr/>
+        </p:nvSpPr>
+        <p:spPr>
+          <a:xfrm>
+            <a:off x="612000" y="1940000"/>
+            <a:ext cx="2440000" cy="720000"/>
+          </a:xfrm>
+          <a:prstGeom prst="rect">
+            <a:avLst/>
+          </a:prstGeom>
+          <a:noFill/>
+        </p:spPr>
+        <p:txBody>
+          <a:bodyPr wrap="square" lIns="90000" tIns="54000" rIns="90000" bIns="54000" anchor="ctr">
+            <a:noAutofit/>
+          </a:bodyPr>
+          <a:lstStyle/>
+          <a:p>
+            <a:pPr algn="l">
+              <a:spcAft>
+                <a:spcPts val="100"/>
               </a:spcAft>
             </a:pPr>
             <a:r>
@@ -7186,39 +8757,1085 @@
                 </a:solidFill>
                 <a:latin typeface="Plus Jakarta Sans"/>
               </a:rPr>
-              <a:t>Serviço em primeiro plano + PARTIAL_WAKE_LOCK</a:t>
-            </a:r>
-          </a:p>
-          <a:p>
-            <a:pPr algn="l">
-              <a:spcAft>
-                <a:spcPts val="400"/>
-              </a:spcAft>
-            </a:pPr>
-            <a:r>
-              <a:rPr sz="1600" b="0">
-                <a:solidFill>
-                  <a:srgbClr val="0D0F14"/>
-                </a:solidFill>
-                <a:latin typeface="Plus Jakarta Sans"/>
-              </a:rPr>
-              <a:t>sem wake lock a CPU dorme e o acelerômetro (não-wakeup) para.</a:t>
-            </a:r>
-          </a:p>
-          <a:p>
-            <a:pPr algn="l">
-              <a:spcAft>
-                <a:spcPts val="400"/>
-              </a:spcAft>
-            </a:pPr>
-            <a:r>
-              <a:rPr sz="1600" b="0">
-                <a:solidFill>
-                  <a:srgbClr val="0D0F14"/>
-                </a:solidFill>
-                <a:latin typeface="Plus Jakarta Sans"/>
-              </a:rPr>
-              <a:t>Android = CFS, sem tempo real: período solicitado, Cᵢ medido na AV2.</a:t>
+              <a:t>GPS</a:t>
+            </a:r>
+          </a:p>
+          <a:p>
+            <a:pPr algn="l">
+              <a:spcAft>
+                <a:spcPts val="0"/>
+              </a:spcAft>
+            </a:pPr>
+            <a:r>
+              <a:rPr sz="1300" b="0">
+                <a:solidFill>
+                  <a:srgbClr val="6B6F80"/>
+                </a:solidFill>
+                <a:latin typeface="Plus Jakarta Sans"/>
+              </a:rPr>
+              <a:t>um fixo por segundo</a:t>
+            </a:r>
+          </a:p>
+        </p:txBody>
+      </p:sp>
+      <p:sp>
+        <p:nvSpPr>
+          <p:cNvPr id="11" name="Seta GPS"/>
+          <p:cNvSpPr/>
+          <p:nvPr/>
+        </p:nvSpPr>
+        <p:spPr>
+          <a:xfrm>
+            <a:off x="3230000" y="2170000"/>
+            <a:ext cx="380000" cy="260000"/>
+          </a:xfrm>
+          <a:prstGeom prst="rightArrow">
+            <a:avLst/>
+          </a:prstGeom>
+          <a:solidFill>
+            <a:srgbClr val="B9B0F4"/>
+          </a:solidFill>
+          <a:ln>
+            <a:noFill/>
+          </a:ln>
+          <a:effectLst/>
+        </p:spPr>
+        <p:style>
+          <a:lnRef idx="1">
+            <a:schemeClr val="accent1"/>
+          </a:lnRef>
+          <a:fillRef idx="3">
+            <a:schemeClr val="accent1"/>
+          </a:fillRef>
+          <a:effectRef idx="2">
+            <a:schemeClr val="accent1"/>
+          </a:effectRef>
+          <a:fontRef idx="minor">
+            <a:schemeClr val="lt1"/>
+          </a:fontRef>
+        </p:style>
+        <p:txBody>
+          <a:bodyPr wrap="square" lIns="90000" tIns="54000" rIns="90000" bIns="54000" rtlCol="0" anchor="ctr"/>
+          <a:lstStyle/>
+          <a:p>
+            <a:pPr algn="ctr"/>
+            <a:endParaRPr/>
+          </a:p>
+        </p:txBody>
+      </p:sp>
+      <p:sp>
+        <p:nvSpPr>
+          <p:cNvPr id="12" name="Parte Consumidor"/>
+          <p:cNvSpPr/>
+          <p:nvPr/>
+        </p:nvSpPr>
+        <p:spPr>
+          <a:xfrm>
+            <a:off x="432000" y="2800000"/>
+            <a:ext cx="2700000" cy="720000"/>
+          </a:xfrm>
+          <a:prstGeom prst="roundRect">
+            <a:avLst>
+              <a:gd name="adj" fmla="val 6000"/>
+            </a:avLst>
+          </a:prstGeom>
+          <a:solidFill>
+            <a:srgbClr val="F4F5F9"/>
+          </a:solidFill>
+          <a:ln>
+            <a:noFill/>
+          </a:ln>
+          <a:effectLst/>
+        </p:spPr>
+        <p:style>
+          <a:lnRef idx="1">
+            <a:schemeClr val="accent1"/>
+          </a:lnRef>
+          <a:fillRef idx="3">
+            <a:schemeClr val="accent1"/>
+          </a:fillRef>
+          <a:effectRef idx="2">
+            <a:schemeClr val="accent1"/>
+          </a:effectRef>
+          <a:fontRef idx="minor">
+            <a:schemeClr val="lt1"/>
+          </a:fontRef>
+        </p:style>
+        <p:txBody>
+          <a:bodyPr wrap="square" lIns="90000" tIns="54000" rIns="90000" bIns="54000" rtlCol="0" anchor="ctr"/>
+          <a:lstStyle/>
+          <a:p>
+            <a:pPr algn="ctr"/>
+            <a:endParaRPr/>
+          </a:p>
+        </p:txBody>
+      </p:sp>
+      <p:sp>
+        <p:nvSpPr>
+          <p:cNvPr id="13" name="Texto Consumidor"/>
+          <p:cNvSpPr txBox="1"/>
+          <p:nvPr/>
+        </p:nvSpPr>
+        <p:spPr>
+          <a:xfrm>
+            <a:off x="612000" y="2800000"/>
+            <a:ext cx="2440000" cy="720000"/>
+          </a:xfrm>
+          <a:prstGeom prst="rect">
+            <a:avLst/>
+          </a:prstGeom>
+          <a:noFill/>
+        </p:spPr>
+        <p:txBody>
+          <a:bodyPr wrap="square" lIns="90000" tIns="54000" rIns="90000" bIns="54000" anchor="ctr">
+            <a:noAutofit/>
+          </a:bodyPr>
+          <a:lstStyle/>
+          <a:p>
+            <a:pPr algn="l">
+              <a:spcAft>
+                <a:spcPts val="100"/>
+              </a:spcAft>
+            </a:pPr>
+            <a:r>
+              <a:rPr sz="1600" b="1">
+                <a:solidFill>
+                  <a:srgbClr val="0D0F14"/>
+                </a:solidFill>
+                <a:latin typeface="Plus Jakarta Sans"/>
+              </a:rPr>
+              <a:t>Consumidor</a:t>
+            </a:r>
+          </a:p>
+          <a:p>
+            <a:pPr algn="l">
+              <a:spcAft>
+                <a:spcPts val="0"/>
+              </a:spcAft>
+            </a:pPr>
+            <a:r>
+              <a:rPr sz="1300" b="0">
+                <a:solidFill>
+                  <a:srgbClr val="6B6F80"/>
+                </a:solidFill>
+                <a:latin typeface="Plus Jakarta Sans"/>
+              </a:rPr>
+              <a:t>organiza os dados</a:t>
+            </a:r>
+          </a:p>
+        </p:txBody>
+      </p:sp>
+      <p:sp>
+        <p:nvSpPr>
+          <p:cNvPr id="14" name="Seta Consumidor"/>
+          <p:cNvSpPr/>
+          <p:nvPr/>
+        </p:nvSpPr>
+        <p:spPr>
+          <a:xfrm>
+            <a:off x="3230000" y="3030000"/>
+            <a:ext cx="380000" cy="260000"/>
+          </a:xfrm>
+          <a:prstGeom prst="rightArrow">
+            <a:avLst/>
+          </a:prstGeom>
+          <a:solidFill>
+            <a:srgbClr val="B9B0F4"/>
+          </a:solidFill>
+          <a:ln>
+            <a:noFill/>
+          </a:ln>
+          <a:effectLst/>
+        </p:spPr>
+        <p:style>
+          <a:lnRef idx="1">
+            <a:schemeClr val="accent1"/>
+          </a:lnRef>
+          <a:fillRef idx="3">
+            <a:schemeClr val="accent1"/>
+          </a:fillRef>
+          <a:effectRef idx="2">
+            <a:schemeClr val="accent1"/>
+          </a:effectRef>
+          <a:fontRef idx="minor">
+            <a:schemeClr val="lt1"/>
+          </a:fontRef>
+        </p:style>
+        <p:txBody>
+          <a:bodyPr wrap="square" lIns="90000" tIns="54000" rIns="90000" bIns="54000" rtlCol="0" anchor="ctr"/>
+          <a:lstStyle/>
+          <a:p>
+            <a:pPr algn="ctr"/>
+            <a:endParaRPr/>
+          </a:p>
+        </p:txBody>
+      </p:sp>
+      <p:sp>
+        <p:nvSpPr>
+          <p:cNvPr id="15" name="Parte Registro"/>
+          <p:cNvSpPr/>
+          <p:nvPr/>
+        </p:nvSpPr>
+        <p:spPr>
+          <a:xfrm>
+            <a:off x="432000" y="3660000"/>
+            <a:ext cx="2700000" cy="720000"/>
+          </a:xfrm>
+          <a:prstGeom prst="roundRect">
+            <a:avLst>
+              <a:gd name="adj" fmla="val 6000"/>
+            </a:avLst>
+          </a:prstGeom>
+          <a:solidFill>
+            <a:srgbClr val="F4F5F9"/>
+          </a:solidFill>
+          <a:ln>
+            <a:noFill/>
+          </a:ln>
+          <a:effectLst/>
+        </p:spPr>
+        <p:style>
+          <a:lnRef idx="1">
+            <a:schemeClr val="accent1"/>
+          </a:lnRef>
+          <a:fillRef idx="3">
+            <a:schemeClr val="accent1"/>
+          </a:fillRef>
+          <a:effectRef idx="2">
+            <a:schemeClr val="accent1"/>
+          </a:effectRef>
+          <a:fontRef idx="minor">
+            <a:schemeClr val="lt1"/>
+          </a:fontRef>
+        </p:style>
+        <p:txBody>
+          <a:bodyPr wrap="square" lIns="90000" tIns="54000" rIns="90000" bIns="54000" rtlCol="0" anchor="ctr"/>
+          <a:lstStyle/>
+          <a:p>
+            <a:pPr algn="ctr"/>
+            <a:endParaRPr/>
+          </a:p>
+        </p:txBody>
+      </p:sp>
+      <p:sp>
+        <p:nvSpPr>
+          <p:cNvPr id="16" name="Texto Registro"/>
+          <p:cNvSpPr txBox="1"/>
+          <p:nvPr/>
+        </p:nvSpPr>
+        <p:spPr>
+          <a:xfrm>
+            <a:off x="612000" y="3660000"/>
+            <a:ext cx="2440000" cy="720000"/>
+          </a:xfrm>
+          <a:prstGeom prst="rect">
+            <a:avLst/>
+          </a:prstGeom>
+          <a:noFill/>
+        </p:spPr>
+        <p:txBody>
+          <a:bodyPr wrap="square" lIns="90000" tIns="54000" rIns="90000" bIns="54000" anchor="ctr">
+            <a:noAutofit/>
+          </a:bodyPr>
+          <a:lstStyle/>
+          <a:p>
+            <a:pPr algn="l">
+              <a:spcAft>
+                <a:spcPts val="100"/>
+              </a:spcAft>
+            </a:pPr>
+            <a:r>
+              <a:rPr sz="1600" b="1">
+                <a:solidFill>
+                  <a:srgbClr val="0D0F14"/>
+                </a:solidFill>
+                <a:latin typeface="Plus Jakarta Sans"/>
+              </a:rPr>
+              <a:t>Registro</a:t>
+            </a:r>
+          </a:p>
+          <a:p>
+            <a:pPr algn="l">
+              <a:spcAft>
+                <a:spcPts val="0"/>
+              </a:spcAft>
+            </a:pPr>
+            <a:r>
+              <a:rPr sz="1300" b="0">
+                <a:solidFill>
+                  <a:srgbClr val="6B6F80"/>
+                </a:solidFill>
+                <a:latin typeface="Plus Jakarta Sans"/>
+              </a:rPr>
+              <a:t>salva os dados</a:t>
+            </a:r>
+          </a:p>
+        </p:txBody>
+      </p:sp>
+      <p:sp>
+        <p:nvSpPr>
+          <p:cNvPr id="17" name="Seta Registro"/>
+          <p:cNvSpPr/>
+          <p:nvPr/>
+        </p:nvSpPr>
+        <p:spPr>
+          <a:xfrm>
+            <a:off x="3230000" y="3890000"/>
+            <a:ext cx="380000" cy="260000"/>
+          </a:xfrm>
+          <a:prstGeom prst="rightArrow">
+            <a:avLst/>
+          </a:prstGeom>
+          <a:solidFill>
+            <a:srgbClr val="B9B0F4"/>
+          </a:solidFill>
+          <a:ln>
+            <a:noFill/>
+          </a:ln>
+          <a:effectLst/>
+        </p:spPr>
+        <p:style>
+          <a:lnRef idx="1">
+            <a:schemeClr val="accent1"/>
+          </a:lnRef>
+          <a:fillRef idx="3">
+            <a:schemeClr val="accent1"/>
+          </a:fillRef>
+          <a:effectRef idx="2">
+            <a:schemeClr val="accent1"/>
+          </a:effectRef>
+          <a:fontRef idx="minor">
+            <a:schemeClr val="lt1"/>
+          </a:fontRef>
+        </p:style>
+        <p:txBody>
+          <a:bodyPr wrap="square" lIns="90000" tIns="54000" rIns="90000" bIns="54000" rtlCol="0" anchor="ctr"/>
+          <a:lstStyle/>
+          <a:p>
+            <a:pPr algn="ctr"/>
+            <a:endParaRPr/>
+          </a:p>
+        </p:txBody>
+      </p:sp>
+      <p:sp>
+        <p:nvSpPr>
+          <p:cNvPr id="18" name="Buffer"/>
+          <p:cNvSpPr/>
+          <p:nvPr/>
+        </p:nvSpPr>
+        <p:spPr>
+          <a:xfrm>
+            <a:off x="3710000" y="1080000"/>
+            <a:ext cx="2650000" cy="3300000"/>
+          </a:xfrm>
+          <a:prstGeom prst="roundRect">
+            <a:avLst>
+              <a:gd name="adj" fmla="val 6000"/>
+            </a:avLst>
+          </a:prstGeom>
+          <a:solidFill>
+            <a:srgbClr val="5E4AE3"/>
+          </a:solidFill>
+          <a:ln>
+            <a:noFill/>
+          </a:ln>
+          <a:effectLst/>
+        </p:spPr>
+        <p:style>
+          <a:lnRef idx="1">
+            <a:schemeClr val="accent1"/>
+          </a:lnRef>
+          <a:fillRef idx="3">
+            <a:schemeClr val="accent1"/>
+          </a:fillRef>
+          <a:effectRef idx="2">
+            <a:schemeClr val="accent1"/>
+          </a:effectRef>
+          <a:fontRef idx="minor">
+            <a:schemeClr val="lt1"/>
+          </a:fontRef>
+        </p:style>
+        <p:txBody>
+          <a:bodyPr wrap="square" lIns="90000" tIns="54000" rIns="90000" bIns="54000" rtlCol="0" anchor="ctr"/>
+          <a:lstStyle/>
+          <a:p>
+            <a:pPr algn="ctr"/>
+            <a:endParaRPr/>
+          </a:p>
+        </p:txBody>
+      </p:sp>
+      <p:sp>
+        <p:nvSpPr>
+          <p:cNvPr id="19" name="Texto buffer"/>
+          <p:cNvSpPr txBox="1"/>
+          <p:nvPr/>
+        </p:nvSpPr>
+        <p:spPr>
+          <a:xfrm>
+            <a:off x="3710000" y="1080000"/>
+            <a:ext cx="2650000" cy="2540000"/>
+          </a:xfrm>
+          <a:prstGeom prst="rect">
+            <a:avLst/>
+          </a:prstGeom>
+          <a:noFill/>
+        </p:spPr>
+        <p:txBody>
+          <a:bodyPr wrap="square" lIns="90000" tIns="54000" rIns="90000" bIns="54000" anchor="ctr">
+            <a:noAutofit/>
+          </a:bodyPr>
+          <a:lstStyle/>
+          <a:p>
+            <a:pPr algn="ctr">
+              <a:spcAft>
+                <a:spcPts val="300"/>
+              </a:spcAft>
+            </a:pPr>
+            <a:r>
+              <a:rPr sz="2600" b="1">
+                <a:solidFill>
+                  <a:srgbClr val="FFFFFF"/>
+                </a:solidFill>
+                <a:latin typeface="Plus Jakarta Sans"/>
+              </a:rPr>
+              <a:t>Buffer</a:t>
+            </a:r>
+          </a:p>
+          <a:p>
+            <a:pPr algn="ctr">
+              <a:spcAft>
+                <a:spcPts val="0"/>
+              </a:spcAft>
+            </a:pPr>
+            <a:r>
+              <a:rPr sz="1500" b="0">
+                <a:solidFill>
+                  <a:srgbClr val="E4E0FB"/>
+                </a:solidFill>
+                <a:latin typeface="Plus Jakarta Sans"/>
+              </a:rPr>
+              <a:t>Todas usam o mesmo buffer.</a:t>
+            </a:r>
+          </a:p>
+        </p:txBody>
+      </p:sp>
+      <p:sp>
+        <p:nvSpPr>
+          <p:cNvPr id="20" name="Selo synchronized"/>
+          <p:cNvSpPr/>
+          <p:nvPr/>
+        </p:nvSpPr>
+        <p:spPr>
+          <a:xfrm>
+            <a:off x="4035000" y="3740000"/>
+            <a:ext cx="2000000" cy="420000"/>
+          </a:xfrm>
+          <a:prstGeom prst="roundRect">
+            <a:avLst>
+              <a:gd name="adj" fmla="val 50000"/>
+            </a:avLst>
+          </a:prstGeom>
+          <a:solidFill>
+            <a:srgbClr val="FFFFFF"/>
+          </a:solidFill>
+          <a:ln>
+            <a:noFill/>
+          </a:ln>
+          <a:effectLst/>
+        </p:spPr>
+        <p:style>
+          <a:lnRef idx="1">
+            <a:schemeClr val="accent1"/>
+          </a:lnRef>
+          <a:fillRef idx="3">
+            <a:schemeClr val="accent1"/>
+          </a:fillRef>
+          <a:effectRef idx="2">
+            <a:schemeClr val="accent1"/>
+          </a:effectRef>
+          <a:fontRef idx="minor">
+            <a:schemeClr val="lt1"/>
+          </a:fontRef>
+        </p:style>
+        <p:txBody>
+          <a:bodyPr wrap="square" lIns="90000" tIns="54000" rIns="90000" bIns="54000" rtlCol="0" anchor="ctr"/>
+          <a:lstStyle/>
+          <a:p>
+            <a:pPr algn="ctr">
+              <a:spcAft>
+                <a:spcPts val="0"/>
+              </a:spcAft>
+            </a:pPr>
+            <a:r>
+              <a:rPr sz="1400" b="1">
+                <a:solidFill>
+                  <a:srgbClr val="5E4AE3"/>
+                </a:solidFill>
+                <a:latin typeface="Plus Jakarta Sans"/>
+              </a:rPr>
+              <a:t>synchronized</a:t>
+            </a:r>
+          </a:p>
+        </p:txBody>
+      </p:sp>
+      <p:sp>
+        <p:nvSpPr>
+          <p:cNvPr id="21" name="Card cadeado"/>
+          <p:cNvSpPr/>
+          <p:nvPr/>
+        </p:nvSpPr>
+        <p:spPr>
+          <a:xfrm>
+            <a:off x="432000" y="4620000"/>
+            <a:ext cx="5928000" cy="1480000"/>
+          </a:xfrm>
+          <a:prstGeom prst="roundRect">
+            <a:avLst>
+              <a:gd name="adj" fmla="val 6000"/>
+            </a:avLst>
+          </a:prstGeom>
+          <a:solidFill>
+            <a:srgbClr val="F4F5F9"/>
+          </a:solidFill>
+          <a:ln>
+            <a:noFill/>
+          </a:ln>
+          <a:effectLst/>
+        </p:spPr>
+        <p:style>
+          <a:lnRef idx="1">
+            <a:schemeClr val="accent1"/>
+          </a:lnRef>
+          <a:fillRef idx="3">
+            <a:schemeClr val="accent1"/>
+          </a:fillRef>
+          <a:effectRef idx="2">
+            <a:schemeClr val="accent1"/>
+          </a:effectRef>
+          <a:fontRef idx="minor">
+            <a:schemeClr val="lt1"/>
+          </a:fontRef>
+        </p:style>
+        <p:txBody>
+          <a:bodyPr wrap="square" lIns="90000" tIns="54000" rIns="90000" bIns="54000" rtlCol="0" anchor="ctr"/>
+          <a:lstStyle/>
+          <a:p>
+            <a:pPr algn="ctr"/>
+            <a:endParaRPr/>
+          </a:p>
+        </p:txBody>
+      </p:sp>
+      <p:sp>
+        <p:nvSpPr>
+          <p:cNvPr id="22" name="Texto cadeado"/>
+          <p:cNvSpPr txBox="1"/>
+          <p:nvPr/>
+        </p:nvSpPr>
+        <p:spPr>
+          <a:xfrm>
+            <a:off x="672000" y="4620000"/>
+            <a:ext cx="5448000" cy="1480000"/>
+          </a:xfrm>
+          <a:prstGeom prst="rect">
+            <a:avLst/>
+          </a:prstGeom>
+          <a:noFill/>
+        </p:spPr>
+        <p:txBody>
+          <a:bodyPr wrap="square" lIns="90000" tIns="54000" rIns="90000" bIns="54000" anchor="ctr">
+            <a:noAutofit/>
+          </a:bodyPr>
+          <a:lstStyle/>
+          <a:p>
+            <a:pPr algn="l">
+              <a:spcAft>
+                <a:spcPts val="300"/>
+              </a:spcAft>
+            </a:pPr>
+            <a:r>
+              <a:rPr sz="1800" b="1">
+                <a:solidFill>
+                  <a:srgbClr val="5E4AE3"/>
+                </a:solidFill>
+                <a:latin typeface="Plus Jakarta Sans"/>
+              </a:rPr>
+              <a:t>synchronized</a:t>
+            </a:r>
+            <a:r>
+              <a:rPr sz="1800" b="1">
+                <a:solidFill>
+                  <a:srgbClr val="0D0F14"/>
+                </a:solidFill>
+                <a:latin typeface="Plus Jakarta Sans"/>
+              </a:rPr>
+              <a:t> funciona como um cadeado:</a:t>
+            </a:r>
+          </a:p>
+          <a:p>
+            <a:pPr algn="l">
+              <a:spcAft>
+                <a:spcPts val="0"/>
+              </a:spcAft>
+            </a:pPr>
+            <a:r>
+              <a:rPr sz="1800" b="0">
+                <a:solidFill>
+                  <a:srgbClr val="0D0F14"/>
+                </a:solidFill>
+                <a:latin typeface="Plus Jakarta Sans"/>
+              </a:rPr>
+              <a:t>apenas uma parte mexe no buffer por vez.</a:t>
+            </a:r>
+          </a:p>
+        </p:txBody>
+      </p:sp>
+      <p:sp>
+        <p:nvSpPr>
+          <p:cNvPr id="23" name="Card aparelho"/>
+          <p:cNvSpPr/>
+          <p:nvPr/>
+        </p:nvSpPr>
+        <p:spPr>
+          <a:xfrm>
+            <a:off x="6660000" y="1080000"/>
+            <a:ext cx="5100000" cy="1940000"/>
+          </a:xfrm>
+          <a:prstGeom prst="roundRect">
+            <a:avLst>
+              <a:gd name="adj" fmla="val 6000"/>
+            </a:avLst>
+          </a:prstGeom>
+          <a:solidFill>
+            <a:srgbClr val="F4F5F9"/>
+          </a:solidFill>
+          <a:ln>
+            <a:noFill/>
+          </a:ln>
+          <a:effectLst/>
+        </p:spPr>
+        <p:style>
+          <a:lnRef idx="1">
+            <a:schemeClr val="accent1"/>
+          </a:lnRef>
+          <a:fillRef idx="3">
+            <a:schemeClr val="accent1"/>
+          </a:fillRef>
+          <a:effectRef idx="2">
+            <a:schemeClr val="accent1"/>
+          </a:effectRef>
+          <a:fontRef idx="minor">
+            <a:schemeClr val="lt1"/>
+          </a:fontRef>
+        </p:style>
+        <p:txBody>
+          <a:bodyPr wrap="square" lIns="90000" tIns="54000" rIns="90000" bIns="54000" rtlCol="0" anchor="ctr"/>
+          <a:lstStyle/>
+          <a:p>
+            <a:pPr algn="ctr"/>
+            <a:endParaRPr/>
+          </a:p>
+        </p:txBody>
+      </p:sp>
+      <p:sp>
+        <p:nvSpPr>
+          <p:cNvPr id="24" name="Título aparelho"/>
+          <p:cNvSpPr txBox="1"/>
+          <p:nvPr/>
+        </p:nvSpPr>
+        <p:spPr>
+          <a:xfrm>
+            <a:off x="6900000" y="1260000"/>
+            <a:ext cx="4620000" cy="400000"/>
+          </a:xfrm>
+          <a:prstGeom prst="rect">
+            <a:avLst/>
+          </a:prstGeom>
+          <a:noFill/>
+        </p:spPr>
+        <p:txBody>
+          <a:bodyPr wrap="square" lIns="0" tIns="0" rIns="0" bIns="0" anchor="ctr">
+            <a:noAutofit/>
+          </a:bodyPr>
+          <a:lstStyle/>
+          <a:p>
+            <a:pPr algn="l">
+              <a:spcAft>
+                <a:spcPts val="0"/>
+              </a:spcAft>
+            </a:pPr>
+            <a:r>
+              <a:rPr sz="1700" b="1">
+                <a:solidFill>
+                  <a:srgbClr val="0D0F14"/>
+                </a:solidFill>
+                <a:latin typeface="Plus Jakarta Sans"/>
+              </a:rPr>
+              <a:t>Resultado no aparelho</a:t>
+            </a:r>
+          </a:p>
+        </p:txBody>
+      </p:sp>
+      <p:sp>
+        <p:nvSpPr>
+          <p:cNvPr id="25" name="Stat tela bloqueada"/>
+          <p:cNvSpPr txBox="1"/>
+          <p:nvPr/>
+        </p:nvSpPr>
+        <p:spPr>
+          <a:xfrm>
+            <a:off x="6900000" y="1780000"/>
+            <a:ext cx="2200000" cy="1100000"/>
+          </a:xfrm>
+          <a:prstGeom prst="rect">
+            <a:avLst/>
+          </a:prstGeom>
+          <a:noFill/>
+        </p:spPr>
+        <p:txBody>
+          <a:bodyPr wrap="square" lIns="0" tIns="0" rIns="0" bIns="0" anchor="t">
+            <a:noAutofit/>
+          </a:bodyPr>
+          <a:lstStyle/>
+          <a:p>
+            <a:pPr algn="l">
+              <a:spcAft>
+                <a:spcPts val="100"/>
+              </a:spcAft>
+            </a:pPr>
+            <a:r>
+              <a:rPr sz="2800" b="1">
+                <a:solidFill>
+                  <a:srgbClr val="5E4AE3"/>
+                </a:solidFill>
+                <a:latin typeface="Plus Jakarta Sans"/>
+              </a:rPr>
+              <a:t>36,3 min</a:t>
+            </a:r>
+          </a:p>
+          <a:p>
+            <a:pPr algn="l">
+              <a:spcAft>
+                <a:spcPts val="0"/>
+              </a:spcAft>
+            </a:pPr>
+            <a:r>
+              <a:rPr sz="1400" b="0">
+                <a:solidFill>
+                  <a:srgbClr val="0D0F14"/>
+                </a:solidFill>
+                <a:latin typeface="Plus Jakarta Sans"/>
+              </a:rPr>
+              <a:t>com a tela bloqueada</a:t>
+            </a:r>
+          </a:p>
+        </p:txBody>
+      </p:sp>
+      <p:sp>
+        <p:nvSpPr>
+          <p:cNvPr id="26" name="Stat IMU"/>
+          <p:cNvSpPr txBox="1"/>
+          <p:nvPr/>
+        </p:nvSpPr>
+        <p:spPr>
+          <a:xfrm>
+            <a:off x="9320000" y="1780000"/>
+            <a:ext cx="2200000" cy="1100000"/>
+          </a:xfrm>
+          <a:prstGeom prst="rect">
+            <a:avLst/>
+          </a:prstGeom>
+          <a:noFill/>
+        </p:spPr>
+        <p:txBody>
+          <a:bodyPr wrap="square" lIns="0" tIns="0" rIns="0" bIns="0" anchor="t">
+            <a:noAutofit/>
+          </a:bodyPr>
+          <a:lstStyle/>
+          <a:p>
+            <a:pPr algn="l">
+              <a:spcAft>
+                <a:spcPts val="100"/>
+              </a:spcAft>
+            </a:pPr>
+            <a:r>
+              <a:rPr sz="2800" b="1">
+                <a:solidFill>
+                  <a:srgbClr val="5E4AE3"/>
+                </a:solidFill>
+                <a:latin typeface="Plus Jakarta Sans"/>
+              </a:rPr>
+              <a:t>50,1</a:t>
+            </a:r>
+          </a:p>
+          <a:p>
+            <a:pPr algn="l">
+              <a:spcAft>
+                <a:spcPts val="0"/>
+              </a:spcAft>
+            </a:pPr>
+            <a:r>
+              <a:rPr sz="1400" b="0">
+                <a:solidFill>
+                  <a:srgbClr val="0D0F14"/>
+                </a:solidFill>
+                <a:latin typeface="Plus Jakarta Sans"/>
+              </a:rPr>
+              <a:t>leituras por segundo na IMU</a:t>
+            </a:r>
+          </a:p>
+        </p:txBody>
+      </p:sp>
+      <p:sp>
+        <p:nvSpPr>
+          <p:cNvPr id="27" name="Card corrida"/>
+          <p:cNvSpPr/>
+          <p:nvPr/>
+        </p:nvSpPr>
+        <p:spPr>
+          <a:xfrm>
+            <a:off x="6660000" y="3260000"/>
+            <a:ext cx="5100000" cy="2840000"/>
+          </a:xfrm>
+          <a:prstGeom prst="roundRect">
+            <a:avLst>
+              <a:gd name="adj" fmla="val 6000"/>
+            </a:avLst>
+          </a:prstGeom>
+          <a:solidFill>
+            <a:srgbClr val="F4F5F9"/>
+          </a:solidFill>
+          <a:ln>
+            <a:noFill/>
+          </a:ln>
+          <a:effectLst/>
+        </p:spPr>
+        <p:style>
+          <a:lnRef idx="1">
+            <a:schemeClr val="accent1"/>
+          </a:lnRef>
+          <a:fillRef idx="3">
+            <a:schemeClr val="accent1"/>
+          </a:fillRef>
+          <a:effectRef idx="2">
+            <a:schemeClr val="accent1"/>
+          </a:effectRef>
+          <a:fontRef idx="minor">
+            <a:schemeClr val="lt1"/>
+          </a:fontRef>
+        </p:style>
+        <p:txBody>
+          <a:bodyPr wrap="square" lIns="90000" tIns="54000" rIns="90000" bIns="54000" rtlCol="0" anchor="ctr"/>
+          <a:lstStyle/>
+          <a:p>
+            <a:pPr algn="ctr"/>
+            <a:endParaRPr/>
+          </a:p>
+        </p:txBody>
+      </p:sp>
+      <p:sp>
+        <p:nvSpPr>
+          <p:cNvPr id="28" name="Título corrida"/>
+          <p:cNvSpPr txBox="1"/>
+          <p:nvPr/>
+        </p:nvSpPr>
+        <p:spPr>
+          <a:xfrm>
+            <a:off x="6900000" y="3440000"/>
+            <a:ext cx="4620000" cy="400000"/>
+          </a:xfrm>
+          <a:prstGeom prst="rect">
+            <a:avLst/>
+          </a:prstGeom>
+          <a:noFill/>
+        </p:spPr>
+        <p:txBody>
+          <a:bodyPr wrap="square" lIns="0" tIns="0" rIns="0" bIns="0" anchor="ctr">
+            <a:noAutofit/>
+          </a:bodyPr>
+          <a:lstStyle/>
+          <a:p>
+            <a:pPr algn="l">
+              <a:spcAft>
+                <a:spcPts val="0"/>
+              </a:spcAft>
+            </a:pPr>
+            <a:r>
+              <a:rPr sz="1700" b="1">
+                <a:solidFill>
+                  <a:srgbClr val="0D0F14"/>
+                </a:solidFill>
+                <a:latin typeface="Plus Jakarta Sans"/>
+              </a:rPr>
+              <a:t>Teste de corrida</a:t>
+            </a:r>
+          </a:p>
+        </p:txBody>
+      </p:sp>
+      <p:sp>
+        <p:nvSpPr>
+          <p:cNvPr id="29" name="Stat execuções"/>
+          <p:cNvSpPr txBox="1"/>
+          <p:nvPr/>
+        </p:nvSpPr>
+        <p:spPr>
+          <a:xfrm>
+            <a:off x="6900000" y="3960000"/>
+            <a:ext cx="2200000" cy="1100000"/>
+          </a:xfrm>
+          <a:prstGeom prst="rect">
+            <a:avLst/>
+          </a:prstGeom>
+          <a:noFill/>
+        </p:spPr>
+        <p:txBody>
+          <a:bodyPr wrap="square" lIns="0" tIns="0" rIns="0" bIns="0" anchor="t">
+            <a:noAutofit/>
+          </a:bodyPr>
+          <a:lstStyle/>
+          <a:p>
+            <a:pPr algn="l">
+              <a:spcAft>
+                <a:spcPts val="100"/>
+              </a:spcAft>
+            </a:pPr>
+            <a:r>
+              <a:rPr sz="2800" b="1">
+                <a:solidFill>
+                  <a:srgbClr val="5E4AE3"/>
+                </a:solidFill>
+                <a:latin typeface="Plus Jakarta Sans"/>
+              </a:rPr>
+              <a:t>10</a:t>
+            </a:r>
+          </a:p>
+          <a:p>
+            <a:pPr algn="l">
+              <a:spcAft>
+                <a:spcPts val="0"/>
+              </a:spcAft>
+            </a:pPr>
+            <a:r>
+              <a:rPr sz="1400" b="0">
+                <a:solidFill>
+                  <a:srgbClr val="0D0F14"/>
+                </a:solidFill>
+                <a:latin typeface="Plus Jakarta Sans"/>
+              </a:rPr>
+              <a:t>execuções independentes</a:t>
+            </a:r>
+          </a:p>
+        </p:txBody>
+      </p:sp>
+      <p:sp>
+        <p:nvSpPr>
+          <p:cNvPr id="30" name="Stat leituras"/>
+          <p:cNvSpPr txBox="1"/>
+          <p:nvPr/>
+        </p:nvSpPr>
+        <p:spPr>
+          <a:xfrm>
+            <a:off x="9320000" y="3960000"/>
+            <a:ext cx="2200000" cy="1100000"/>
+          </a:xfrm>
+          <a:prstGeom prst="rect">
+            <a:avLst/>
+          </a:prstGeom>
+          <a:noFill/>
+        </p:spPr>
+        <p:txBody>
+          <a:bodyPr wrap="square" lIns="0" tIns="0" rIns="0" bIns="0" anchor="t">
+            <a:noAutofit/>
+          </a:bodyPr>
+          <a:lstStyle/>
+          <a:p>
+            <a:pPr algn="l">
+              <a:spcAft>
+                <a:spcPts val="100"/>
+              </a:spcAft>
+            </a:pPr>
+            <a:r>
+              <a:rPr sz="2800" b="1">
+                <a:solidFill>
+                  <a:srgbClr val="5E4AE3"/>
+                </a:solidFill>
+                <a:latin typeface="Plus Jakarta Sans"/>
+              </a:rPr>
+              <a:t>10 mil</a:t>
+            </a:r>
+          </a:p>
+          <a:p>
+            <a:pPr algn="l">
+              <a:spcAft>
+                <a:spcPts val="0"/>
+              </a:spcAft>
+            </a:pPr>
+            <a:r>
+              <a:rPr sz="1400" b="0">
+                <a:solidFill>
+                  <a:srgbClr val="0D0F14"/>
+                </a:solidFill>
+                <a:latin typeface="Plus Jakarta Sans"/>
+              </a:rPr>
+              <a:t>leituras em cada uma</a:t>
+            </a:r>
+          </a:p>
+        </p:txBody>
+      </p:sp>
+      <p:sp>
+        <p:nvSpPr>
+          <p:cNvPr id="31" name="Resultado corrida"/>
+          <p:cNvSpPr/>
+          <p:nvPr/>
+        </p:nvSpPr>
+        <p:spPr>
+          <a:xfrm>
+            <a:off x="6900000" y="5240000"/>
+            <a:ext cx="4620000" cy="620000"/>
+          </a:xfrm>
+          <a:prstGeom prst="roundRect">
+            <a:avLst>
+              <a:gd name="adj" fmla="val 6000"/>
+            </a:avLst>
+          </a:prstGeom>
+          <a:solidFill>
+            <a:srgbClr val="5E4AE3"/>
+          </a:solidFill>
+          <a:ln>
+            <a:noFill/>
+          </a:ln>
+          <a:effectLst/>
+        </p:spPr>
+        <p:style>
+          <a:lnRef idx="1">
+            <a:schemeClr val="accent1"/>
+          </a:lnRef>
+          <a:fillRef idx="3">
+            <a:schemeClr val="accent1"/>
+          </a:fillRef>
+          <a:effectRef idx="2">
+            <a:schemeClr val="accent1"/>
+          </a:effectRef>
+          <a:fontRef idx="minor">
+            <a:schemeClr val="lt1"/>
+          </a:fontRef>
+        </p:style>
+        <p:txBody>
+          <a:bodyPr wrap="square" lIns="90000" tIns="54000" rIns="90000" bIns="54000" rtlCol="0" anchor="ctr"/>
+          <a:lstStyle/>
+          <a:p>
+            <a:pPr algn="ctr">
+              <a:spcAft>
+                <a:spcPts val="0"/>
+              </a:spcAft>
+            </a:pPr>
+            <a:r>
+              <a:rPr sz="1600" b="1">
+                <a:solidFill>
+                  <a:srgbClr val="FFFFFF"/>
+                </a:solidFill>
+                <a:latin typeface="Plus Jakarta Sans"/>
+              </a:rPr>
+              <a:t>Nenhuma inconsistência observada.</a:t>
             </a:r>
           </a:p>
         </p:txBody>
@@ -7232,7 +9849,7 @@
 </file>
 
 <file path=ppt/slides/slide8.xml><?xml version="1.0" encoding="utf-8"?>
-<p:sld xmlns:a="http://schemas.openxmlformats.org/drawingml/2006/main" xmlns:p="http://schemas.openxmlformats.org/presentationml/2006/main" xmlns:r="http://schemas.openxmlformats.org/officeDocument/2006/relationships">
+<p:sld xmlns:a="http://schemas.openxmlformats.org/drawingml/2006/main" xmlns:r="http://schemas.openxmlformats.org/officeDocument/2006/relationships" xmlns:p="http://schemas.openxmlformats.org/presentationml/2006/main">
   <p:cSld>
     <p:spTree>
       <p:nvGrpSpPr>
@@ -7240,7 +9857,14 @@
         <p:cNvGrpSpPr/>
         <p:nvPr/>
       </p:nvGrpSpPr>
-      <p:grpSpPr/>
+      <p:grpSpPr>
+        <a:xfrm>
+          <a:off x="0" y="0"/>
+          <a:ext cx="0" cy="0"/>
+          <a:chOff x="0" y="0"/>
+          <a:chExt cx="0" cy="0"/>
+        </a:xfrm>
+      </p:grpSpPr>
       <p:sp>
         <p:nvSpPr>
           <p:cNvPr id="2" name="Rectangle 1"/>
@@ -7282,6 +9906,7 @@
           <a:lstStyle/>
           <a:p>
             <a:pPr algn="ctr"/>
+            <a:endParaRPr/>
           </a:p>
         </p:txBody>
       </p:sp>
@@ -7302,7 +9927,7 @@
           <a:noFill/>
         </p:spPr>
         <p:txBody>
-          <a:bodyPr wrap="square" lIns="90000" rIns="90000" tIns="54000" bIns="54000" anchor="t">
+          <a:bodyPr wrap="square" lIns="90000" tIns="54000" rIns="90000" bIns="54000" anchor="t">
             <a:spAutoFit/>
           </a:bodyPr>
           <a:lstStyle/>
@@ -7341,7 +9966,7 @@
           <a:noFill/>
         </p:spPr>
         <p:txBody>
-          <a:bodyPr wrap="square" lIns="90000" rIns="90000" tIns="54000" bIns="54000" anchor="t">
+          <a:bodyPr wrap="square" lIns="90000" tIns="54000" rIns="90000" bIns="54000" anchor="t">
             <a:spAutoFit/>
           </a:bodyPr>
           <a:lstStyle/>
@@ -7358,7 +9983,7 @@
                 </a:solidFill>
                 <a:latin typeface="Plus Jakarta Sans"/>
               </a:rPr>
-              <a:t>Fundamentação</a:t>
+              <a:t>Fundamentação · ⟪quem apresenta⟫</a:t>
             </a:r>
           </a:p>
         </p:txBody>
@@ -7380,7 +10005,7 @@
           <a:noFill/>
         </p:spPr>
         <p:txBody>
-          <a:bodyPr wrap="square" lIns="90000" rIns="90000" tIns="54000" bIns="54000" anchor="t">
+          <a:bodyPr wrap="square" lIns="90000" tIns="54000" rIns="90000" bIns="54000" anchor="t">
             <a:spAutoFit/>
           </a:bodyPr>
           <a:lstStyle/>
@@ -7419,7 +10044,7 @@
           <a:noFill/>
         </p:spPr>
         <p:txBody>
-          <a:bodyPr wrap="square" lIns="90000" rIns="90000" tIns="54000" bIns="54000" anchor="t">
+          <a:bodyPr wrap="square" lIns="90000" tIns="54000" rIns="90000" bIns="54000" anchor="t">
             <a:spAutoFit/>
           </a:bodyPr>
           <a:lstStyle/>
@@ -7470,6 +10095,28 @@
                 <a:spcPts val="400"/>
               </a:spcAft>
             </a:pPr>
+            <a:endParaRPr sz="2000" b="0">
+              <a:solidFill>
+                <a:srgbClr val="0D0F14"/>
+              </a:solidFill>
+              <a:latin typeface="Plus Jakarta Sans"/>
+            </a:endParaRPr>
+          </a:p>
+          <a:p>
+            <a:pPr algn="l">
+              <a:spcAft>
+                <a:spcPts val="400"/>
+              </a:spcAft>
+            </a:pPr>
+            <a:r>
+              <a:rPr sz="2000" b="1">
+                <a:solidFill>
+                  <a:srgbClr val="0D0F14"/>
+                </a:solidFill>
+                <a:latin typeface="Plus Jakarta Sans"/>
+              </a:rPr>
+              <a:t>Ruído: </a:t>
+            </a:r>
             <a:r>
               <a:rPr sz="2000" b="0">
                 <a:solidFill>
@@ -7477,7 +10124,7 @@
                 </a:solidFill>
                 <a:latin typeface="Plus Jakarta Sans"/>
               </a:rPr>
-              <a:t/>
+              <a:t>gaussiano extra, acurácia declarada inalterada (sensor otimista)</a:t>
             </a:r>
           </a:p>
           <a:p>
@@ -7493,7 +10140,7 @@
                 </a:solidFill>
                 <a:latin typeface="Plus Jakarta Sans"/>
               </a:rPr>
-              <a:t>Ruído: </a:t>
+              <a:t>Perda: </a:t>
             </a:r>
             <a:r>
               <a:rPr sz="2000" b="0">
@@ -7502,7 +10149,7 @@
                 </a:solidFill>
                 <a:latin typeface="Plus Jakarta Sans"/>
               </a:rPr>
-              <a:t>gaussiano extra, acurácia declarada inalterada (sensor otimista)</a:t>
+              <a:t>fixos retirados com probabilidade p (Δt cresce)</a:t>
             </a:r>
           </a:p>
           <a:p>
@@ -7518,7 +10165,7 @@
                 </a:solidFill>
                 <a:latin typeface="Plus Jakarta Sans"/>
               </a:rPr>
-              <a:t>Perda: </a:t>
+              <a:t>Salto: </a:t>
             </a:r>
             <a:r>
               <a:rPr sz="2000" b="0">
@@ -7527,7 +10174,7 @@
                 </a:solidFill>
                 <a:latin typeface="Plus Jakarta Sans"/>
               </a:rPr>
-              <a:t>fixos retirados com probabilidade p (Δt cresce)</a:t>
+              <a:t>um fixo deslocado de J metros em direção sorteada (o erro grosseiro)</a:t>
             </a:r>
           </a:p>
           <a:p>
@@ -7536,40 +10183,12 @@
                 <a:spcPts val="400"/>
               </a:spcAft>
             </a:pPr>
-            <a:r>
-              <a:rPr sz="2000" b="1">
-                <a:solidFill>
-                  <a:srgbClr val="0D0F14"/>
-                </a:solidFill>
-                <a:latin typeface="Plus Jakarta Sans"/>
-              </a:rPr>
-              <a:t>Salto: </a:t>
-            </a:r>
-            <a:r>
-              <a:rPr sz="2000" b="0">
-                <a:solidFill>
-                  <a:srgbClr val="0D0F14"/>
-                </a:solidFill>
-                <a:latin typeface="Plus Jakarta Sans"/>
-              </a:rPr>
-              <a:t>um fixo deslocado de J metros em direção sorteada (o erro grosseiro)</a:t>
-            </a:r>
-          </a:p>
-          <a:p>
-            <a:pPr algn="l">
-              <a:spcAft>
-                <a:spcPts val="400"/>
-              </a:spcAft>
-            </a:pPr>
-            <a:r>
-              <a:rPr sz="2000" b="0">
-                <a:solidFill>
-                  <a:srgbClr val="0D0F14"/>
-                </a:solidFill>
-                <a:latin typeface="Plus Jakarta Sans"/>
-              </a:rPr>
-              <a:t/>
-            </a:r>
+            <a:endParaRPr sz="2000" b="0">
+              <a:solidFill>
+                <a:srgbClr val="0D0F14"/>
+              </a:solidFill>
+              <a:latin typeface="Plus Jakarta Sans"/>
+            </a:endParaRPr>
           </a:p>
           <a:p>
             <a:pPr algn="l">
@@ -7623,7 +10242,7 @@
 </file>
 
 <file path=ppt/slides/slide9.xml><?xml version="1.0" encoding="utf-8"?>
-<p:sld xmlns:a="http://schemas.openxmlformats.org/drawingml/2006/main" xmlns:p="http://schemas.openxmlformats.org/presentationml/2006/main" xmlns:r="http://schemas.openxmlformats.org/officeDocument/2006/relationships">
+<p:sld xmlns:a="http://schemas.openxmlformats.org/drawingml/2006/main" xmlns:r="http://schemas.openxmlformats.org/officeDocument/2006/relationships" xmlns:p="http://schemas.openxmlformats.org/presentationml/2006/main">
   <p:cSld>
     <p:spTree>
       <p:nvGrpSpPr>
@@ -7631,7 +10250,14 @@
         <p:cNvGrpSpPr/>
         <p:nvPr/>
       </p:nvGrpSpPr>
-      <p:grpSpPr/>
+      <p:grpSpPr>
+        <a:xfrm>
+          <a:off x="0" y="0"/>
+          <a:ext cx="0" cy="0"/>
+          <a:chOff x="0" y="0"/>
+          <a:chExt cx="0" cy="0"/>
+        </a:xfrm>
+      </p:grpSpPr>
       <p:sp>
         <p:nvSpPr>
           <p:cNvPr id="2" name="Rectangle 1"/>
@@ -7673,6 +10299,7 @@
           <a:lstStyle/>
           <a:p>
             <a:pPr algn="ctr"/>
+            <a:endParaRPr/>
           </a:p>
         </p:txBody>
       </p:sp>
@@ -7693,7 +10320,7 @@
           <a:noFill/>
         </p:spPr>
         <p:txBody>
-          <a:bodyPr wrap="square" lIns="90000" rIns="90000" tIns="54000" bIns="54000" anchor="t">
+          <a:bodyPr wrap="square" lIns="90000" tIns="54000" rIns="90000" bIns="54000" anchor="t">
             <a:spAutoFit/>
           </a:bodyPr>
           <a:lstStyle/>
@@ -7732,7 +10359,7 @@
           <a:noFill/>
         </p:spPr>
         <p:txBody>
-          <a:bodyPr wrap="square" lIns="90000" rIns="90000" tIns="54000" bIns="54000" anchor="t">
+          <a:bodyPr wrap="square" lIns="90000" tIns="54000" rIns="90000" bIns="54000" anchor="t">
             <a:spAutoFit/>
           </a:bodyPr>
           <a:lstStyle/>
@@ -7749,7 +10376,7 @@
                 </a:solidFill>
                 <a:latin typeface="Plus Jakarta Sans"/>
               </a:rPr>
-              <a:t>MVP ao vivo · 9 min</a:t>
+              <a:t>MVP ao vivo · ⟪quem apresenta⟫ · 9 min</a:t>
             </a:r>
           </a:p>
         </p:txBody>
@@ -7771,7 +10398,7 @@
           <a:noFill/>
         </p:spPr>
         <p:txBody>
-          <a:bodyPr wrap="square" lIns="90000" rIns="90000" tIns="54000" bIns="54000" anchor="t">
+          <a:bodyPr wrap="square" lIns="90000" tIns="54000" rIns="90000" bIns="54000" anchor="t">
             <a:spAutoFit/>
           </a:bodyPr>
           <a:lstStyle/>
@@ -7832,7 +10459,7 @@
           </a:fontRef>
         </p:style>
         <p:txBody>
-          <a:bodyPr rtlCol="0" anchor="t" wrap="square" lIns="90000" rIns="90000" tIns="54000" bIns="54000"/>
+          <a:bodyPr wrap="square" lIns="90000" tIns="54000" rIns="90000" bIns="54000" rtlCol="0" anchor="t"/>
           <a:lstStyle/>
           <a:p>
             <a:pPr algn="ctr">
@@ -7869,7 +10496,7 @@
           <a:noFill/>
         </p:spPr>
         <p:txBody>
-          <a:bodyPr wrap="square" lIns="90000" rIns="90000" tIns="54000" bIns="54000" anchor="t">
+          <a:bodyPr wrap="square" lIns="90000" tIns="54000" rIns="90000" bIns="54000" anchor="t">
             <a:spAutoFit/>
           </a:bodyPr>
           <a:lstStyle/>
@@ -7939,7 +10566,7 @@
           </a:fontRef>
         </p:style>
         <p:txBody>
-          <a:bodyPr rtlCol="0" anchor="t" wrap="square" lIns="90000" rIns="90000" tIns="54000" bIns="54000"/>
+          <a:bodyPr wrap="square" lIns="90000" tIns="54000" rIns="90000" bIns="54000" rtlCol="0" anchor="t"/>
           <a:lstStyle/>
           <a:p>
             <a:pPr algn="ctr">
@@ -7976,7 +10603,7 @@
           <a:noFill/>
         </p:spPr>
         <p:txBody>
-          <a:bodyPr wrap="square" lIns="90000" rIns="90000" tIns="54000" bIns="54000" anchor="t">
+          <a:bodyPr wrap="square" lIns="90000" tIns="54000" rIns="90000" bIns="54000" anchor="t">
             <a:spAutoFit/>
           </a:bodyPr>
           <a:lstStyle/>
@@ -8046,7 +10673,7 @@
           </a:fontRef>
         </p:style>
         <p:txBody>
-          <a:bodyPr rtlCol="0" anchor="t" wrap="square" lIns="90000" rIns="90000" tIns="54000" bIns="54000"/>
+          <a:bodyPr wrap="square" lIns="90000" tIns="54000" rIns="90000" bIns="54000" rtlCol="0" anchor="t"/>
           <a:lstStyle/>
           <a:p>
             <a:pPr algn="ctr">
@@ -8083,7 +10710,7 @@
           <a:noFill/>
         </p:spPr>
         <p:txBody>
-          <a:bodyPr wrap="square" lIns="90000" rIns="90000" tIns="54000" bIns="54000" anchor="t">
+          <a:bodyPr wrap="square" lIns="90000" tIns="54000" rIns="90000" bIns="54000" anchor="t">
             <a:spAutoFit/>
           </a:bodyPr>
           <a:lstStyle/>
@@ -8153,7 +10780,7 @@
           </a:fontRef>
         </p:style>
         <p:txBody>
-          <a:bodyPr rtlCol="0" anchor="t" wrap="square" lIns="90000" rIns="90000" tIns="54000" bIns="54000"/>
+          <a:bodyPr wrap="square" lIns="90000" tIns="54000" rIns="90000" bIns="54000" rtlCol="0" anchor="t"/>
           <a:lstStyle/>
           <a:p>
             <a:pPr algn="ctr">
@@ -8190,7 +10817,7 @@
           <a:noFill/>
         </p:spPr>
         <p:txBody>
-          <a:bodyPr wrap="square" lIns="90000" rIns="90000" tIns="54000" bIns="54000" anchor="t">
+          <a:bodyPr wrap="square" lIns="90000" tIns="54000" rIns="90000" bIns="54000" anchor="t">
             <a:spAutoFit/>
           </a:bodyPr>
           <a:lstStyle/>
@@ -8260,7 +10887,7 @@
           </a:fontRef>
         </p:style>
         <p:txBody>
-          <a:bodyPr rtlCol="0" anchor="t" wrap="square" lIns="90000" rIns="90000" tIns="54000" bIns="54000"/>
+          <a:bodyPr wrap="square" lIns="90000" tIns="54000" rIns="90000" bIns="54000" rtlCol="0" anchor="t"/>
           <a:lstStyle/>
           <a:p>
             <a:pPr algn="ctr">
@@ -8297,7 +10924,7 @@
           <a:noFill/>
         </p:spPr>
         <p:txBody>
-          <a:bodyPr wrap="square" lIns="90000" rIns="90000" tIns="54000" bIns="54000" anchor="t">
+          <a:bodyPr wrap="square" lIns="90000" tIns="54000" rIns="90000" bIns="54000" anchor="t">
             <a:spAutoFit/>
           </a:bodyPr>
           <a:lstStyle/>
@@ -8367,7 +10994,7 @@
           </a:fontRef>
         </p:style>
         <p:txBody>
-          <a:bodyPr rtlCol="0" anchor="t" wrap="square" lIns="90000" rIns="90000" tIns="54000" bIns="54000"/>
+          <a:bodyPr wrap="square" lIns="90000" tIns="54000" rIns="90000" bIns="54000" rtlCol="0" anchor="t"/>
           <a:lstStyle/>
           <a:p>
             <a:pPr algn="ctr">
@@ -8404,7 +11031,7 @@
           <a:noFill/>
         </p:spPr>
         <p:txBody>
-          <a:bodyPr wrap="square" lIns="90000" rIns="90000" tIns="54000" bIns="54000" anchor="t">
+          <a:bodyPr wrap="square" lIns="90000" tIns="54000" rIns="90000" bIns="54000" anchor="t">
             <a:spAutoFit/>
           </a:bodyPr>
           <a:lstStyle/>
